--- a/docs/thesis/presentation-egor.pptx
+++ b/docs/thesis/presentation-egor.pptx
@@ -17,6 +17,7 @@
     <p:sldId id="265" r:id="rId16"/>
     <p:sldId id="266" r:id="rId17"/>
     <p:sldId id="267" r:id="rId18"/>
+    <p:sldId id="268" r:id="rId19"/>
   </p:sldIdLst>
   <p:sldSz cx="12191695" cy="6858000" type="screen4x3"/>
   <p:notesSz cx="6858000" cy="9144000"/>
@@ -3583,7 +3584,7 @@
                 </a:solidFill>
                 <a:latin typeface="Calibri"/>
               </a:rPr>
-              <a:t>Интерфейс приложения</a:t>
+              <a:t>Тестирование</a:t>
             </a:r>
           </a:p>
         </p:txBody>
@@ -3631,40 +3632,16 @@
           </a:p>
         </p:txBody>
       </p:sp>
-      <p:pic>
-        <p:nvPicPr>
-          <p:cNvPr id="4" name="Picture 3" descr="screen-07.png"/>
-          <p:cNvPicPr>
-            <a:picLocks noChangeAspect="1"/>
-          </p:cNvPicPr>
-          <p:nvPr/>
-        </p:nvPicPr>
-        <p:blipFill>
-          <a:blip r:embed="rId2"/>
-          <a:stretch>
-            <a:fillRect/>
-          </a:stretch>
-        </p:blipFill>
-        <p:spPr>
-          <a:xfrm>
-            <a:off x="838047" y="1097280"/>
-            <a:ext cx="3322320" cy="4389120"/>
-          </a:xfrm>
-          <a:prstGeom prst="rect">
-            <a:avLst/>
-          </a:prstGeom>
-        </p:spPr>
-      </p:pic>
-      <p:sp>
-        <p:nvSpPr>
-          <p:cNvPr id="5" name="TextBox 4"/>
+      <p:sp>
+        <p:nvSpPr>
+          <p:cNvPr id="4" name="TextBox 3"/>
           <p:cNvSpPr txBox="1"/>
           <p:nvPr/>
         </p:nvSpPr>
         <p:spPr>
           <a:xfrm>
-            <a:off x="838047" y="5623560"/>
-            <a:ext cx="3322320" cy="548640"/>
+            <a:off x="548640" y="1005840"/>
+            <a:ext cx="10972800" cy="731520"/>
           </a:xfrm>
           <a:prstGeom prst="rect">
             <a:avLst/>
@@ -3677,53 +3654,29 @@
           </a:bodyPr>
           <a:lstStyle/>
           <a:p>
-            <a:pPr algn="ctr"/>
-            <a:r>
-              <a:rPr sz="1200" b="0">
-                <a:solidFill>
-                  <a:srgbClr val="555555"/>
-                </a:solidFill>
-                <a:latin typeface="Calibri"/>
-              </a:rPr>
-              <a:t>Каталог упражнений с рекомендациями</a:t>
-            </a:r>
-          </a:p>
-        </p:txBody>
-      </p:sp>
-      <p:pic>
-        <p:nvPicPr>
-          <p:cNvPr id="6" name="Picture 5" descr="screen-08.png"/>
-          <p:cNvPicPr>
-            <a:picLocks noChangeAspect="1"/>
-          </p:cNvPicPr>
-          <p:nvPr/>
-        </p:nvPicPr>
-        <p:blipFill>
-          <a:blip r:embed="rId3"/>
-          <a:stretch>
-            <a:fillRect/>
-          </a:stretch>
-        </p:blipFill>
-        <p:spPr>
-          <a:xfrm>
-            <a:off x="4434687" y="1097280"/>
-            <a:ext cx="3322320" cy="4389120"/>
-          </a:xfrm>
-          <a:prstGeom prst="rect">
-            <a:avLst/>
-          </a:prstGeom>
-        </p:spPr>
-      </p:pic>
-      <p:sp>
-        <p:nvSpPr>
-          <p:cNvPr id="7" name="TextBox 6"/>
+            <a:pPr algn="l"/>
+            <a:r>
+              <a:rPr sz="1800" b="0">
+                <a:solidFill>
+                  <a:srgbClr val="1F1F1F"/>
+                </a:solidFill>
+                <a:latin typeface="Calibri"/>
+              </a:rPr>
+              <a:t>Двухуровневая стратегия: domain/-юниты + интеграционные тесты плюс smoke-тест ML-пайплайна.</a:t>
+            </a:r>
+          </a:p>
+        </p:txBody>
+      </p:sp>
+      <p:sp>
+        <p:nvSpPr>
+          <p:cNvPr id="5" name="TextBox 4"/>
           <p:cNvSpPr txBox="1"/>
           <p:nvPr/>
         </p:nvSpPr>
         <p:spPr>
           <a:xfrm>
-            <a:off x="4434687" y="5623560"/>
-            <a:ext cx="3322320" cy="548640"/>
+            <a:off x="548640" y="2011680"/>
+            <a:ext cx="10972800" cy="4389120"/>
           </a:xfrm>
           <a:prstGeom prst="rect">
             <a:avLst/>
@@ -3736,53 +3689,97 @@
           </a:bodyPr>
           <a:lstStyle/>
           <a:p>
-            <a:pPr algn="ctr"/>
-            <a:r>
-              <a:rPr sz="1200" b="0">
-                <a:solidFill>
-                  <a:srgbClr val="555555"/>
-                </a:solidFill>
-                <a:latin typeface="Calibri"/>
-              </a:rPr>
-              <a:t>Активная тренировка по сгенерированному плану</a:t>
-            </a:r>
-          </a:p>
-        </p:txBody>
-      </p:sp>
-      <p:pic>
-        <p:nvPicPr>
-          <p:cNvPr id="8" name="Picture 7" descr="screen-04.png"/>
-          <p:cNvPicPr>
-            <a:picLocks noChangeAspect="1"/>
-          </p:cNvPicPr>
-          <p:nvPr/>
-        </p:nvPicPr>
-        <p:blipFill>
-          <a:blip r:embed="rId4"/>
-          <a:stretch>
-            <a:fillRect/>
-          </a:stretch>
-        </p:blipFill>
-        <p:spPr>
-          <a:xfrm>
-            <a:off x="8031327" y="1097280"/>
-            <a:ext cx="3322320" cy="4389120"/>
-          </a:xfrm>
-          <a:prstGeom prst="rect">
-            <a:avLst/>
-          </a:prstGeom>
-        </p:spPr>
-      </p:pic>
-      <p:sp>
-        <p:nvSpPr>
-          <p:cNvPr id="9" name="TextBox 8"/>
+            <a:pPr algn="l">
+              <a:spcAft>
+                <a:spcPts val="800"/>
+              </a:spcAft>
+            </a:pPr>
+            <a:r>
+              <a:rPr sz="1700">
+                <a:solidFill>
+                  <a:srgbClr val="1F1F1F"/>
+                </a:solidFill>
+                <a:latin typeface="Calibri"/>
+              </a:rPr>
+              <a:t>•  Composer: чистые unit-тесты без БД — проверки сплита, разнообразия, прогрессии, fallback'а</a:t>
+            </a:r>
+          </a:p>
+          <a:p>
+            <a:pPr algn="l">
+              <a:spcAft>
+                <a:spcPts val="800"/>
+              </a:spcAft>
+            </a:pPr>
+            <a:r>
+              <a:rPr sz="1700">
+                <a:solidFill>
+                  <a:srgbClr val="1F1F1F"/>
+                </a:solidFill>
+                <a:latin typeface="Calibri"/>
+              </a:rPr>
+              <a:t>•  Интеграционные тесты: testcontainers Postgres + savepoint per test, проверка end-to-end POST /api/v1/plans/generate</a:t>
+            </a:r>
+          </a:p>
+          <a:p>
+            <a:pPr algn="l">
+              <a:spcAft>
+                <a:spcPts val="800"/>
+              </a:spcAft>
+            </a:pPr>
+            <a:r>
+              <a:rPr sz="1700">
+                <a:solidFill>
+                  <a:srgbClr val="1F1F1F"/>
+                </a:solidFill>
+                <a:latin typeface="Calibri"/>
+              </a:rPr>
+              <a:t>•  ML-pipeline: smoke-тесты обучения popularity / LR / LightGBM на mini-датасете; проверка артефактов и manifest.json</a:t>
+            </a:r>
+          </a:p>
+          <a:p>
+            <a:pPr algn="l">
+              <a:spcAft>
+                <a:spcPts val="800"/>
+              </a:spcAft>
+            </a:pPr>
+            <a:r>
+              <a:rPr sz="1700">
+                <a:solidFill>
+                  <a:srgbClr val="1F1F1F"/>
+                </a:solidFill>
+                <a:latin typeface="Calibri"/>
+              </a:rPr>
+              <a:t>•  Тесты обработки граничных случаев: профиль не заполнен, оборудование не выбрано, ML-артефакт недоступен (fallback path)</a:t>
+            </a:r>
+          </a:p>
+          <a:p>
+            <a:pPr algn="l">
+              <a:spcAft>
+                <a:spcPts val="800"/>
+              </a:spcAft>
+            </a:pPr>
+            <a:r>
+              <a:rPr sz="1700">
+                <a:solidFill>
+                  <a:srgbClr val="1F1F1F"/>
+                </a:solidFill>
+                <a:latin typeface="Calibri"/>
+              </a:rPr>
+              <a:t>•  make check = lint (ruff) + typecheck (strict mypy на src/) + test; CI-проверка через GitHub Actions на каждый push</a:t>
+            </a:r>
+          </a:p>
+        </p:txBody>
+      </p:sp>
+      <p:sp>
+        <p:nvSpPr>
+          <p:cNvPr id="6" name="TextBox 5"/>
           <p:cNvSpPr txBox="1"/>
           <p:nvPr/>
         </p:nvSpPr>
         <p:spPr>
           <a:xfrm>
-            <a:off x="8031327" y="5623560"/>
-            <a:ext cx="3322320" cy="548640"/>
+            <a:off x="548640" y="6446520"/>
+            <a:ext cx="5486400" cy="274320"/>
           </a:xfrm>
           <a:prstGeom prst="rect">
             <a:avLst/>
@@ -3795,29 +3792,29 @@
           </a:bodyPr>
           <a:lstStyle/>
           <a:p>
-            <a:pPr algn="ctr"/>
-            <a:r>
-              <a:rPr sz="1200" b="0">
+            <a:pPr algn="l"/>
+            <a:r>
+              <a:rPr sz="1000" b="0">
                 <a:solidFill>
                   <a:srgbClr val="555555"/>
                 </a:solidFill>
                 <a:latin typeface="Calibri"/>
               </a:rPr>
-              <a:t>Обзор: статистика и история тренировок</a:t>
-            </a:r>
-          </a:p>
-        </p:txBody>
-      </p:sp>
-      <p:sp>
-        <p:nvSpPr>
-          <p:cNvPr id="10" name="TextBox 9"/>
+              <a:t>Лазарев Е. Д.  ·  ВКР 2026  ·  Fitness Tracker</a:t>
+            </a:r>
+          </a:p>
+        </p:txBody>
+      </p:sp>
+      <p:sp>
+        <p:nvSpPr>
+          <p:cNvPr id="7" name="TextBox 6"/>
           <p:cNvSpPr txBox="1"/>
           <p:nvPr/>
         </p:nvSpPr>
         <p:spPr>
           <a:xfrm>
-            <a:off x="548640" y="6446520"/>
-            <a:ext cx="5486400" cy="274320"/>
+            <a:off x="10515600" y="6446520"/>
+            <a:ext cx="1188720" cy="274320"/>
           </a:xfrm>
           <a:prstGeom prst="rect">
             <a:avLst/>
@@ -3830,7 +3827,7 @@
           </a:bodyPr>
           <a:lstStyle/>
           <a:p>
-            <a:pPr algn="l"/>
+            <a:pPr algn="r"/>
             <a:r>
               <a:rPr sz="1000" b="0">
                 <a:solidFill>
@@ -3838,42 +3835,7 @@
                 </a:solidFill>
                 <a:latin typeface="Calibri"/>
               </a:rPr>
-              <a:t>Лазарев Е. Д.  ·  ВКР 2026  ·  Fitness Tracker</a:t>
-            </a:r>
-          </a:p>
-        </p:txBody>
-      </p:sp>
-      <p:sp>
-        <p:nvSpPr>
-          <p:cNvPr id="11" name="TextBox 10"/>
-          <p:cNvSpPr txBox="1"/>
-          <p:nvPr/>
-        </p:nvSpPr>
-        <p:spPr>
-          <a:xfrm>
-            <a:off x="10515600" y="6446520"/>
-            <a:ext cx="1188720" cy="274320"/>
-          </a:xfrm>
-          <a:prstGeom prst="rect">
-            <a:avLst/>
-          </a:prstGeom>
-          <a:noFill/>
-        </p:spPr>
-        <p:txBody>
-          <a:bodyPr wrap="square">
-            <a:spAutoFit/>
-          </a:bodyPr>
-          <a:lstStyle/>
-          <a:p>
-            <a:pPr algn="r"/>
-            <a:r>
-              <a:rPr sz="1000" b="0">
-                <a:solidFill>
-                  <a:srgbClr val="555555"/>
-                </a:solidFill>
-                <a:latin typeface="Calibri"/>
-              </a:rPr>
-              <a:t>10 / 12</a:t>
+              <a:t>10 / 13</a:t>
             </a:r>
           </a:p>
         </p:txBody>
@@ -3926,7 +3888,7 @@
                 </a:solidFill>
                 <a:latin typeface="Calibri"/>
               </a:rPr>
-              <a:t>Выводы</a:t>
+              <a:t>Интерфейс приложения</a:t>
             </a:r>
           </a:p>
         </p:txBody>
@@ -3974,16 +3936,40 @@
           </a:p>
         </p:txBody>
       </p:sp>
-      <p:sp>
-        <p:nvSpPr>
-          <p:cNvPr id="4" name="TextBox 3"/>
+      <p:pic>
+        <p:nvPicPr>
+          <p:cNvPr id="4" name="Picture 3" descr="screen-07.png"/>
+          <p:cNvPicPr>
+            <a:picLocks noChangeAspect="1"/>
+          </p:cNvPicPr>
+          <p:nvPr/>
+        </p:nvPicPr>
+        <p:blipFill>
+          <a:blip r:embed="rId2"/>
+          <a:stretch>
+            <a:fillRect/>
+          </a:stretch>
+        </p:blipFill>
+        <p:spPr>
+          <a:xfrm>
+            <a:off x="838047" y="1097280"/>
+            <a:ext cx="3322320" cy="4389120"/>
+          </a:xfrm>
+          <a:prstGeom prst="rect">
+            <a:avLst/>
+          </a:prstGeom>
+        </p:spPr>
+      </p:pic>
+      <p:sp>
+        <p:nvSpPr>
+          <p:cNvPr id="5" name="TextBox 4"/>
           <p:cNvSpPr txBox="1"/>
           <p:nvPr/>
         </p:nvSpPr>
         <p:spPr>
           <a:xfrm>
-            <a:off x="548640" y="1097280"/>
-            <a:ext cx="10972800" cy="5029200"/>
+            <a:off x="838047" y="5623560"/>
+            <a:ext cx="3322320" cy="548640"/>
           </a:xfrm>
           <a:prstGeom prst="rect">
             <a:avLst/>
@@ -3996,97 +3982,53 @@
           </a:bodyPr>
           <a:lstStyle/>
           <a:p>
-            <a:pPr algn="l">
-              <a:spcAft>
-                <a:spcPts val="800"/>
-              </a:spcAft>
-            </a:pPr>
-            <a:r>
-              <a:rPr sz="1800">
-                <a:solidFill>
-                  <a:srgbClr val="1F1F1F"/>
-                </a:solidFill>
-                <a:latin typeface="Calibri"/>
-              </a:rPr>
-              <a:t>•  Реализовано кроссплатформенное PWA-приложение с end-to-end интеграцией ML-генератора планов в продакшен</a:t>
-            </a:r>
-          </a:p>
-          <a:p>
-            <a:pPr algn="l">
-              <a:spcAft>
-                <a:spcPts val="800"/>
-              </a:spcAft>
-            </a:pPr>
-            <a:r>
-              <a:rPr sz="1800">
-                <a:solidFill>
-                  <a:srgbClr val="1F1F1F"/>
-                </a:solidFill>
-                <a:latin typeface="Calibri"/>
-              </a:rPr>
-              <a:t>•  Сформирован датасет 97 760 пар user × exercise с rule-based разметкой; обучены и сравнены 3 модели ранжирования</a:t>
-            </a:r>
-          </a:p>
-          <a:p>
-            <a:pPr algn="l">
-              <a:spcAft>
-                <a:spcPts val="800"/>
-              </a:spcAft>
-            </a:pPr>
-            <a:r>
-              <a:rPr sz="1800">
-                <a:solidFill>
-                  <a:srgbClr val="1F1F1F"/>
-                </a:solidFill>
-                <a:latin typeface="Calibri"/>
-              </a:rPr>
-              <a:t>•  LightGBM Classifier обеспечивает ROC-AUC=0.985, PR-AUC=0.993 — превосходит LR (0.939) и popularity-baseline (0.500)</a:t>
-            </a:r>
-          </a:p>
-          <a:p>
-            <a:pPr algn="l">
-              <a:spcAft>
-                <a:spcPts val="800"/>
-              </a:spcAft>
-            </a:pPr>
-            <a:r>
-              <a:rPr sz="1800">
-                <a:solidFill>
-                  <a:srgbClr val="1F1F1F"/>
-                </a:solidFill>
-                <a:latin typeface="Calibri"/>
-              </a:rPr>
-              <a:t>•  Реализован composer — детерминированный сборщик плана, гарантирующий корректность независимо от ML-скоров</a:t>
-            </a:r>
-          </a:p>
-          <a:p>
-            <a:pPr algn="l">
-              <a:spcAft>
-                <a:spcPts val="800"/>
-              </a:spcAft>
-            </a:pPr>
-            <a:r>
-              <a:rPr sz="1800">
-                <a:solidFill>
-                  <a:srgbClr val="1F1F1F"/>
-                </a:solidFill>
-                <a:latin typeface="Calibri"/>
-              </a:rPr>
-              <a:t>•  Архитектура спроектирована с расчётом на отказоустойчивость: rule-based fallback при отсутствии ML-артефакта</a:t>
-            </a:r>
-          </a:p>
-        </p:txBody>
-      </p:sp>
-      <p:sp>
-        <p:nvSpPr>
-          <p:cNvPr id="5" name="TextBox 4"/>
+            <a:pPr algn="ctr"/>
+            <a:r>
+              <a:rPr sz="1200" b="0">
+                <a:solidFill>
+                  <a:srgbClr val="555555"/>
+                </a:solidFill>
+                <a:latin typeface="Calibri"/>
+              </a:rPr>
+              <a:t>Каталог упражнений с рекомендациями</a:t>
+            </a:r>
+          </a:p>
+        </p:txBody>
+      </p:sp>
+      <p:pic>
+        <p:nvPicPr>
+          <p:cNvPr id="6" name="Picture 5" descr="screen-08.png"/>
+          <p:cNvPicPr>
+            <a:picLocks noChangeAspect="1"/>
+          </p:cNvPicPr>
+          <p:nvPr/>
+        </p:nvPicPr>
+        <p:blipFill>
+          <a:blip r:embed="rId3"/>
+          <a:stretch>
+            <a:fillRect/>
+          </a:stretch>
+        </p:blipFill>
+        <p:spPr>
+          <a:xfrm>
+            <a:off x="4434687" y="1097280"/>
+            <a:ext cx="3322320" cy="4389120"/>
+          </a:xfrm>
+          <a:prstGeom prst="rect">
+            <a:avLst/>
+          </a:prstGeom>
+        </p:spPr>
+      </p:pic>
+      <p:sp>
+        <p:nvSpPr>
+          <p:cNvPr id="7" name="TextBox 6"/>
           <p:cNvSpPr txBox="1"/>
           <p:nvPr/>
         </p:nvSpPr>
         <p:spPr>
           <a:xfrm>
-            <a:off x="548640" y="6446520"/>
-            <a:ext cx="5486400" cy="274320"/>
+            <a:off x="4434687" y="5623560"/>
+            <a:ext cx="3322320" cy="548640"/>
           </a:xfrm>
           <a:prstGeom prst="rect">
             <a:avLst/>
@@ -4099,29 +4041,53 @@
           </a:bodyPr>
           <a:lstStyle/>
           <a:p>
-            <a:pPr algn="l"/>
-            <a:r>
-              <a:rPr sz="1000" b="0">
+            <a:pPr algn="ctr"/>
+            <a:r>
+              <a:rPr sz="1200" b="0">
                 <a:solidFill>
                   <a:srgbClr val="555555"/>
                 </a:solidFill>
                 <a:latin typeface="Calibri"/>
               </a:rPr>
-              <a:t>Лазарев Е. Д.  ·  ВКР 2026  ·  Fitness Tracker</a:t>
-            </a:r>
-          </a:p>
-        </p:txBody>
-      </p:sp>
-      <p:sp>
-        <p:nvSpPr>
-          <p:cNvPr id="6" name="TextBox 5"/>
+              <a:t>Активная тренировка по сгенерированному плану</a:t>
+            </a:r>
+          </a:p>
+        </p:txBody>
+      </p:sp>
+      <p:pic>
+        <p:nvPicPr>
+          <p:cNvPr id="8" name="Picture 7" descr="screen-04.png"/>
+          <p:cNvPicPr>
+            <a:picLocks noChangeAspect="1"/>
+          </p:cNvPicPr>
+          <p:nvPr/>
+        </p:nvPicPr>
+        <p:blipFill>
+          <a:blip r:embed="rId4"/>
+          <a:stretch>
+            <a:fillRect/>
+          </a:stretch>
+        </p:blipFill>
+        <p:spPr>
+          <a:xfrm>
+            <a:off x="8031327" y="1097280"/>
+            <a:ext cx="3322320" cy="4389120"/>
+          </a:xfrm>
+          <a:prstGeom prst="rect">
+            <a:avLst/>
+          </a:prstGeom>
+        </p:spPr>
+      </p:pic>
+      <p:sp>
+        <p:nvSpPr>
+          <p:cNvPr id="9" name="TextBox 8"/>
           <p:cNvSpPr txBox="1"/>
           <p:nvPr/>
         </p:nvSpPr>
         <p:spPr>
           <a:xfrm>
-            <a:off x="10515600" y="6446520"/>
-            <a:ext cx="1188720" cy="274320"/>
+            <a:off x="8031327" y="5623560"/>
+            <a:ext cx="3322320" cy="548640"/>
           </a:xfrm>
           <a:prstGeom prst="rect">
             <a:avLst/>
@@ -4134,6 +4100,76 @@
           </a:bodyPr>
           <a:lstStyle/>
           <a:p>
+            <a:pPr algn="ctr"/>
+            <a:r>
+              <a:rPr sz="1200" b="0">
+                <a:solidFill>
+                  <a:srgbClr val="555555"/>
+                </a:solidFill>
+                <a:latin typeface="Calibri"/>
+              </a:rPr>
+              <a:t>Обзор: статистика и история тренировок</a:t>
+            </a:r>
+          </a:p>
+        </p:txBody>
+      </p:sp>
+      <p:sp>
+        <p:nvSpPr>
+          <p:cNvPr id="10" name="TextBox 9"/>
+          <p:cNvSpPr txBox="1"/>
+          <p:nvPr/>
+        </p:nvSpPr>
+        <p:spPr>
+          <a:xfrm>
+            <a:off x="548640" y="6446520"/>
+            <a:ext cx="5486400" cy="274320"/>
+          </a:xfrm>
+          <a:prstGeom prst="rect">
+            <a:avLst/>
+          </a:prstGeom>
+          <a:noFill/>
+        </p:spPr>
+        <p:txBody>
+          <a:bodyPr wrap="square">
+            <a:spAutoFit/>
+          </a:bodyPr>
+          <a:lstStyle/>
+          <a:p>
+            <a:pPr algn="l"/>
+            <a:r>
+              <a:rPr sz="1000" b="0">
+                <a:solidFill>
+                  <a:srgbClr val="555555"/>
+                </a:solidFill>
+                <a:latin typeface="Calibri"/>
+              </a:rPr>
+              <a:t>Лазарев Е. Д.  ·  ВКР 2026  ·  Fitness Tracker</a:t>
+            </a:r>
+          </a:p>
+        </p:txBody>
+      </p:sp>
+      <p:sp>
+        <p:nvSpPr>
+          <p:cNvPr id="11" name="TextBox 10"/>
+          <p:cNvSpPr txBox="1"/>
+          <p:nvPr/>
+        </p:nvSpPr>
+        <p:spPr>
+          <a:xfrm>
+            <a:off x="10515600" y="6446520"/>
+            <a:ext cx="1188720" cy="274320"/>
+          </a:xfrm>
+          <a:prstGeom prst="rect">
+            <a:avLst/>
+          </a:prstGeom>
+          <a:noFill/>
+        </p:spPr>
+        <p:txBody>
+          <a:bodyPr wrap="square">
+            <a:spAutoFit/>
+          </a:bodyPr>
+          <a:lstStyle/>
+          <a:p>
             <a:pPr algn="r"/>
             <a:r>
               <a:rPr sz="1000" b="0">
@@ -4142,7 +4178,7 @@
                 </a:solidFill>
                 <a:latin typeface="Calibri"/>
               </a:rPr>
-              <a:t>11 / 12</a:t>
+              <a:t>11 / 13</a:t>
             </a:r>
           </a:p>
         </p:txBody>
@@ -4167,6 +4203,275 @@
       <p:grpSpPr/>
       <p:sp>
         <p:nvSpPr>
+          <p:cNvPr id="2" name="TextBox 1"/>
+          <p:cNvSpPr txBox="1"/>
+          <p:nvPr/>
+        </p:nvSpPr>
+        <p:spPr>
+          <a:xfrm>
+            <a:off x="548640" y="274320"/>
+            <a:ext cx="10972800" cy="548640"/>
+          </a:xfrm>
+          <a:prstGeom prst="rect">
+            <a:avLst/>
+          </a:prstGeom>
+          <a:noFill/>
+        </p:spPr>
+        <p:txBody>
+          <a:bodyPr wrap="square">
+            <a:spAutoFit/>
+          </a:bodyPr>
+          <a:lstStyle/>
+          <a:p>
+            <a:pPr algn="l"/>
+            <a:r>
+              <a:rPr sz="2800" b="1">
+                <a:solidFill>
+                  <a:srgbClr val="1F1F1F"/>
+                </a:solidFill>
+                <a:latin typeface="Calibri"/>
+              </a:rPr>
+              <a:t>Выводы</a:t>
+            </a:r>
+          </a:p>
+        </p:txBody>
+      </p:sp>
+      <p:sp>
+        <p:nvSpPr>
+          <p:cNvPr id="3" name="Rectangle 2"/>
+          <p:cNvSpPr/>
+          <p:nvPr/>
+        </p:nvSpPr>
+        <p:spPr>
+          <a:xfrm>
+            <a:off x="548640" y="594360"/>
+            <a:ext cx="1097280" cy="54864"/>
+          </a:xfrm>
+          <a:prstGeom prst="rect">
+            <a:avLst/>
+          </a:prstGeom>
+          <a:solidFill>
+            <a:srgbClr val="7F0DF2"/>
+          </a:solidFill>
+          <a:ln>
+            <a:noFill/>
+          </a:ln>
+        </p:spPr>
+        <p:style>
+          <a:lnRef idx="1">
+            <a:schemeClr val="accent1"/>
+          </a:lnRef>
+          <a:fillRef idx="3">
+            <a:schemeClr val="accent1"/>
+          </a:fillRef>
+          <a:effectRef idx="2">
+            <a:schemeClr val="accent1"/>
+          </a:effectRef>
+          <a:fontRef idx="minor">
+            <a:schemeClr val="lt1"/>
+          </a:fontRef>
+        </p:style>
+        <p:txBody>
+          <a:bodyPr rtlCol="0" anchor="ctr"/>
+          <a:lstStyle/>
+          <a:p>
+            <a:pPr algn="ctr"/>
+          </a:p>
+        </p:txBody>
+      </p:sp>
+      <p:sp>
+        <p:nvSpPr>
+          <p:cNvPr id="4" name="TextBox 3"/>
+          <p:cNvSpPr txBox="1"/>
+          <p:nvPr/>
+        </p:nvSpPr>
+        <p:spPr>
+          <a:xfrm>
+            <a:off x="548640" y="1097280"/>
+            <a:ext cx="10972800" cy="5029200"/>
+          </a:xfrm>
+          <a:prstGeom prst="rect">
+            <a:avLst/>
+          </a:prstGeom>
+          <a:noFill/>
+        </p:spPr>
+        <p:txBody>
+          <a:bodyPr wrap="square">
+            <a:spAutoFit/>
+          </a:bodyPr>
+          <a:lstStyle/>
+          <a:p>
+            <a:pPr algn="l">
+              <a:spcAft>
+                <a:spcPts val="800"/>
+              </a:spcAft>
+            </a:pPr>
+            <a:r>
+              <a:rPr sz="1800">
+                <a:solidFill>
+                  <a:srgbClr val="1F1F1F"/>
+                </a:solidFill>
+                <a:latin typeface="Calibri"/>
+              </a:rPr>
+              <a:t>•  Реализовано кроссплатформенное PWA-приложение с end-to-end интеграцией ML-генератора планов в продакшен</a:t>
+            </a:r>
+          </a:p>
+          <a:p>
+            <a:pPr algn="l">
+              <a:spcAft>
+                <a:spcPts val="800"/>
+              </a:spcAft>
+            </a:pPr>
+            <a:r>
+              <a:rPr sz="1800">
+                <a:solidFill>
+                  <a:srgbClr val="1F1F1F"/>
+                </a:solidFill>
+                <a:latin typeface="Calibri"/>
+              </a:rPr>
+              <a:t>•  Сформирован датасет 97 760 пар user × exercise с rule-based разметкой; обучены и сравнены 3 модели ранжирования</a:t>
+            </a:r>
+          </a:p>
+          <a:p>
+            <a:pPr algn="l">
+              <a:spcAft>
+                <a:spcPts val="800"/>
+              </a:spcAft>
+            </a:pPr>
+            <a:r>
+              <a:rPr sz="1800">
+                <a:solidFill>
+                  <a:srgbClr val="1F1F1F"/>
+                </a:solidFill>
+                <a:latin typeface="Calibri"/>
+              </a:rPr>
+              <a:t>•  LightGBM Classifier обеспечивает ROC-AUC=0.985, PR-AUC=0.993 — превосходит LR (0.939) и popularity-baseline (0.500)</a:t>
+            </a:r>
+          </a:p>
+          <a:p>
+            <a:pPr algn="l">
+              <a:spcAft>
+                <a:spcPts val="800"/>
+              </a:spcAft>
+            </a:pPr>
+            <a:r>
+              <a:rPr sz="1800">
+                <a:solidFill>
+                  <a:srgbClr val="1F1F1F"/>
+                </a:solidFill>
+                <a:latin typeface="Calibri"/>
+              </a:rPr>
+              <a:t>•  Реализован composer — детерминированный сборщик плана, гарантирующий корректность независимо от ML-скоров</a:t>
+            </a:r>
+          </a:p>
+          <a:p>
+            <a:pPr algn="l">
+              <a:spcAft>
+                <a:spcPts val="800"/>
+              </a:spcAft>
+            </a:pPr>
+            <a:r>
+              <a:rPr sz="1800">
+                <a:solidFill>
+                  <a:srgbClr val="1F1F1F"/>
+                </a:solidFill>
+                <a:latin typeface="Calibri"/>
+              </a:rPr>
+              <a:t>•  Архитектура спроектирована с расчётом на отказоустойчивость: rule-based fallback при отсутствии ML-артефакта</a:t>
+            </a:r>
+          </a:p>
+        </p:txBody>
+      </p:sp>
+      <p:sp>
+        <p:nvSpPr>
+          <p:cNvPr id="5" name="TextBox 4"/>
+          <p:cNvSpPr txBox="1"/>
+          <p:nvPr/>
+        </p:nvSpPr>
+        <p:spPr>
+          <a:xfrm>
+            <a:off x="548640" y="6446520"/>
+            <a:ext cx="5486400" cy="274320"/>
+          </a:xfrm>
+          <a:prstGeom prst="rect">
+            <a:avLst/>
+          </a:prstGeom>
+          <a:noFill/>
+        </p:spPr>
+        <p:txBody>
+          <a:bodyPr wrap="square">
+            <a:spAutoFit/>
+          </a:bodyPr>
+          <a:lstStyle/>
+          <a:p>
+            <a:pPr algn="l"/>
+            <a:r>
+              <a:rPr sz="1000" b="0">
+                <a:solidFill>
+                  <a:srgbClr val="555555"/>
+                </a:solidFill>
+                <a:latin typeface="Calibri"/>
+              </a:rPr>
+              <a:t>Лазарев Е. Д.  ·  ВКР 2026  ·  Fitness Tracker</a:t>
+            </a:r>
+          </a:p>
+        </p:txBody>
+      </p:sp>
+      <p:sp>
+        <p:nvSpPr>
+          <p:cNvPr id="6" name="TextBox 5"/>
+          <p:cNvSpPr txBox="1"/>
+          <p:nvPr/>
+        </p:nvSpPr>
+        <p:spPr>
+          <a:xfrm>
+            <a:off x="10515600" y="6446520"/>
+            <a:ext cx="1188720" cy="274320"/>
+          </a:xfrm>
+          <a:prstGeom prst="rect">
+            <a:avLst/>
+          </a:prstGeom>
+          <a:noFill/>
+        </p:spPr>
+        <p:txBody>
+          <a:bodyPr wrap="square">
+            <a:spAutoFit/>
+          </a:bodyPr>
+          <a:lstStyle/>
+          <a:p>
+            <a:pPr algn="r"/>
+            <a:r>
+              <a:rPr sz="1000" b="0">
+                <a:solidFill>
+                  <a:srgbClr val="555555"/>
+                </a:solidFill>
+                <a:latin typeface="Calibri"/>
+              </a:rPr>
+              <a:t>12 / 13</a:t>
+            </a:r>
+          </a:p>
+        </p:txBody>
+      </p:sp>
+    </p:spTree>
+  </p:cSld>
+  <p:clrMapOvr>
+    <a:masterClrMapping/>
+  </p:clrMapOvr>
+</p:sld>
+</file>
+
+<file path=ppt/slides/slide13.xml><?xml version="1.0" encoding="utf-8"?>
+<p:sld xmlns:a="http://schemas.openxmlformats.org/drawingml/2006/main" xmlns:p="http://schemas.openxmlformats.org/presentationml/2006/main" xmlns:r="http://schemas.openxmlformats.org/officeDocument/2006/relationships">
+  <p:cSld>
+    <p:spTree>
+      <p:nvGrpSpPr>
+        <p:cNvPr id="1" name=""/>
+        <p:cNvGrpSpPr/>
+        <p:nvPr/>
+      </p:nvGrpSpPr>
+      <p:grpSpPr/>
+      <p:sp>
+        <p:nvSpPr>
           <p:cNvPr id="2" name="Rectangle 1"/>
           <p:cNvSpPr/>
           <p:nvPr/>
@@ -4674,7 +4979,7 @@
                 </a:solidFill>
                 <a:latin typeface="Calibri"/>
               </a:rPr>
-              <a:t>2 / 12</a:t>
+              <a:t>2 / 13</a:t>
             </a:r>
           </a:p>
         </p:txBody>
@@ -5064,7 +5369,7 @@
                 </a:solidFill>
                 <a:latin typeface="Calibri"/>
               </a:rPr>
-              <a:t>3 / 12</a:t>
+              <a:t>3 / 13</a:t>
             </a:r>
           </a:p>
         </p:txBody>
@@ -5522,7 +5827,7 @@
                 </a:solidFill>
                 <a:latin typeface="Calibri"/>
               </a:rPr>
-              <a:t>4 / 12</a:t>
+              <a:t>4 / 13</a:t>
             </a:r>
           </a:p>
         </p:txBody>
@@ -5708,7 +6013,7 @@
                 </a:solidFill>
                 <a:latin typeface="Calibri"/>
               </a:rPr>
-              <a:t>•  Стадия 2 (composer): обход ранжированного каталога с проверкой сплита (push/pull/legs), оборудования, баланса compound/isolation</a:t>
+              <a:t>•  Прод-артефакт — один LightGBM-бустер на 320 деревьев и 36 признаков профиля + упражнения; бинарная классификация с целевой функцией log-loss и is_unbalance=True для несбалансированных меток</a:t>
             </a:r>
           </a:p>
           <a:p>
@@ -5724,7 +6029,7 @@
                 </a:solidFill>
                 <a:latin typeface="Calibri"/>
               </a:rPr>
-              <a:t>•  Алгоритм прогрессии: на каждой неделе цикла — увеличение веса/повторов по правилам линейной/двойной прогрессии</a:t>
+              <a:t>•  Стадия 2 (composer): обход ранжированного каталога с проверкой сплита (push/pull/legs), оборудования, баланса compound/isolation</a:t>
             </a:r>
           </a:p>
           <a:p>
@@ -5826,7 +6131,7 @@
                 </a:solidFill>
                 <a:latin typeface="Calibri"/>
               </a:rPr>
-              <a:t>5 / 12</a:t>
+              <a:t>5 / 13</a:t>
             </a:r>
           </a:p>
         </p:txBody>
@@ -6130,7 +6435,7 @@
                 </a:solidFill>
                 <a:latin typeface="Calibri"/>
               </a:rPr>
-              <a:t>6 / 12</a:t>
+              <a:t>6 / 13</a:t>
             </a:r>
           </a:p>
         </p:txBody>
@@ -6355,7 +6660,7 @@
                 </a:solidFill>
                 <a:latin typeface="Calibri"/>
               </a:rPr>
-              <a:t>7 / 12</a:t>
+              <a:t>7 / 13</a:t>
             </a:r>
           </a:p>
         </p:txBody>
@@ -6408,7 +6713,7 @@
                 </a:solidFill>
                 <a:latin typeface="Calibri"/>
               </a:rPr>
-              <a:t>Composer: детерминированная сборка плана</a:t>
+              <a:t>Что внутри модели: feature importance</a:t>
             </a:r>
           </a:p>
         </p:txBody>
@@ -6456,16 +6761,40 @@
           </a:p>
         </p:txBody>
       </p:sp>
-      <p:sp>
-        <p:nvSpPr>
-          <p:cNvPr id="4" name="TextBox 3"/>
+      <p:pic>
+        <p:nvPicPr>
+          <p:cNvPr id="4" name="Picture 3" descr="image.png"/>
+          <p:cNvPicPr>
+            <a:picLocks noChangeAspect="1"/>
+          </p:cNvPicPr>
+          <p:nvPr/>
+        </p:nvPicPr>
+        <p:blipFill>
+          <a:blip r:embed="rId2"/>
+          <a:stretch>
+            <a:fillRect/>
+          </a:stretch>
+        </p:blipFill>
+        <p:spPr>
+          <a:xfrm>
+            <a:off x="1097280" y="1005840"/>
+            <a:ext cx="10058400" cy="5181600"/>
+          </a:xfrm>
+          <a:prstGeom prst="rect">
+            <a:avLst/>
+          </a:prstGeom>
+        </p:spPr>
+      </p:pic>
+      <p:sp>
+        <p:nvSpPr>
+          <p:cNvPr id="5" name="TextBox 4"/>
           <p:cNvSpPr txBox="1"/>
           <p:nvPr/>
         </p:nvSpPr>
         <p:spPr>
           <a:xfrm>
-            <a:off x="548640" y="1005840"/>
-            <a:ext cx="10972800" cy="731520"/>
+            <a:off x="548640" y="5852160"/>
+            <a:ext cx="10972800" cy="457200"/>
           </a:xfrm>
           <a:prstGeom prst="rect">
             <a:avLst/>
@@ -6478,29 +6807,29 @@
           </a:bodyPr>
           <a:lstStyle/>
           <a:p>
-            <a:pPr algn="l"/>
-            <a:r>
-              <a:rPr sz="1800" b="0">
-                <a:solidFill>
-                  <a:srgbClr val="1F1F1F"/>
-                </a:solidFill>
-                <a:latin typeface="Calibri"/>
-              </a:rPr>
-              <a:t>Чистая функция в domain/-слое: принимает ExercisePool + ML-scores, возвращает PlannedPlan без обращений к БД.</a:t>
-            </a:r>
-          </a:p>
-        </p:txBody>
-      </p:sp>
-      <p:sp>
-        <p:nvSpPr>
-          <p:cNvPr id="5" name="TextBox 4"/>
+            <a:pPr algn="ctr"/>
+            <a:r>
+              <a:rPr sz="1400" b="0">
+                <a:solidFill>
+                  <a:srgbClr val="555555"/>
+                </a:solidFill>
+                <a:latin typeface="Calibri"/>
+              </a:rPr>
+              <a:t>Главный сигнал — оборудование (user_equipment_count); это методологически осмысленно: рекомендовать упражнение со штангой пользователю без штанги не имеет смысла. Цель — на третьем месте.</a:t>
+            </a:r>
+          </a:p>
+        </p:txBody>
+      </p:sp>
+      <p:sp>
+        <p:nvSpPr>
+          <p:cNvPr id="6" name="TextBox 5"/>
           <p:cNvSpPr txBox="1"/>
           <p:nvPr/>
         </p:nvSpPr>
         <p:spPr>
           <a:xfrm>
-            <a:off x="548640" y="2011680"/>
-            <a:ext cx="10972800" cy="4389120"/>
+            <a:off x="548640" y="6446520"/>
+            <a:ext cx="5486400" cy="274320"/>
           </a:xfrm>
           <a:prstGeom prst="rect">
             <a:avLst/>
@@ -6513,97 +6842,29 @@
           </a:bodyPr>
           <a:lstStyle/>
           <a:p>
-            <a:pPr algn="l">
-              <a:spcAft>
-                <a:spcPts val="800"/>
-              </a:spcAft>
-            </a:pPr>
-            <a:r>
-              <a:rPr sz="1700">
-                <a:solidFill>
-                  <a:srgbClr val="1F1F1F"/>
-                </a:solidFill>
-                <a:latin typeface="Calibri"/>
-              </a:rPr>
-              <a:t>•  Вход: каталог упражнений с rule-based score и опционально ML-scores; профиль пользователя; параметры цикла (4 недели по умолчанию)</a:t>
-            </a:r>
-          </a:p>
-          <a:p>
-            <a:pPr algn="l">
-              <a:spcAft>
-                <a:spcPts val="800"/>
-              </a:spcAft>
-            </a:pPr>
-            <a:r>
-              <a:rPr sz="1700">
-                <a:solidFill>
-                  <a:srgbClr val="1F1F1F"/>
-                </a:solidFill>
-                <a:latin typeface="Calibri"/>
-              </a:rPr>
-              <a:t>•  Шаг 1: сплит на дни недели по принципу push/pull/legs (или fullbody при частоте &lt; 4 в неделю)</a:t>
-            </a:r>
-          </a:p>
-          <a:p>
-            <a:pPr algn="l">
-              <a:spcAft>
-                <a:spcPts val="800"/>
-              </a:spcAft>
-            </a:pPr>
-            <a:r>
-              <a:rPr sz="1700">
-                <a:solidFill>
-                  <a:srgbClr val="1F1F1F"/>
-                </a:solidFill>
-                <a:latin typeface="Calibri"/>
-              </a:rPr>
-              <a:t>•  Шаг 2: обход ранжированного каталога с гарантиями — баланс compound/isolation, разнообразие групп мышц, соответствие оборудованию</a:t>
-            </a:r>
-          </a:p>
-          <a:p>
-            <a:pPr algn="l">
-              <a:spcAft>
-                <a:spcPts val="800"/>
-              </a:spcAft>
-            </a:pPr>
-            <a:r>
-              <a:rPr sz="1700">
-                <a:solidFill>
-                  <a:srgbClr val="1F1F1F"/>
-                </a:solidFill>
-                <a:latin typeface="Calibri"/>
-              </a:rPr>
-              <a:t>•  Шаг 3: прогрессия — линейная по неделям цикла с deload-неделей при необходимости (REQ-08 spec 006)</a:t>
-            </a:r>
-          </a:p>
-          <a:p>
-            <a:pPr algn="l">
-              <a:spcAft>
-                <a:spcPts val="800"/>
-              </a:spcAft>
-            </a:pPr>
-            <a:r>
-              <a:rPr sz="1700">
-                <a:solidFill>
-                  <a:srgbClr val="1F1F1F"/>
-                </a:solidFill>
-                <a:latin typeface="Calibri"/>
-              </a:rPr>
-              <a:t>•  Изоляция от БД: composer тестируется чистыми unit-тестами без PostgreSQL, что даёт быстрый CI и простоту дебага</a:t>
-            </a:r>
-          </a:p>
-        </p:txBody>
-      </p:sp>
-      <p:sp>
-        <p:nvSpPr>
-          <p:cNvPr id="6" name="TextBox 5"/>
+            <a:pPr algn="l"/>
+            <a:r>
+              <a:rPr sz="1000" b="0">
+                <a:solidFill>
+                  <a:srgbClr val="555555"/>
+                </a:solidFill>
+                <a:latin typeface="Calibri"/>
+              </a:rPr>
+              <a:t>Лазарев Е. Д.  ·  ВКР 2026  ·  Fitness Tracker</a:t>
+            </a:r>
+          </a:p>
+        </p:txBody>
+      </p:sp>
+      <p:sp>
+        <p:nvSpPr>
+          <p:cNvPr id="7" name="TextBox 6"/>
           <p:cNvSpPr txBox="1"/>
           <p:nvPr/>
         </p:nvSpPr>
         <p:spPr>
           <a:xfrm>
-            <a:off x="548640" y="6446520"/>
-            <a:ext cx="5486400" cy="274320"/>
+            <a:off x="10515600" y="6446520"/>
+            <a:ext cx="1188720" cy="274320"/>
           </a:xfrm>
           <a:prstGeom prst="rect">
             <a:avLst/>
@@ -6616,7 +6877,7 @@
           </a:bodyPr>
           <a:lstStyle/>
           <a:p>
-            <a:pPr algn="l"/>
+            <a:pPr algn="r"/>
             <a:r>
               <a:rPr sz="1000" b="0">
                 <a:solidFill>
@@ -6624,42 +6885,7 @@
                 </a:solidFill>
                 <a:latin typeface="Calibri"/>
               </a:rPr>
-              <a:t>Лазарев Е. Д.  ·  ВКР 2026  ·  Fitness Tracker</a:t>
-            </a:r>
-          </a:p>
-        </p:txBody>
-      </p:sp>
-      <p:sp>
-        <p:nvSpPr>
-          <p:cNvPr id="7" name="TextBox 6"/>
-          <p:cNvSpPr txBox="1"/>
-          <p:nvPr/>
-        </p:nvSpPr>
-        <p:spPr>
-          <a:xfrm>
-            <a:off x="10515600" y="6446520"/>
-            <a:ext cx="1188720" cy="274320"/>
-          </a:xfrm>
-          <a:prstGeom prst="rect">
-            <a:avLst/>
-          </a:prstGeom>
-          <a:noFill/>
-        </p:spPr>
-        <p:txBody>
-          <a:bodyPr wrap="square">
-            <a:spAutoFit/>
-          </a:bodyPr>
-          <a:lstStyle/>
-          <a:p>
-            <a:pPr algn="r"/>
-            <a:r>
-              <a:rPr sz="1000" b="0">
-                <a:solidFill>
-                  <a:srgbClr val="555555"/>
-                </a:solidFill>
-                <a:latin typeface="Calibri"/>
-              </a:rPr>
-              <a:t>8 / 12</a:t>
+              <a:t>8 / 13</a:t>
             </a:r>
           </a:p>
         </p:txBody>
@@ -6712,7 +6938,7 @@
                 </a:solidFill>
                 <a:latin typeface="Calibri"/>
               </a:rPr>
-              <a:t>Тестирование</a:t>
+              <a:t>Composer: детерминированная сборка плана</a:t>
             </a:r>
           </a:p>
         </p:txBody>
@@ -6790,7 +7016,7 @@
                 </a:solidFill>
                 <a:latin typeface="Calibri"/>
               </a:rPr>
-              <a:t>Двухуровневая стратегия: domain/-юниты + интеграционные тесты плюс smoke-тест ML-пайплайна.</a:t>
+              <a:t>Чистая функция в domain/-слое: принимает ExercisePool + ML-scores, возвращает PlannedPlan без обращений к БД.</a:t>
             </a:r>
           </a:p>
         </p:txBody>
@@ -6829,7 +7055,7 @@
                 </a:solidFill>
                 <a:latin typeface="Calibri"/>
               </a:rPr>
-              <a:t>•  Composer: чистые unit-тесты без БД — проверки сплита, разнообразия, прогрессии, fallback'а</a:t>
+              <a:t>•  Вход: каталог упражнений с rule-based score и опционально ML-scores; профиль пользователя; параметры цикла (4 недели по умолчанию)</a:t>
             </a:r>
           </a:p>
           <a:p>
@@ -6845,7 +7071,7 @@
                 </a:solidFill>
                 <a:latin typeface="Calibri"/>
               </a:rPr>
-              <a:t>•  Интеграционные тесты: testcontainers Postgres + savepoint per test, проверка end-to-end POST /api/v1/plans/generate</a:t>
+              <a:t>•  Шаг 1: сплит на дни недели по принципу push/pull/legs (или fullbody при частоте &lt; 4 в неделю)</a:t>
             </a:r>
           </a:p>
           <a:p>
@@ -6861,7 +7087,7 @@
                 </a:solidFill>
                 <a:latin typeface="Calibri"/>
               </a:rPr>
-              <a:t>•  ML-pipeline: smoke-тесты обучения popularity / LR / LightGBM на mini-датасете; проверка артефактов и manifest.json</a:t>
+              <a:t>•  Шаг 2: обход ранжированного каталога с гарантиями — баланс compound/isolation, разнообразие групп мышц, соответствие оборудованию</a:t>
             </a:r>
           </a:p>
           <a:p>
@@ -6877,7 +7103,7 @@
                 </a:solidFill>
                 <a:latin typeface="Calibri"/>
               </a:rPr>
-              <a:t>•  Тесты обработки граничных случаев: профиль не заполнен, оборудование не выбрано, ML-артефакт недоступен (fallback path)</a:t>
+              <a:t>•  Шаг 3: прогрессия — линейная по неделям цикла с deload-неделей при необходимости (REQ-08 spec 006)</a:t>
             </a:r>
           </a:p>
           <a:p>
@@ -6893,7 +7119,7 @@
                 </a:solidFill>
                 <a:latin typeface="Calibri"/>
               </a:rPr>
-              <a:t>•  make check = lint (ruff) + typecheck (strict mypy на src/) + test; CI-проверка через GitHub Actions на каждый push</a:t>
+              <a:t>•  Изоляция от БД: composer тестируется чистыми unit-тестами без PostgreSQL, что даёт быстрый CI и простоту дебага</a:t>
             </a:r>
           </a:p>
         </p:txBody>
@@ -6963,7 +7189,7 @@
                 </a:solidFill>
                 <a:latin typeface="Calibri"/>
               </a:rPr>
-              <a:t>9 / 12</a:t>
+              <a:t>9 / 13</a:t>
             </a:r>
           </a:p>
         </p:txBody>

--- a/docs/thesis/presentation-egor.pptx
+++ b/docs/thesis/presentation-egor.pptx
@@ -18,6 +18,7 @@
     <p:sldId id="266" r:id="rId17"/>
     <p:sldId id="267" r:id="rId18"/>
     <p:sldId id="268" r:id="rId19"/>
+    <p:sldId id="269" r:id="rId20"/>
   </p:sldIdLst>
   <p:sldSz cx="12191695" cy="6858000" type="screen4x3"/>
   <p:notesSz cx="6858000" cy="9144000"/>
@@ -3584,7 +3585,7 @@
                 </a:solidFill>
                 <a:latin typeface="Calibri"/>
               </a:rPr>
-              <a:t>Тестирование</a:t>
+              <a:t>Composer: детерминированная сборка плана</a:t>
             </a:r>
           </a:p>
         </p:txBody>
@@ -3662,7 +3663,7 @@
                 </a:solidFill>
                 <a:latin typeface="Calibri"/>
               </a:rPr>
-              <a:t>Двухуровневая стратегия: domain/-юниты + интеграционные тесты плюс smoke-тест ML-пайплайна.</a:t>
+              <a:t>Чистая функция в domain/-слое: принимает ExercisePool + ML-scores, возвращает PlannedPlan без обращений к БД.</a:t>
             </a:r>
           </a:p>
         </p:txBody>
@@ -3701,7 +3702,7 @@
                 </a:solidFill>
                 <a:latin typeface="Calibri"/>
               </a:rPr>
-              <a:t>•  Composer: чистые unit-тесты без БД — проверки сплита, разнообразия, прогрессии, fallback'а</a:t>
+              <a:t>•  Вход: каталог упражнений с rule-based score и опционально ML-scores; профиль пользователя; параметры цикла (4 недели по умолчанию)</a:t>
             </a:r>
           </a:p>
           <a:p>
@@ -3717,7 +3718,7 @@
                 </a:solidFill>
                 <a:latin typeface="Calibri"/>
               </a:rPr>
-              <a:t>•  Интеграционные тесты: testcontainers Postgres + savepoint per test, проверка end-to-end POST /api/v1/plans/generate</a:t>
+              <a:t>•  Шаг 1: сплит на дни недели по принципу push/pull/legs (или fullbody при частоте &lt; 4 в неделю)</a:t>
             </a:r>
           </a:p>
           <a:p>
@@ -3733,7 +3734,7 @@
                 </a:solidFill>
                 <a:latin typeface="Calibri"/>
               </a:rPr>
-              <a:t>•  ML-pipeline: smoke-тесты обучения popularity / LR / LightGBM на mini-датасете; проверка артефактов и manifest.json</a:t>
+              <a:t>•  Шаг 2: обход ранжированного каталога с гарантиями — баланс compound/isolation, разнообразие групп мышц, соответствие оборудованию</a:t>
             </a:r>
           </a:p>
           <a:p>
@@ -3749,7 +3750,7 @@
                 </a:solidFill>
                 <a:latin typeface="Calibri"/>
               </a:rPr>
-              <a:t>•  Тесты обработки граничных случаев: профиль не заполнен, оборудование не выбрано, ML-артефакт недоступен (fallback path)</a:t>
+              <a:t>•  Шаг 3: прогрессия — линейная по неделям цикла с deload-неделей при необходимости (REQ-08 spec 006)</a:t>
             </a:r>
           </a:p>
           <a:p>
@@ -3765,7 +3766,7 @@
                 </a:solidFill>
                 <a:latin typeface="Calibri"/>
               </a:rPr>
-              <a:t>•  make check = lint (ruff) + typecheck (strict mypy на src/) + test; CI-проверка через GitHub Actions на каждый push</a:t>
+              <a:t>•  Изоляция от БД: composer тестируется чистыми unit-тестами без PostgreSQL, что даёт быстрый CI и простоту дебага</a:t>
             </a:r>
           </a:p>
         </p:txBody>
@@ -3835,7 +3836,7 @@
                 </a:solidFill>
                 <a:latin typeface="Calibri"/>
               </a:rPr>
-              <a:t>10 / 13</a:t>
+              <a:t>10 / 14</a:t>
             </a:r>
           </a:p>
         </p:txBody>
@@ -3888,7 +3889,7 @@
                 </a:solidFill>
                 <a:latin typeface="Calibri"/>
               </a:rPr>
-              <a:t>Интерфейс приложения</a:t>
+              <a:t>Тестирование</a:t>
             </a:r>
           </a:p>
         </p:txBody>
@@ -3936,40 +3937,16 @@
           </a:p>
         </p:txBody>
       </p:sp>
-      <p:pic>
-        <p:nvPicPr>
-          <p:cNvPr id="4" name="Picture 3" descr="screen-07.png"/>
-          <p:cNvPicPr>
-            <a:picLocks noChangeAspect="1"/>
-          </p:cNvPicPr>
-          <p:nvPr/>
-        </p:nvPicPr>
-        <p:blipFill>
-          <a:blip r:embed="rId2"/>
-          <a:stretch>
-            <a:fillRect/>
-          </a:stretch>
-        </p:blipFill>
-        <p:spPr>
-          <a:xfrm>
-            <a:off x="838047" y="1097280"/>
-            <a:ext cx="3322320" cy="4389120"/>
-          </a:xfrm>
-          <a:prstGeom prst="rect">
-            <a:avLst/>
-          </a:prstGeom>
-        </p:spPr>
-      </p:pic>
-      <p:sp>
-        <p:nvSpPr>
-          <p:cNvPr id="5" name="TextBox 4"/>
+      <p:sp>
+        <p:nvSpPr>
+          <p:cNvPr id="4" name="TextBox 3"/>
           <p:cNvSpPr txBox="1"/>
           <p:nvPr/>
         </p:nvSpPr>
         <p:spPr>
           <a:xfrm>
-            <a:off x="838047" y="5623560"/>
-            <a:ext cx="3322320" cy="548640"/>
+            <a:off x="548640" y="1005840"/>
+            <a:ext cx="10972800" cy="731520"/>
           </a:xfrm>
           <a:prstGeom prst="rect">
             <a:avLst/>
@@ -3982,53 +3959,29 @@
           </a:bodyPr>
           <a:lstStyle/>
           <a:p>
-            <a:pPr algn="ctr"/>
-            <a:r>
-              <a:rPr sz="1200" b="0">
-                <a:solidFill>
-                  <a:srgbClr val="555555"/>
-                </a:solidFill>
-                <a:latin typeface="Calibri"/>
-              </a:rPr>
-              <a:t>Каталог упражнений с рекомендациями</a:t>
-            </a:r>
-          </a:p>
-        </p:txBody>
-      </p:sp>
-      <p:pic>
-        <p:nvPicPr>
-          <p:cNvPr id="6" name="Picture 5" descr="screen-08.png"/>
-          <p:cNvPicPr>
-            <a:picLocks noChangeAspect="1"/>
-          </p:cNvPicPr>
-          <p:nvPr/>
-        </p:nvPicPr>
-        <p:blipFill>
-          <a:blip r:embed="rId3"/>
-          <a:stretch>
-            <a:fillRect/>
-          </a:stretch>
-        </p:blipFill>
-        <p:spPr>
-          <a:xfrm>
-            <a:off x="4434687" y="1097280"/>
-            <a:ext cx="3322320" cy="4389120"/>
-          </a:xfrm>
-          <a:prstGeom prst="rect">
-            <a:avLst/>
-          </a:prstGeom>
-        </p:spPr>
-      </p:pic>
-      <p:sp>
-        <p:nvSpPr>
-          <p:cNvPr id="7" name="TextBox 6"/>
+            <a:pPr algn="l"/>
+            <a:r>
+              <a:rPr sz="1800" b="0">
+                <a:solidFill>
+                  <a:srgbClr val="1F1F1F"/>
+                </a:solidFill>
+                <a:latin typeface="Calibri"/>
+              </a:rPr>
+              <a:t>Двухуровневая стратегия: domain/-юниты + интеграционные тесты плюс smoke-тест ML-пайплайна.</a:t>
+            </a:r>
+          </a:p>
+        </p:txBody>
+      </p:sp>
+      <p:sp>
+        <p:nvSpPr>
+          <p:cNvPr id="5" name="TextBox 4"/>
           <p:cNvSpPr txBox="1"/>
           <p:nvPr/>
         </p:nvSpPr>
         <p:spPr>
           <a:xfrm>
-            <a:off x="4434687" y="5623560"/>
-            <a:ext cx="3322320" cy="548640"/>
+            <a:off x="548640" y="2011680"/>
+            <a:ext cx="10972800" cy="4389120"/>
           </a:xfrm>
           <a:prstGeom prst="rect">
             <a:avLst/>
@@ -4041,53 +3994,97 @@
           </a:bodyPr>
           <a:lstStyle/>
           <a:p>
-            <a:pPr algn="ctr"/>
-            <a:r>
-              <a:rPr sz="1200" b="0">
-                <a:solidFill>
-                  <a:srgbClr val="555555"/>
-                </a:solidFill>
-                <a:latin typeface="Calibri"/>
-              </a:rPr>
-              <a:t>Активная тренировка по сгенерированному плану</a:t>
-            </a:r>
-          </a:p>
-        </p:txBody>
-      </p:sp>
-      <p:pic>
-        <p:nvPicPr>
-          <p:cNvPr id="8" name="Picture 7" descr="screen-04.png"/>
-          <p:cNvPicPr>
-            <a:picLocks noChangeAspect="1"/>
-          </p:cNvPicPr>
-          <p:nvPr/>
-        </p:nvPicPr>
-        <p:blipFill>
-          <a:blip r:embed="rId4"/>
-          <a:stretch>
-            <a:fillRect/>
-          </a:stretch>
-        </p:blipFill>
-        <p:spPr>
-          <a:xfrm>
-            <a:off x="8031327" y="1097280"/>
-            <a:ext cx="3322320" cy="4389120"/>
-          </a:xfrm>
-          <a:prstGeom prst="rect">
-            <a:avLst/>
-          </a:prstGeom>
-        </p:spPr>
-      </p:pic>
-      <p:sp>
-        <p:nvSpPr>
-          <p:cNvPr id="9" name="TextBox 8"/>
+            <a:pPr algn="l">
+              <a:spcAft>
+                <a:spcPts val="800"/>
+              </a:spcAft>
+            </a:pPr>
+            <a:r>
+              <a:rPr sz="1700">
+                <a:solidFill>
+                  <a:srgbClr val="1F1F1F"/>
+                </a:solidFill>
+                <a:latin typeface="Calibri"/>
+              </a:rPr>
+              <a:t>•  Composer: чистые unit-тесты без БД — проверки сплита, разнообразия, прогрессии, fallback'а</a:t>
+            </a:r>
+          </a:p>
+          <a:p>
+            <a:pPr algn="l">
+              <a:spcAft>
+                <a:spcPts val="800"/>
+              </a:spcAft>
+            </a:pPr>
+            <a:r>
+              <a:rPr sz="1700">
+                <a:solidFill>
+                  <a:srgbClr val="1F1F1F"/>
+                </a:solidFill>
+                <a:latin typeface="Calibri"/>
+              </a:rPr>
+              <a:t>•  Интеграционные тесты: testcontainers Postgres + savepoint per test, проверка end-to-end POST /api/v1/plans/generate</a:t>
+            </a:r>
+          </a:p>
+          <a:p>
+            <a:pPr algn="l">
+              <a:spcAft>
+                <a:spcPts val="800"/>
+              </a:spcAft>
+            </a:pPr>
+            <a:r>
+              <a:rPr sz="1700">
+                <a:solidFill>
+                  <a:srgbClr val="1F1F1F"/>
+                </a:solidFill>
+                <a:latin typeface="Calibri"/>
+              </a:rPr>
+              <a:t>•  ML-pipeline: smoke-тесты обучения popularity / LR / LightGBM на mini-датасете; проверка артефактов и manifest.json</a:t>
+            </a:r>
+          </a:p>
+          <a:p>
+            <a:pPr algn="l">
+              <a:spcAft>
+                <a:spcPts val="800"/>
+              </a:spcAft>
+            </a:pPr>
+            <a:r>
+              <a:rPr sz="1700">
+                <a:solidFill>
+                  <a:srgbClr val="1F1F1F"/>
+                </a:solidFill>
+                <a:latin typeface="Calibri"/>
+              </a:rPr>
+              <a:t>•  Тесты обработки граничных случаев: профиль не заполнен, оборудование не выбрано, ML-артефакт недоступен (fallback path)</a:t>
+            </a:r>
+          </a:p>
+          <a:p>
+            <a:pPr algn="l">
+              <a:spcAft>
+                <a:spcPts val="800"/>
+              </a:spcAft>
+            </a:pPr>
+            <a:r>
+              <a:rPr sz="1700">
+                <a:solidFill>
+                  <a:srgbClr val="1F1F1F"/>
+                </a:solidFill>
+                <a:latin typeface="Calibri"/>
+              </a:rPr>
+              <a:t>•  make check = lint (ruff) + typecheck (strict mypy на src/) + test; CI-проверка через GitHub Actions на каждый push</a:t>
+            </a:r>
+          </a:p>
+        </p:txBody>
+      </p:sp>
+      <p:sp>
+        <p:nvSpPr>
+          <p:cNvPr id="6" name="TextBox 5"/>
           <p:cNvSpPr txBox="1"/>
           <p:nvPr/>
         </p:nvSpPr>
         <p:spPr>
           <a:xfrm>
-            <a:off x="8031327" y="5623560"/>
-            <a:ext cx="3322320" cy="548640"/>
+            <a:off x="548640" y="6446520"/>
+            <a:ext cx="5486400" cy="274320"/>
           </a:xfrm>
           <a:prstGeom prst="rect">
             <a:avLst/>
@@ -4100,29 +4097,29 @@
           </a:bodyPr>
           <a:lstStyle/>
           <a:p>
-            <a:pPr algn="ctr"/>
-            <a:r>
-              <a:rPr sz="1200" b="0">
+            <a:pPr algn="l"/>
+            <a:r>
+              <a:rPr sz="1000" b="0">
                 <a:solidFill>
                   <a:srgbClr val="555555"/>
                 </a:solidFill>
                 <a:latin typeface="Calibri"/>
               </a:rPr>
-              <a:t>Обзор: статистика и история тренировок</a:t>
-            </a:r>
-          </a:p>
-        </p:txBody>
-      </p:sp>
-      <p:sp>
-        <p:nvSpPr>
-          <p:cNvPr id="10" name="TextBox 9"/>
+              <a:t>Лазарев Е. Д.  ·  ВКР 2026  ·  Fitness Tracker</a:t>
+            </a:r>
+          </a:p>
+        </p:txBody>
+      </p:sp>
+      <p:sp>
+        <p:nvSpPr>
+          <p:cNvPr id="7" name="TextBox 6"/>
           <p:cNvSpPr txBox="1"/>
           <p:nvPr/>
         </p:nvSpPr>
         <p:spPr>
           <a:xfrm>
-            <a:off x="548640" y="6446520"/>
-            <a:ext cx="5486400" cy="274320"/>
+            <a:off x="10515600" y="6446520"/>
+            <a:ext cx="1188720" cy="274320"/>
           </a:xfrm>
           <a:prstGeom prst="rect">
             <a:avLst/>
@@ -4135,7 +4132,7 @@
           </a:bodyPr>
           <a:lstStyle/>
           <a:p>
-            <a:pPr algn="l"/>
+            <a:pPr algn="r"/>
             <a:r>
               <a:rPr sz="1000" b="0">
                 <a:solidFill>
@@ -4143,42 +4140,7 @@
                 </a:solidFill>
                 <a:latin typeface="Calibri"/>
               </a:rPr>
-              <a:t>Лазарев Е. Д.  ·  ВКР 2026  ·  Fitness Tracker</a:t>
-            </a:r>
-          </a:p>
-        </p:txBody>
-      </p:sp>
-      <p:sp>
-        <p:nvSpPr>
-          <p:cNvPr id="11" name="TextBox 10"/>
-          <p:cNvSpPr txBox="1"/>
-          <p:nvPr/>
-        </p:nvSpPr>
-        <p:spPr>
-          <a:xfrm>
-            <a:off x="10515600" y="6446520"/>
-            <a:ext cx="1188720" cy="274320"/>
-          </a:xfrm>
-          <a:prstGeom prst="rect">
-            <a:avLst/>
-          </a:prstGeom>
-          <a:noFill/>
-        </p:spPr>
-        <p:txBody>
-          <a:bodyPr wrap="square">
-            <a:spAutoFit/>
-          </a:bodyPr>
-          <a:lstStyle/>
-          <a:p>
-            <a:pPr algn="r"/>
-            <a:r>
-              <a:rPr sz="1000" b="0">
-                <a:solidFill>
-                  <a:srgbClr val="555555"/>
-                </a:solidFill>
-                <a:latin typeface="Calibri"/>
-              </a:rPr>
-              <a:t>11 / 13</a:t>
+              <a:t>11 / 14</a:t>
             </a:r>
           </a:p>
         </p:txBody>
@@ -4231,7 +4193,7 @@
                 </a:solidFill>
                 <a:latin typeface="Calibri"/>
               </a:rPr>
-              <a:t>Выводы</a:t>
+              <a:t>Интерфейс приложения</a:t>
             </a:r>
           </a:p>
         </p:txBody>
@@ -4279,16 +4241,40 @@
           </a:p>
         </p:txBody>
       </p:sp>
-      <p:sp>
-        <p:nvSpPr>
-          <p:cNvPr id="4" name="TextBox 3"/>
+      <p:pic>
+        <p:nvPicPr>
+          <p:cNvPr id="4" name="Picture 3" descr="screen-07.png"/>
+          <p:cNvPicPr>
+            <a:picLocks noChangeAspect="1"/>
+          </p:cNvPicPr>
+          <p:nvPr/>
+        </p:nvPicPr>
+        <p:blipFill>
+          <a:blip r:embed="rId2"/>
+          <a:stretch>
+            <a:fillRect/>
+          </a:stretch>
+        </p:blipFill>
+        <p:spPr>
+          <a:xfrm>
+            <a:off x="838047" y="1097280"/>
+            <a:ext cx="3322320" cy="4389120"/>
+          </a:xfrm>
+          <a:prstGeom prst="rect">
+            <a:avLst/>
+          </a:prstGeom>
+        </p:spPr>
+      </p:pic>
+      <p:sp>
+        <p:nvSpPr>
+          <p:cNvPr id="5" name="TextBox 4"/>
           <p:cNvSpPr txBox="1"/>
           <p:nvPr/>
         </p:nvSpPr>
         <p:spPr>
           <a:xfrm>
-            <a:off x="548640" y="1097280"/>
-            <a:ext cx="10972800" cy="5029200"/>
+            <a:off x="838047" y="5623560"/>
+            <a:ext cx="3322320" cy="548640"/>
           </a:xfrm>
           <a:prstGeom prst="rect">
             <a:avLst/>
@@ -4301,97 +4287,53 @@
           </a:bodyPr>
           <a:lstStyle/>
           <a:p>
-            <a:pPr algn="l">
-              <a:spcAft>
-                <a:spcPts val="800"/>
-              </a:spcAft>
-            </a:pPr>
-            <a:r>
-              <a:rPr sz="1800">
-                <a:solidFill>
-                  <a:srgbClr val="1F1F1F"/>
-                </a:solidFill>
-                <a:latin typeface="Calibri"/>
-              </a:rPr>
-              <a:t>•  Реализовано кроссплатформенное PWA-приложение с end-to-end интеграцией ML-генератора планов в продакшен</a:t>
-            </a:r>
-          </a:p>
-          <a:p>
-            <a:pPr algn="l">
-              <a:spcAft>
-                <a:spcPts val="800"/>
-              </a:spcAft>
-            </a:pPr>
-            <a:r>
-              <a:rPr sz="1800">
-                <a:solidFill>
-                  <a:srgbClr val="1F1F1F"/>
-                </a:solidFill>
-                <a:latin typeface="Calibri"/>
-              </a:rPr>
-              <a:t>•  Сформирован датасет 97 760 пар user × exercise с rule-based разметкой; обучены и сравнены 3 модели ранжирования</a:t>
-            </a:r>
-          </a:p>
-          <a:p>
-            <a:pPr algn="l">
-              <a:spcAft>
-                <a:spcPts val="800"/>
-              </a:spcAft>
-            </a:pPr>
-            <a:r>
-              <a:rPr sz="1800">
-                <a:solidFill>
-                  <a:srgbClr val="1F1F1F"/>
-                </a:solidFill>
-                <a:latin typeface="Calibri"/>
-              </a:rPr>
-              <a:t>•  LightGBM Classifier обеспечивает ROC-AUC=0.985, PR-AUC=0.993 — превосходит LR (0.939) и popularity-baseline (0.500)</a:t>
-            </a:r>
-          </a:p>
-          <a:p>
-            <a:pPr algn="l">
-              <a:spcAft>
-                <a:spcPts val="800"/>
-              </a:spcAft>
-            </a:pPr>
-            <a:r>
-              <a:rPr sz="1800">
-                <a:solidFill>
-                  <a:srgbClr val="1F1F1F"/>
-                </a:solidFill>
-                <a:latin typeface="Calibri"/>
-              </a:rPr>
-              <a:t>•  Реализован composer — детерминированный сборщик плана, гарантирующий корректность независимо от ML-скоров</a:t>
-            </a:r>
-          </a:p>
-          <a:p>
-            <a:pPr algn="l">
-              <a:spcAft>
-                <a:spcPts val="800"/>
-              </a:spcAft>
-            </a:pPr>
-            <a:r>
-              <a:rPr sz="1800">
-                <a:solidFill>
-                  <a:srgbClr val="1F1F1F"/>
-                </a:solidFill>
-                <a:latin typeface="Calibri"/>
-              </a:rPr>
-              <a:t>•  Архитектура спроектирована с расчётом на отказоустойчивость: rule-based fallback при отсутствии ML-артефакта</a:t>
-            </a:r>
-          </a:p>
-        </p:txBody>
-      </p:sp>
-      <p:sp>
-        <p:nvSpPr>
-          <p:cNvPr id="5" name="TextBox 4"/>
+            <a:pPr algn="ctr"/>
+            <a:r>
+              <a:rPr sz="1200" b="0">
+                <a:solidFill>
+                  <a:srgbClr val="555555"/>
+                </a:solidFill>
+                <a:latin typeface="Calibri"/>
+              </a:rPr>
+              <a:t>Каталог упражнений с рекомендациями</a:t>
+            </a:r>
+          </a:p>
+        </p:txBody>
+      </p:sp>
+      <p:pic>
+        <p:nvPicPr>
+          <p:cNvPr id="6" name="Picture 5" descr="screen-08.png"/>
+          <p:cNvPicPr>
+            <a:picLocks noChangeAspect="1"/>
+          </p:cNvPicPr>
+          <p:nvPr/>
+        </p:nvPicPr>
+        <p:blipFill>
+          <a:blip r:embed="rId3"/>
+          <a:stretch>
+            <a:fillRect/>
+          </a:stretch>
+        </p:blipFill>
+        <p:spPr>
+          <a:xfrm>
+            <a:off x="4434687" y="1097280"/>
+            <a:ext cx="3322320" cy="4389120"/>
+          </a:xfrm>
+          <a:prstGeom prst="rect">
+            <a:avLst/>
+          </a:prstGeom>
+        </p:spPr>
+      </p:pic>
+      <p:sp>
+        <p:nvSpPr>
+          <p:cNvPr id="7" name="TextBox 6"/>
           <p:cNvSpPr txBox="1"/>
           <p:nvPr/>
         </p:nvSpPr>
         <p:spPr>
           <a:xfrm>
-            <a:off x="548640" y="6446520"/>
-            <a:ext cx="5486400" cy="274320"/>
+            <a:off x="4434687" y="5623560"/>
+            <a:ext cx="3322320" cy="548640"/>
           </a:xfrm>
           <a:prstGeom prst="rect">
             <a:avLst/>
@@ -4404,29 +4346,53 @@
           </a:bodyPr>
           <a:lstStyle/>
           <a:p>
-            <a:pPr algn="l"/>
-            <a:r>
-              <a:rPr sz="1000" b="0">
+            <a:pPr algn="ctr"/>
+            <a:r>
+              <a:rPr sz="1200" b="0">
                 <a:solidFill>
                   <a:srgbClr val="555555"/>
                 </a:solidFill>
                 <a:latin typeface="Calibri"/>
               </a:rPr>
-              <a:t>Лазарев Е. Д.  ·  ВКР 2026  ·  Fitness Tracker</a:t>
-            </a:r>
-          </a:p>
-        </p:txBody>
-      </p:sp>
-      <p:sp>
-        <p:nvSpPr>
-          <p:cNvPr id="6" name="TextBox 5"/>
+              <a:t>Активная тренировка по сгенерированному плану</a:t>
+            </a:r>
+          </a:p>
+        </p:txBody>
+      </p:sp>
+      <p:pic>
+        <p:nvPicPr>
+          <p:cNvPr id="8" name="Picture 7" descr="screen-04.png"/>
+          <p:cNvPicPr>
+            <a:picLocks noChangeAspect="1"/>
+          </p:cNvPicPr>
+          <p:nvPr/>
+        </p:nvPicPr>
+        <p:blipFill>
+          <a:blip r:embed="rId4"/>
+          <a:stretch>
+            <a:fillRect/>
+          </a:stretch>
+        </p:blipFill>
+        <p:spPr>
+          <a:xfrm>
+            <a:off x="8031327" y="1097280"/>
+            <a:ext cx="3322320" cy="4389120"/>
+          </a:xfrm>
+          <a:prstGeom prst="rect">
+            <a:avLst/>
+          </a:prstGeom>
+        </p:spPr>
+      </p:pic>
+      <p:sp>
+        <p:nvSpPr>
+          <p:cNvPr id="9" name="TextBox 8"/>
           <p:cNvSpPr txBox="1"/>
           <p:nvPr/>
         </p:nvSpPr>
         <p:spPr>
           <a:xfrm>
-            <a:off x="10515600" y="6446520"/>
-            <a:ext cx="1188720" cy="274320"/>
+            <a:off x="8031327" y="5623560"/>
+            <a:ext cx="3322320" cy="548640"/>
           </a:xfrm>
           <a:prstGeom prst="rect">
             <a:avLst/>
@@ -4439,6 +4405,76 @@
           </a:bodyPr>
           <a:lstStyle/>
           <a:p>
+            <a:pPr algn="ctr"/>
+            <a:r>
+              <a:rPr sz="1200" b="0">
+                <a:solidFill>
+                  <a:srgbClr val="555555"/>
+                </a:solidFill>
+                <a:latin typeface="Calibri"/>
+              </a:rPr>
+              <a:t>Обзор: статистика и история тренировок</a:t>
+            </a:r>
+          </a:p>
+        </p:txBody>
+      </p:sp>
+      <p:sp>
+        <p:nvSpPr>
+          <p:cNvPr id="10" name="TextBox 9"/>
+          <p:cNvSpPr txBox="1"/>
+          <p:nvPr/>
+        </p:nvSpPr>
+        <p:spPr>
+          <a:xfrm>
+            <a:off x="548640" y="6446520"/>
+            <a:ext cx="5486400" cy="274320"/>
+          </a:xfrm>
+          <a:prstGeom prst="rect">
+            <a:avLst/>
+          </a:prstGeom>
+          <a:noFill/>
+        </p:spPr>
+        <p:txBody>
+          <a:bodyPr wrap="square">
+            <a:spAutoFit/>
+          </a:bodyPr>
+          <a:lstStyle/>
+          <a:p>
+            <a:pPr algn="l"/>
+            <a:r>
+              <a:rPr sz="1000" b="0">
+                <a:solidFill>
+                  <a:srgbClr val="555555"/>
+                </a:solidFill>
+                <a:latin typeface="Calibri"/>
+              </a:rPr>
+              <a:t>Лазарев Е. Д.  ·  ВКР 2026  ·  Fitness Tracker</a:t>
+            </a:r>
+          </a:p>
+        </p:txBody>
+      </p:sp>
+      <p:sp>
+        <p:nvSpPr>
+          <p:cNvPr id="11" name="TextBox 10"/>
+          <p:cNvSpPr txBox="1"/>
+          <p:nvPr/>
+        </p:nvSpPr>
+        <p:spPr>
+          <a:xfrm>
+            <a:off x="10515600" y="6446520"/>
+            <a:ext cx="1188720" cy="274320"/>
+          </a:xfrm>
+          <a:prstGeom prst="rect">
+            <a:avLst/>
+          </a:prstGeom>
+          <a:noFill/>
+        </p:spPr>
+        <p:txBody>
+          <a:bodyPr wrap="square">
+            <a:spAutoFit/>
+          </a:bodyPr>
+          <a:lstStyle/>
+          <a:p>
             <a:pPr algn="r"/>
             <a:r>
               <a:rPr sz="1000" b="0">
@@ -4447,7 +4483,7 @@
                 </a:solidFill>
                 <a:latin typeface="Calibri"/>
               </a:rPr>
-              <a:t>12 / 13</a:t>
+              <a:t>12 / 14</a:t>
             </a:r>
           </a:p>
         </p:txBody>
@@ -4472,6 +4508,275 @@
       <p:grpSpPr/>
       <p:sp>
         <p:nvSpPr>
+          <p:cNvPr id="2" name="TextBox 1"/>
+          <p:cNvSpPr txBox="1"/>
+          <p:nvPr/>
+        </p:nvSpPr>
+        <p:spPr>
+          <a:xfrm>
+            <a:off x="548640" y="274320"/>
+            <a:ext cx="10972800" cy="548640"/>
+          </a:xfrm>
+          <a:prstGeom prst="rect">
+            <a:avLst/>
+          </a:prstGeom>
+          <a:noFill/>
+        </p:spPr>
+        <p:txBody>
+          <a:bodyPr wrap="square">
+            <a:spAutoFit/>
+          </a:bodyPr>
+          <a:lstStyle/>
+          <a:p>
+            <a:pPr algn="l"/>
+            <a:r>
+              <a:rPr sz="2800" b="1">
+                <a:solidFill>
+                  <a:srgbClr val="1F1F1F"/>
+                </a:solidFill>
+                <a:latin typeface="Calibri"/>
+              </a:rPr>
+              <a:t>Выводы</a:t>
+            </a:r>
+          </a:p>
+        </p:txBody>
+      </p:sp>
+      <p:sp>
+        <p:nvSpPr>
+          <p:cNvPr id="3" name="Rectangle 2"/>
+          <p:cNvSpPr/>
+          <p:nvPr/>
+        </p:nvSpPr>
+        <p:spPr>
+          <a:xfrm>
+            <a:off x="548640" y="594360"/>
+            <a:ext cx="1097280" cy="54864"/>
+          </a:xfrm>
+          <a:prstGeom prst="rect">
+            <a:avLst/>
+          </a:prstGeom>
+          <a:solidFill>
+            <a:srgbClr val="7F0DF2"/>
+          </a:solidFill>
+          <a:ln>
+            <a:noFill/>
+          </a:ln>
+        </p:spPr>
+        <p:style>
+          <a:lnRef idx="1">
+            <a:schemeClr val="accent1"/>
+          </a:lnRef>
+          <a:fillRef idx="3">
+            <a:schemeClr val="accent1"/>
+          </a:fillRef>
+          <a:effectRef idx="2">
+            <a:schemeClr val="accent1"/>
+          </a:effectRef>
+          <a:fontRef idx="minor">
+            <a:schemeClr val="lt1"/>
+          </a:fontRef>
+        </p:style>
+        <p:txBody>
+          <a:bodyPr rtlCol="0" anchor="ctr"/>
+          <a:lstStyle/>
+          <a:p>
+            <a:pPr algn="ctr"/>
+          </a:p>
+        </p:txBody>
+      </p:sp>
+      <p:sp>
+        <p:nvSpPr>
+          <p:cNvPr id="4" name="TextBox 3"/>
+          <p:cNvSpPr txBox="1"/>
+          <p:nvPr/>
+        </p:nvSpPr>
+        <p:spPr>
+          <a:xfrm>
+            <a:off x="548640" y="1097280"/>
+            <a:ext cx="10972800" cy="5029200"/>
+          </a:xfrm>
+          <a:prstGeom prst="rect">
+            <a:avLst/>
+          </a:prstGeom>
+          <a:noFill/>
+        </p:spPr>
+        <p:txBody>
+          <a:bodyPr wrap="square">
+            <a:spAutoFit/>
+          </a:bodyPr>
+          <a:lstStyle/>
+          <a:p>
+            <a:pPr algn="l">
+              <a:spcAft>
+                <a:spcPts val="800"/>
+              </a:spcAft>
+            </a:pPr>
+            <a:r>
+              <a:rPr sz="1800">
+                <a:solidFill>
+                  <a:srgbClr val="1F1F1F"/>
+                </a:solidFill>
+                <a:latin typeface="Calibri"/>
+              </a:rPr>
+              <a:t>•  Реализовано кроссплатформенное PWA-приложение с end-to-end интеграцией ML-генератора планов в продакшен</a:t>
+            </a:r>
+          </a:p>
+          <a:p>
+            <a:pPr algn="l">
+              <a:spcAft>
+                <a:spcPts val="800"/>
+              </a:spcAft>
+            </a:pPr>
+            <a:r>
+              <a:rPr sz="1800">
+                <a:solidFill>
+                  <a:srgbClr val="1F1F1F"/>
+                </a:solidFill>
+                <a:latin typeface="Calibri"/>
+              </a:rPr>
+              <a:t>•  Сформирован датасет 97 760 пар user × exercise с rule-based разметкой; обучены и сравнены 3 модели ранжирования</a:t>
+            </a:r>
+          </a:p>
+          <a:p>
+            <a:pPr algn="l">
+              <a:spcAft>
+                <a:spcPts val="800"/>
+              </a:spcAft>
+            </a:pPr>
+            <a:r>
+              <a:rPr sz="1800">
+                <a:solidFill>
+                  <a:srgbClr val="1F1F1F"/>
+                </a:solidFill>
+                <a:latin typeface="Calibri"/>
+              </a:rPr>
+              <a:t>•  LightGBM Classifier обеспечивает ROC-AUC=0.985, PR-AUC=0.993 — превосходит LR (0.939) и popularity-baseline (0.500)</a:t>
+            </a:r>
+          </a:p>
+          <a:p>
+            <a:pPr algn="l">
+              <a:spcAft>
+                <a:spcPts val="800"/>
+              </a:spcAft>
+            </a:pPr>
+            <a:r>
+              <a:rPr sz="1800">
+                <a:solidFill>
+                  <a:srgbClr val="1F1F1F"/>
+                </a:solidFill>
+                <a:latin typeface="Calibri"/>
+              </a:rPr>
+              <a:t>•  Реализован composer — детерминированный сборщик плана, гарантирующий корректность независимо от ML-скоров</a:t>
+            </a:r>
+          </a:p>
+          <a:p>
+            <a:pPr algn="l">
+              <a:spcAft>
+                <a:spcPts val="800"/>
+              </a:spcAft>
+            </a:pPr>
+            <a:r>
+              <a:rPr sz="1800">
+                <a:solidFill>
+                  <a:srgbClr val="1F1F1F"/>
+                </a:solidFill>
+                <a:latin typeface="Calibri"/>
+              </a:rPr>
+              <a:t>•  Архитектура спроектирована с расчётом на отказоустойчивость: rule-based fallback при отсутствии ML-артефакта</a:t>
+            </a:r>
+          </a:p>
+        </p:txBody>
+      </p:sp>
+      <p:sp>
+        <p:nvSpPr>
+          <p:cNvPr id="5" name="TextBox 4"/>
+          <p:cNvSpPr txBox="1"/>
+          <p:nvPr/>
+        </p:nvSpPr>
+        <p:spPr>
+          <a:xfrm>
+            <a:off x="548640" y="6446520"/>
+            <a:ext cx="5486400" cy="274320"/>
+          </a:xfrm>
+          <a:prstGeom prst="rect">
+            <a:avLst/>
+          </a:prstGeom>
+          <a:noFill/>
+        </p:spPr>
+        <p:txBody>
+          <a:bodyPr wrap="square">
+            <a:spAutoFit/>
+          </a:bodyPr>
+          <a:lstStyle/>
+          <a:p>
+            <a:pPr algn="l"/>
+            <a:r>
+              <a:rPr sz="1000" b="0">
+                <a:solidFill>
+                  <a:srgbClr val="555555"/>
+                </a:solidFill>
+                <a:latin typeface="Calibri"/>
+              </a:rPr>
+              <a:t>Лазарев Е. Д.  ·  ВКР 2026  ·  Fitness Tracker</a:t>
+            </a:r>
+          </a:p>
+        </p:txBody>
+      </p:sp>
+      <p:sp>
+        <p:nvSpPr>
+          <p:cNvPr id="6" name="TextBox 5"/>
+          <p:cNvSpPr txBox="1"/>
+          <p:nvPr/>
+        </p:nvSpPr>
+        <p:spPr>
+          <a:xfrm>
+            <a:off x="10515600" y="6446520"/>
+            <a:ext cx="1188720" cy="274320"/>
+          </a:xfrm>
+          <a:prstGeom prst="rect">
+            <a:avLst/>
+          </a:prstGeom>
+          <a:noFill/>
+        </p:spPr>
+        <p:txBody>
+          <a:bodyPr wrap="square">
+            <a:spAutoFit/>
+          </a:bodyPr>
+          <a:lstStyle/>
+          <a:p>
+            <a:pPr algn="r"/>
+            <a:r>
+              <a:rPr sz="1000" b="0">
+                <a:solidFill>
+                  <a:srgbClr val="555555"/>
+                </a:solidFill>
+                <a:latin typeface="Calibri"/>
+              </a:rPr>
+              <a:t>13 / 14</a:t>
+            </a:r>
+          </a:p>
+        </p:txBody>
+      </p:sp>
+    </p:spTree>
+  </p:cSld>
+  <p:clrMapOvr>
+    <a:masterClrMapping/>
+  </p:clrMapOvr>
+</p:sld>
+</file>
+
+<file path=ppt/slides/slide14.xml><?xml version="1.0" encoding="utf-8"?>
+<p:sld xmlns:a="http://schemas.openxmlformats.org/drawingml/2006/main" xmlns:p="http://schemas.openxmlformats.org/presentationml/2006/main" xmlns:r="http://schemas.openxmlformats.org/officeDocument/2006/relationships">
+  <p:cSld>
+    <p:spTree>
+      <p:nvGrpSpPr>
+        <p:cNvPr id="1" name=""/>
+        <p:cNvGrpSpPr/>
+        <p:nvPr/>
+      </p:nvGrpSpPr>
+      <p:grpSpPr/>
+      <p:sp>
+        <p:nvSpPr>
           <p:cNvPr id="2" name="Rectangle 1"/>
           <p:cNvSpPr/>
           <p:nvPr/>
@@ -4979,7 +5284,7 @@
                 </a:solidFill>
                 <a:latin typeface="Calibri"/>
               </a:rPr>
-              <a:t>2 / 13</a:t>
+              <a:t>2 / 14</a:t>
             </a:r>
           </a:p>
         </p:txBody>
@@ -5369,7 +5674,7 @@
                 </a:solidFill>
                 <a:latin typeface="Calibri"/>
               </a:rPr>
-              <a:t>3 / 13</a:t>
+              <a:t>3 / 14</a:t>
             </a:r>
           </a:p>
         </p:txBody>
@@ -5827,7 +6132,7 @@
                 </a:solidFill>
                 <a:latin typeface="Calibri"/>
               </a:rPr>
-              <a:t>4 / 13</a:t>
+              <a:t>4 / 14</a:t>
             </a:r>
           </a:p>
         </p:txBody>
@@ -6131,7 +6436,7 @@
                 </a:solidFill>
                 <a:latin typeface="Calibri"/>
               </a:rPr>
-              <a:t>5 / 13</a:t>
+              <a:t>5 / 14</a:t>
             </a:r>
           </a:p>
         </p:txBody>
@@ -6435,7 +6740,7 @@
                 </a:solidFill>
                 <a:latin typeface="Calibri"/>
               </a:rPr>
-              <a:t>6 / 13</a:t>
+              <a:t>6 / 14</a:t>
             </a:r>
           </a:p>
         </p:txBody>
@@ -6660,7 +6965,7 @@
                 </a:solidFill>
                 <a:latin typeface="Calibri"/>
               </a:rPr>
-              <a:t>7 / 13</a:t>
+              <a:t>7 / 14</a:t>
             </a:r>
           </a:p>
         </p:txBody>
@@ -6713,7 +7018,7 @@
                 </a:solidFill>
                 <a:latin typeface="Calibri"/>
               </a:rPr>
-              <a:t>Что внутри модели: feature importance</a:t>
+              <a:t>Метрики моделей: ранжирование упражнений</a:t>
             </a:r>
           </a:p>
         </p:txBody>
@@ -6761,30 +7066,560 @@
           </a:p>
         </p:txBody>
       </p:sp>
-      <p:pic>
-        <p:nvPicPr>
-          <p:cNvPr id="4" name="Picture 3" descr="image.png"/>
-          <p:cNvPicPr>
-            <a:picLocks noChangeAspect="1"/>
-          </p:cNvPicPr>
-          <p:nvPr/>
-        </p:nvPicPr>
-        <p:blipFill>
-          <a:blip r:embed="rId2"/>
-          <a:stretch>
-            <a:fillRect/>
-          </a:stretch>
-        </p:blipFill>
-        <p:spPr>
-          <a:xfrm>
-            <a:off x="1097280" y="1005840"/>
-            <a:ext cx="10058400" cy="5181600"/>
-          </a:xfrm>
-          <a:prstGeom prst="rect">
-            <a:avLst/>
-          </a:prstGeom>
-        </p:spPr>
-      </p:pic>
+      <p:graphicFrame>
+        <p:nvGraphicFramePr>
+          <p:cNvPr id="4" name="Table 3"/>
+          <p:cNvGraphicFramePr>
+            <a:graphicFrameLocks noGrp="1"/>
+          </p:cNvGraphicFramePr>
+          <p:nvPr/>
+        </p:nvGraphicFramePr>
+        <p:xfrm>
+          <a:off x="838047" y="1280160"/>
+          <a:ext cx="10515600" cy="2468880"/>
+        </p:xfrm>
+        <a:graphic>
+          <a:graphicData uri="http://schemas.openxmlformats.org/drawingml/2006/table">
+            <a:tbl>
+              <a:tblPr firstRow="1" bandRow="1">
+                <a:tableStyleId>{5C22544A-7EE6-4342-B048-85BDC9FD1C3A}</a:tableStyleId>
+              </a:tblPr>
+              <a:tblGrid>
+                <a:gridCol w="2103120"/>
+                <a:gridCol w="2103120"/>
+                <a:gridCol w="2103120"/>
+                <a:gridCol w="2103120"/>
+                <a:gridCol w="2103120"/>
+              </a:tblGrid>
+              <a:tr h="493776">
+                <a:tc>
+                  <a:txBody>
+                    <a:bodyPr/>
+                    <a:lstStyle/>
+                    <a:p>
+                      <a:pPr algn="ctr"/>
+                      <a:r>
+                        <a:rPr sz="1400" b="1">
+                          <a:solidFill>
+                            <a:srgbClr val="FFFFFF"/>
+                          </a:solidFill>
+                          <a:latin typeface="Calibri"/>
+                        </a:rPr>
+                        <a:t>Модель</a:t>
+                      </a:r>
+                    </a:p>
+                  </a:txBody>
+                  <a:tcPr>
+                    <a:solidFill>
+                      <a:srgbClr val="7F0DF2"/>
+                    </a:solidFill>
+                  </a:tcPr>
+                </a:tc>
+                <a:tc>
+                  <a:txBody>
+                    <a:bodyPr/>
+                    <a:lstStyle/>
+                    <a:p>
+                      <a:pPr algn="ctr"/>
+                      <a:r>
+                        <a:rPr sz="1400" b="1">
+                          <a:solidFill>
+                            <a:srgbClr val="FFFFFF"/>
+                          </a:solidFill>
+                          <a:latin typeface="Calibri"/>
+                        </a:rPr>
+                        <a:t>ROC-AUC</a:t>
+                      </a:r>
+                    </a:p>
+                  </a:txBody>
+                  <a:tcPr>
+                    <a:solidFill>
+                      <a:srgbClr val="7F0DF2"/>
+                    </a:solidFill>
+                  </a:tcPr>
+                </a:tc>
+                <a:tc>
+                  <a:txBody>
+                    <a:bodyPr/>
+                    <a:lstStyle/>
+                    <a:p>
+                      <a:pPr algn="ctr"/>
+                      <a:r>
+                        <a:rPr sz="1400" b="1">
+                          <a:solidFill>
+                            <a:srgbClr val="FFFFFF"/>
+                          </a:solidFill>
+                          <a:latin typeface="Calibri"/>
+                        </a:rPr>
+                        <a:t>PR-AUC</a:t>
+                      </a:r>
+                    </a:p>
+                  </a:txBody>
+                  <a:tcPr>
+                    <a:solidFill>
+                      <a:srgbClr val="7F0DF2"/>
+                    </a:solidFill>
+                  </a:tcPr>
+                </a:tc>
+                <a:tc>
+                  <a:txBody>
+                    <a:bodyPr/>
+                    <a:lstStyle/>
+                    <a:p>
+                      <a:pPr algn="ctr"/>
+                      <a:r>
+                        <a:rPr sz="1400" b="1">
+                          <a:solidFill>
+                            <a:srgbClr val="FFFFFF"/>
+                          </a:solidFill>
+                          <a:latin typeface="Calibri"/>
+                        </a:rPr>
+                        <a:t>Precision@8</a:t>
+                      </a:r>
+                    </a:p>
+                  </a:txBody>
+                  <a:tcPr>
+                    <a:solidFill>
+                      <a:srgbClr val="7F0DF2"/>
+                    </a:solidFill>
+                  </a:tcPr>
+                </a:tc>
+                <a:tc>
+                  <a:txBody>
+                    <a:bodyPr/>
+                    <a:lstStyle/>
+                    <a:p>
+                      <a:pPr algn="ctr"/>
+                      <a:r>
+                        <a:rPr sz="1400" b="1">
+                          <a:solidFill>
+                            <a:srgbClr val="FFFFFF"/>
+                          </a:solidFill>
+                          <a:latin typeface="Calibri"/>
+                        </a:rPr>
+                        <a:t>Recall@8</a:t>
+                      </a:r>
+                    </a:p>
+                  </a:txBody>
+                  <a:tcPr>
+                    <a:solidFill>
+                      <a:srgbClr val="7F0DF2"/>
+                    </a:solidFill>
+                  </a:tcPr>
+                </a:tc>
+              </a:tr>
+              <a:tr h="493776">
+                <a:tc>
+                  <a:txBody>
+                    <a:bodyPr/>
+                    <a:lstStyle/>
+                    <a:p>
+                      <a:pPr algn="l"/>
+                      <a:r>
+                        <a:rPr sz="1300" b="0">
+                          <a:solidFill>
+                            <a:srgbClr val="1F1F1F"/>
+                          </a:solidFill>
+                          <a:latin typeface="Calibri"/>
+                        </a:rPr>
+                        <a:t>Popularity baseline</a:t>
+                      </a:r>
+                    </a:p>
+                  </a:txBody>
+                  <a:tcPr/>
+                </a:tc>
+                <a:tc>
+                  <a:txBody>
+                    <a:bodyPr/>
+                    <a:lstStyle/>
+                    <a:p>
+                      <a:pPr algn="ctr"/>
+                      <a:r>
+                        <a:rPr sz="1300" b="0">
+                          <a:solidFill>
+                            <a:srgbClr val="1F1F1F"/>
+                          </a:solidFill>
+                          <a:latin typeface="Calibri"/>
+                        </a:rPr>
+                        <a:t>0,500</a:t>
+                      </a:r>
+                    </a:p>
+                  </a:txBody>
+                  <a:tcPr/>
+                </a:tc>
+                <a:tc>
+                  <a:txBody>
+                    <a:bodyPr/>
+                    <a:lstStyle/>
+                    <a:p>
+                      <a:pPr algn="ctr"/>
+                      <a:r>
+                        <a:rPr sz="1300" b="0">
+                          <a:solidFill>
+                            <a:srgbClr val="1F1F1F"/>
+                          </a:solidFill>
+                          <a:latin typeface="Calibri"/>
+                        </a:rPr>
+                        <a:t>0,679</a:t>
+                      </a:r>
+                    </a:p>
+                  </a:txBody>
+                  <a:tcPr/>
+                </a:tc>
+                <a:tc>
+                  <a:txBody>
+                    <a:bodyPr/>
+                    <a:lstStyle/>
+                    <a:p>
+                      <a:pPr algn="ctr"/>
+                      <a:r>
+                        <a:rPr sz="1300" b="0">
+                          <a:solidFill>
+                            <a:srgbClr val="1F1F1F"/>
+                          </a:solidFill>
+                          <a:latin typeface="Calibri"/>
+                        </a:rPr>
+                        <a:t>0,689</a:t>
+                      </a:r>
+                    </a:p>
+                  </a:txBody>
+                  <a:tcPr/>
+                </a:tc>
+                <a:tc>
+                  <a:txBody>
+                    <a:bodyPr/>
+                    <a:lstStyle/>
+                    <a:p>
+                      <a:pPr algn="ctr"/>
+                      <a:r>
+                        <a:rPr sz="1300" b="0">
+                          <a:solidFill>
+                            <a:srgbClr val="1F1F1F"/>
+                          </a:solidFill>
+                          <a:latin typeface="Calibri"/>
+                        </a:rPr>
+                        <a:t>0,104</a:t>
+                      </a:r>
+                    </a:p>
+                  </a:txBody>
+                  <a:tcPr/>
+                </a:tc>
+              </a:tr>
+              <a:tr h="493776">
+                <a:tc>
+                  <a:txBody>
+                    <a:bodyPr/>
+                    <a:lstStyle/>
+                    <a:p>
+                      <a:pPr algn="l"/>
+                      <a:r>
+                        <a:rPr sz="1300" b="0">
+                          <a:solidFill>
+                            <a:srgbClr val="1F1F1F"/>
+                          </a:solidFill>
+                          <a:latin typeface="Calibri"/>
+                        </a:rPr>
+                        <a:t>Logistic Regression</a:t>
+                      </a:r>
+                    </a:p>
+                  </a:txBody>
+                  <a:tcPr/>
+                </a:tc>
+                <a:tc>
+                  <a:txBody>
+                    <a:bodyPr/>
+                    <a:lstStyle/>
+                    <a:p>
+                      <a:pPr algn="ctr"/>
+                      <a:r>
+                        <a:rPr sz="1300" b="0">
+                          <a:solidFill>
+                            <a:srgbClr val="1F1F1F"/>
+                          </a:solidFill>
+                          <a:latin typeface="Calibri"/>
+                        </a:rPr>
+                        <a:t>0,939</a:t>
+                      </a:r>
+                    </a:p>
+                  </a:txBody>
+                  <a:tcPr/>
+                </a:tc>
+                <a:tc>
+                  <a:txBody>
+                    <a:bodyPr/>
+                    <a:lstStyle/>
+                    <a:p>
+                      <a:pPr algn="ctr"/>
+                      <a:r>
+                        <a:rPr sz="1300" b="0">
+                          <a:solidFill>
+                            <a:srgbClr val="1F1F1F"/>
+                          </a:solidFill>
+                          <a:latin typeface="Calibri"/>
+                        </a:rPr>
+                        <a:t>0,964</a:t>
+                      </a:r>
+                    </a:p>
+                  </a:txBody>
+                  <a:tcPr/>
+                </a:tc>
+                <a:tc>
+                  <a:txBody>
+                    <a:bodyPr/>
+                    <a:lstStyle/>
+                    <a:p>
+                      <a:pPr algn="ctr"/>
+                      <a:r>
+                        <a:rPr sz="1300" b="0">
+                          <a:solidFill>
+                            <a:srgbClr val="1F1F1F"/>
+                          </a:solidFill>
+                          <a:latin typeface="Calibri"/>
+                        </a:rPr>
+                        <a:t>0,952</a:t>
+                      </a:r>
+                    </a:p>
+                  </a:txBody>
+                  <a:tcPr/>
+                </a:tc>
+                <a:tc>
+                  <a:txBody>
+                    <a:bodyPr/>
+                    <a:lstStyle/>
+                    <a:p>
+                      <a:pPr algn="ctr"/>
+                      <a:r>
+                        <a:rPr sz="1300" b="0">
+                          <a:solidFill>
+                            <a:srgbClr val="1F1F1F"/>
+                          </a:solidFill>
+                          <a:latin typeface="Calibri"/>
+                        </a:rPr>
+                        <a:t>0,232</a:t>
+                      </a:r>
+                    </a:p>
+                  </a:txBody>
+                  <a:tcPr/>
+                </a:tc>
+              </a:tr>
+              <a:tr h="493776">
+                <a:tc>
+                  <a:txBody>
+                    <a:bodyPr/>
+                    <a:lstStyle/>
+                    <a:p>
+                      <a:pPr algn="l"/>
+                      <a:r>
+                        <a:rPr sz="1300" b="1">
+                          <a:solidFill>
+                            <a:srgbClr val="1F1F1F"/>
+                          </a:solidFill>
+                          <a:latin typeface="Calibri"/>
+                        </a:rPr>
+                        <a:t>LightGBM (GBDT)</a:t>
+                      </a:r>
+                    </a:p>
+                  </a:txBody>
+                  <a:tcPr>
+                    <a:solidFill>
+                      <a:srgbClr val="F3E8FF"/>
+                    </a:solidFill>
+                  </a:tcPr>
+                </a:tc>
+                <a:tc>
+                  <a:txBody>
+                    <a:bodyPr/>
+                    <a:lstStyle/>
+                    <a:p>
+                      <a:pPr algn="ctr"/>
+                      <a:r>
+                        <a:rPr sz="1300" b="1">
+                          <a:solidFill>
+                            <a:srgbClr val="1F1F1F"/>
+                          </a:solidFill>
+                          <a:latin typeface="Calibri"/>
+                        </a:rPr>
+                        <a:t>0,985</a:t>
+                      </a:r>
+                    </a:p>
+                  </a:txBody>
+                  <a:tcPr>
+                    <a:solidFill>
+                      <a:srgbClr val="F3E8FF"/>
+                    </a:solidFill>
+                  </a:tcPr>
+                </a:tc>
+                <a:tc>
+                  <a:txBody>
+                    <a:bodyPr/>
+                    <a:lstStyle/>
+                    <a:p>
+                      <a:pPr algn="ctr"/>
+                      <a:r>
+                        <a:rPr sz="1300" b="1">
+                          <a:solidFill>
+                            <a:srgbClr val="1F1F1F"/>
+                          </a:solidFill>
+                          <a:latin typeface="Calibri"/>
+                        </a:rPr>
+                        <a:t>0,993</a:t>
+                      </a:r>
+                    </a:p>
+                  </a:txBody>
+                  <a:tcPr>
+                    <a:solidFill>
+                      <a:srgbClr val="F3E8FF"/>
+                    </a:solidFill>
+                  </a:tcPr>
+                </a:tc>
+                <a:tc>
+                  <a:txBody>
+                    <a:bodyPr/>
+                    <a:lstStyle/>
+                    <a:p>
+                      <a:pPr algn="ctr"/>
+                      <a:r>
+                        <a:rPr sz="1300" b="1">
+                          <a:solidFill>
+                            <a:srgbClr val="1F1F1F"/>
+                          </a:solidFill>
+                          <a:latin typeface="Calibri"/>
+                        </a:rPr>
+                        <a:t>0,990</a:t>
+                      </a:r>
+                    </a:p>
+                  </a:txBody>
+                  <a:tcPr>
+                    <a:solidFill>
+                      <a:srgbClr val="F3E8FF"/>
+                    </a:solidFill>
+                  </a:tcPr>
+                </a:tc>
+                <a:tc>
+                  <a:txBody>
+                    <a:bodyPr/>
+                    <a:lstStyle/>
+                    <a:p>
+                      <a:pPr algn="ctr"/>
+                      <a:r>
+                        <a:rPr sz="1300" b="1">
+                          <a:solidFill>
+                            <a:srgbClr val="1F1F1F"/>
+                          </a:solidFill>
+                          <a:latin typeface="Calibri"/>
+                        </a:rPr>
+                        <a:t>0,241</a:t>
+                      </a:r>
+                    </a:p>
+                  </a:txBody>
+                  <a:tcPr>
+                    <a:solidFill>
+                      <a:srgbClr val="F3E8FF"/>
+                    </a:solidFill>
+                  </a:tcPr>
+                </a:tc>
+              </a:tr>
+              <a:tr h="493776">
+                <a:tc>
+                  <a:txBody>
+                    <a:bodyPr/>
+                    <a:lstStyle/>
+                    <a:p>
+                      <a:pPr algn="l"/>
+                      <a:r>
+                        <a:rPr sz="1300" b="0">
+                          <a:solidFill>
+                            <a:srgbClr val="1F1F1F"/>
+                          </a:solidFill>
+                          <a:latin typeface="Calibri"/>
+                        </a:rPr>
+                        <a:t>MLP (нейросеть)</a:t>
+                      </a:r>
+                    </a:p>
+                  </a:txBody>
+                  <a:tcPr/>
+                </a:tc>
+                <a:tc>
+                  <a:txBody>
+                    <a:bodyPr/>
+                    <a:lstStyle/>
+                    <a:p>
+                      <a:pPr algn="ctr"/>
+                      <a:r>
+                        <a:rPr sz="1300" b="0">
+                          <a:solidFill>
+                            <a:srgbClr val="1F1F1F"/>
+                          </a:solidFill>
+                          <a:latin typeface="Calibri"/>
+                        </a:rPr>
+                        <a:t>0,985</a:t>
+                      </a:r>
+                    </a:p>
+                  </a:txBody>
+                  <a:tcPr/>
+                </a:tc>
+                <a:tc>
+                  <a:txBody>
+                    <a:bodyPr/>
+                    <a:lstStyle/>
+                    <a:p>
+                      <a:pPr algn="ctr"/>
+                      <a:r>
+                        <a:rPr sz="1300" b="0">
+                          <a:solidFill>
+                            <a:srgbClr val="1F1F1F"/>
+                          </a:solidFill>
+                          <a:latin typeface="Calibri"/>
+                        </a:rPr>
+                        <a:t>0,993</a:t>
+                      </a:r>
+                    </a:p>
+                  </a:txBody>
+                  <a:tcPr/>
+                </a:tc>
+                <a:tc>
+                  <a:txBody>
+                    <a:bodyPr/>
+                    <a:lstStyle/>
+                    <a:p>
+                      <a:pPr algn="ctr"/>
+                      <a:r>
+                        <a:rPr sz="1300" b="0">
+                          <a:solidFill>
+                            <a:srgbClr val="1F1F1F"/>
+                          </a:solidFill>
+                          <a:latin typeface="Calibri"/>
+                        </a:rPr>
+                        <a:t>0,990</a:t>
+                      </a:r>
+                    </a:p>
+                  </a:txBody>
+                  <a:tcPr/>
+                </a:tc>
+                <a:tc>
+                  <a:txBody>
+                    <a:bodyPr/>
+                    <a:lstStyle/>
+                    <a:p>
+                      <a:pPr algn="ctr"/>
+                      <a:r>
+                        <a:rPr sz="1300" b="0">
+                          <a:solidFill>
+                            <a:srgbClr val="1F1F1F"/>
+                          </a:solidFill>
+                          <a:latin typeface="Calibri"/>
+                        </a:rPr>
+                        <a:t>0,241</a:t>
+                      </a:r>
+                    </a:p>
+                  </a:txBody>
+                  <a:tcPr/>
+                </a:tc>
+              </a:tr>
+            </a:tbl>
+          </a:graphicData>
+        </a:graphic>
+      </p:graphicFrame>
       <p:sp>
         <p:nvSpPr>
           <p:cNvPr id="5" name="TextBox 4"/>
@@ -6793,8 +7628,8 @@
         </p:nvSpPr>
         <p:spPr>
           <a:xfrm>
-            <a:off x="548640" y="5852160"/>
-            <a:ext cx="10972800" cy="457200"/>
+            <a:off x="548640" y="4023359"/>
+            <a:ext cx="10972800" cy="640080"/>
           </a:xfrm>
           <a:prstGeom prst="rect">
             <a:avLst/>
@@ -6809,13 +7644,13 @@
           <a:p>
             <a:pPr algn="ctr"/>
             <a:r>
-              <a:rPr sz="1400" b="0">
+              <a:rPr sz="1300" b="0">
                 <a:solidFill>
                   <a:srgbClr val="555555"/>
                 </a:solidFill>
                 <a:latin typeface="Calibri"/>
               </a:rPr>
-              <a:t>Главный сигнал — оборудование (user_equipment_count); это методологически осмысленно: рекомендовать упражнение со штангой пользователю без штанги не имеет смысла. Цель — на третьем месте.</a:t>
+              <a:t>LightGBM и MLP дают идентичную точность; LightGBM выбран в прод за ×3–5 более быстрый инференс и нативный feature importance.</a:t>
             </a:r>
           </a:p>
         </p:txBody>
@@ -6885,7 +7720,7 @@
                 </a:solidFill>
                 <a:latin typeface="Calibri"/>
               </a:rPr>
-              <a:t>8 / 13</a:t>
+              <a:t>8 / 14</a:t>
             </a:r>
           </a:p>
         </p:txBody>
@@ -6938,7 +7773,7 @@
                 </a:solidFill>
                 <a:latin typeface="Calibri"/>
               </a:rPr>
-              <a:t>Composer: детерминированная сборка плана</a:t>
+              <a:t>Что внутри модели: feature importance</a:t>
             </a:r>
           </a:p>
         </p:txBody>
@@ -6986,16 +7821,40 @@
           </a:p>
         </p:txBody>
       </p:sp>
-      <p:sp>
-        <p:nvSpPr>
-          <p:cNvPr id="4" name="TextBox 3"/>
+      <p:pic>
+        <p:nvPicPr>
+          <p:cNvPr id="4" name="Picture 3" descr="image.png"/>
+          <p:cNvPicPr>
+            <a:picLocks noChangeAspect="1"/>
+          </p:cNvPicPr>
+          <p:nvPr/>
+        </p:nvPicPr>
+        <p:blipFill>
+          <a:blip r:embed="rId2"/>
+          <a:stretch>
+            <a:fillRect/>
+          </a:stretch>
+        </p:blipFill>
+        <p:spPr>
+          <a:xfrm>
+            <a:off x="1097280" y="1005840"/>
+            <a:ext cx="10058400" cy="5181600"/>
+          </a:xfrm>
+          <a:prstGeom prst="rect">
+            <a:avLst/>
+          </a:prstGeom>
+        </p:spPr>
+      </p:pic>
+      <p:sp>
+        <p:nvSpPr>
+          <p:cNvPr id="5" name="TextBox 4"/>
           <p:cNvSpPr txBox="1"/>
           <p:nvPr/>
         </p:nvSpPr>
         <p:spPr>
           <a:xfrm>
-            <a:off x="548640" y="1005840"/>
-            <a:ext cx="10972800" cy="731520"/>
+            <a:off x="548640" y="5852160"/>
+            <a:ext cx="10972800" cy="457200"/>
           </a:xfrm>
           <a:prstGeom prst="rect">
             <a:avLst/>
@@ -7008,29 +7867,29 @@
           </a:bodyPr>
           <a:lstStyle/>
           <a:p>
-            <a:pPr algn="l"/>
-            <a:r>
-              <a:rPr sz="1800" b="0">
-                <a:solidFill>
-                  <a:srgbClr val="1F1F1F"/>
-                </a:solidFill>
-                <a:latin typeface="Calibri"/>
-              </a:rPr>
-              <a:t>Чистая функция в domain/-слое: принимает ExercisePool + ML-scores, возвращает PlannedPlan без обращений к БД.</a:t>
-            </a:r>
-          </a:p>
-        </p:txBody>
-      </p:sp>
-      <p:sp>
-        <p:nvSpPr>
-          <p:cNvPr id="5" name="TextBox 4"/>
+            <a:pPr algn="ctr"/>
+            <a:r>
+              <a:rPr sz="1400" b="0">
+                <a:solidFill>
+                  <a:srgbClr val="555555"/>
+                </a:solidFill>
+                <a:latin typeface="Calibri"/>
+              </a:rPr>
+              <a:t>Главный сигнал — оборудование (user_equipment_count); это методологически осмысленно: рекомендовать упражнение со штангой пользователю без штанги не имеет смысла. Цель — на третьем месте.</a:t>
+            </a:r>
+          </a:p>
+        </p:txBody>
+      </p:sp>
+      <p:sp>
+        <p:nvSpPr>
+          <p:cNvPr id="6" name="TextBox 5"/>
           <p:cNvSpPr txBox="1"/>
           <p:nvPr/>
         </p:nvSpPr>
         <p:spPr>
           <a:xfrm>
-            <a:off x="548640" y="2011680"/>
-            <a:ext cx="10972800" cy="4389120"/>
+            <a:off x="548640" y="6446520"/>
+            <a:ext cx="5486400" cy="274320"/>
           </a:xfrm>
           <a:prstGeom prst="rect">
             <a:avLst/>
@@ -7043,97 +7902,29 @@
           </a:bodyPr>
           <a:lstStyle/>
           <a:p>
-            <a:pPr algn="l">
-              <a:spcAft>
-                <a:spcPts val="800"/>
-              </a:spcAft>
-            </a:pPr>
-            <a:r>
-              <a:rPr sz="1700">
-                <a:solidFill>
-                  <a:srgbClr val="1F1F1F"/>
-                </a:solidFill>
-                <a:latin typeface="Calibri"/>
-              </a:rPr>
-              <a:t>•  Вход: каталог упражнений с rule-based score и опционально ML-scores; профиль пользователя; параметры цикла (4 недели по умолчанию)</a:t>
-            </a:r>
-          </a:p>
-          <a:p>
-            <a:pPr algn="l">
-              <a:spcAft>
-                <a:spcPts val="800"/>
-              </a:spcAft>
-            </a:pPr>
-            <a:r>
-              <a:rPr sz="1700">
-                <a:solidFill>
-                  <a:srgbClr val="1F1F1F"/>
-                </a:solidFill>
-                <a:latin typeface="Calibri"/>
-              </a:rPr>
-              <a:t>•  Шаг 1: сплит на дни недели по принципу push/pull/legs (или fullbody при частоте &lt; 4 в неделю)</a:t>
-            </a:r>
-          </a:p>
-          <a:p>
-            <a:pPr algn="l">
-              <a:spcAft>
-                <a:spcPts val="800"/>
-              </a:spcAft>
-            </a:pPr>
-            <a:r>
-              <a:rPr sz="1700">
-                <a:solidFill>
-                  <a:srgbClr val="1F1F1F"/>
-                </a:solidFill>
-                <a:latin typeface="Calibri"/>
-              </a:rPr>
-              <a:t>•  Шаг 2: обход ранжированного каталога с гарантиями — баланс compound/isolation, разнообразие групп мышц, соответствие оборудованию</a:t>
-            </a:r>
-          </a:p>
-          <a:p>
-            <a:pPr algn="l">
-              <a:spcAft>
-                <a:spcPts val="800"/>
-              </a:spcAft>
-            </a:pPr>
-            <a:r>
-              <a:rPr sz="1700">
-                <a:solidFill>
-                  <a:srgbClr val="1F1F1F"/>
-                </a:solidFill>
-                <a:latin typeface="Calibri"/>
-              </a:rPr>
-              <a:t>•  Шаг 3: прогрессия — линейная по неделям цикла с deload-неделей при необходимости (REQ-08 spec 006)</a:t>
-            </a:r>
-          </a:p>
-          <a:p>
-            <a:pPr algn="l">
-              <a:spcAft>
-                <a:spcPts val="800"/>
-              </a:spcAft>
-            </a:pPr>
-            <a:r>
-              <a:rPr sz="1700">
-                <a:solidFill>
-                  <a:srgbClr val="1F1F1F"/>
-                </a:solidFill>
-                <a:latin typeface="Calibri"/>
-              </a:rPr>
-              <a:t>•  Изоляция от БД: composer тестируется чистыми unit-тестами без PostgreSQL, что даёт быстрый CI и простоту дебага</a:t>
-            </a:r>
-          </a:p>
-        </p:txBody>
-      </p:sp>
-      <p:sp>
-        <p:nvSpPr>
-          <p:cNvPr id="6" name="TextBox 5"/>
+            <a:pPr algn="l"/>
+            <a:r>
+              <a:rPr sz="1000" b="0">
+                <a:solidFill>
+                  <a:srgbClr val="555555"/>
+                </a:solidFill>
+                <a:latin typeface="Calibri"/>
+              </a:rPr>
+              <a:t>Лазарев Е. Д.  ·  ВКР 2026  ·  Fitness Tracker</a:t>
+            </a:r>
+          </a:p>
+        </p:txBody>
+      </p:sp>
+      <p:sp>
+        <p:nvSpPr>
+          <p:cNvPr id="7" name="TextBox 6"/>
           <p:cNvSpPr txBox="1"/>
           <p:nvPr/>
         </p:nvSpPr>
         <p:spPr>
           <a:xfrm>
-            <a:off x="548640" y="6446520"/>
-            <a:ext cx="5486400" cy="274320"/>
+            <a:off x="10515600" y="6446520"/>
+            <a:ext cx="1188720" cy="274320"/>
           </a:xfrm>
           <a:prstGeom prst="rect">
             <a:avLst/>
@@ -7146,7 +7937,7 @@
           </a:bodyPr>
           <a:lstStyle/>
           <a:p>
-            <a:pPr algn="l"/>
+            <a:pPr algn="r"/>
             <a:r>
               <a:rPr sz="1000" b="0">
                 <a:solidFill>
@@ -7154,42 +7945,7 @@
                 </a:solidFill>
                 <a:latin typeface="Calibri"/>
               </a:rPr>
-              <a:t>Лазарев Е. Д.  ·  ВКР 2026  ·  Fitness Tracker</a:t>
-            </a:r>
-          </a:p>
-        </p:txBody>
-      </p:sp>
-      <p:sp>
-        <p:nvSpPr>
-          <p:cNvPr id="7" name="TextBox 6"/>
-          <p:cNvSpPr txBox="1"/>
-          <p:nvPr/>
-        </p:nvSpPr>
-        <p:spPr>
-          <a:xfrm>
-            <a:off x="10515600" y="6446520"/>
-            <a:ext cx="1188720" cy="274320"/>
-          </a:xfrm>
-          <a:prstGeom prst="rect">
-            <a:avLst/>
-          </a:prstGeom>
-          <a:noFill/>
-        </p:spPr>
-        <p:txBody>
-          <a:bodyPr wrap="square">
-            <a:spAutoFit/>
-          </a:bodyPr>
-          <a:lstStyle/>
-          <a:p>
-            <a:pPr algn="r"/>
-            <a:r>
-              <a:rPr sz="1000" b="0">
-                <a:solidFill>
-                  <a:srgbClr val="555555"/>
-                </a:solidFill>
-                <a:latin typeface="Calibri"/>
-              </a:rPr>
-              <a:t>9 / 13</a:t>
+              <a:t>9 / 14</a:t>
             </a:r>
           </a:p>
         </p:txBody>

--- a/docs/thesis/presentation-egor.pptx
+++ b/docs/thesis/presentation-egor.pptx
@@ -3301,7 +3301,7 @@
         <p:spPr>
           <a:xfrm>
             <a:off x="548640" y="2103120"/>
-            <a:ext cx="10972800" cy="365760"/>
+            <a:ext cx="10972800" cy="457200"/>
           </a:xfrm>
           <a:prstGeom prst="rect">
             <a:avLst/>
@@ -3497,7 +3497,7 @@
                 </a:solidFill>
                 <a:latin typeface="Calibri"/>
               </a:rPr>
-              <a:t>Симанчев Р. Ю., канд. физ.-мат. наук, доцент</a:t>
+              <a:t>_______________</a:t>
             </a:r>
           </a:p>
         </p:txBody>

--- a/docs/thesis/presentation-egor.pptx
+++ b/docs/thesis/presentation-egor.pptx
@@ -3427,7 +3427,7 @@
                 </a:solidFill>
                 <a:latin typeface="Calibri"/>
               </a:rPr>
-              <a:t>Лазарев Егор Дмитриевич, гр. МММ-401-О-03</a:t>
+              <a:t>Ощепков Егор Сергеевич, гр. МММ-401-О-03</a:t>
             </a:r>
           </a:p>
         </p:txBody>
@@ -3497,7 +3497,8 @@
                 </a:solidFill>
                 <a:latin typeface="Calibri"/>
               </a:rPr>
-              <a:t>_______________</a:t>
+              <a:t>Агафонов А. Л.,
+доцент, каф. компьютерной математики и программного обеспечения</a:t>
             </a:r>
           </a:p>
         </p:txBody>
@@ -3801,7 +3802,7 @@
                 </a:solidFill>
                 <a:latin typeface="Calibri"/>
               </a:rPr>
-              <a:t>Лазарев Е. Д.  ·  ВКР 2026  ·  Fitness Tracker</a:t>
+              <a:t>Ощепков Е. С.  ·  ВКР 2026  ·  Fitness Tracker</a:t>
             </a:r>
           </a:p>
         </p:txBody>
@@ -4105,7 +4106,7 @@
                 </a:solidFill>
                 <a:latin typeface="Calibri"/>
               </a:rPr>
-              <a:t>Лазарев Е. Д.  ·  ВКР 2026  ·  Fitness Tracker</a:t>
+              <a:t>Ощепков Е. С.  ·  ВКР 2026  ·  Fitness Tracker</a:t>
             </a:r>
           </a:p>
         </p:txBody>
@@ -4448,7 +4449,7 @@
                 </a:solidFill>
                 <a:latin typeface="Calibri"/>
               </a:rPr>
-              <a:t>Лазарев Е. Д.  ·  ВКР 2026  ·  Fitness Tracker</a:t>
+              <a:t>Ощепков Е. С.  ·  ВКР 2026  ·  Fitness Tracker</a:t>
             </a:r>
           </a:p>
         </p:txBody>
@@ -4717,7 +4718,7 @@
                 </a:solidFill>
                 <a:latin typeface="Calibri"/>
               </a:rPr>
-              <a:t>Лазарев Е. Д.  ·  ВКР 2026  ·  Fitness Tracker</a:t>
+              <a:t>Ощепков Е. С.  ·  ВКР 2026  ·  Fitness Tracker</a:t>
             </a:r>
           </a:p>
         </p:txBody>
@@ -4961,7 +4962,7 @@
                 </a:solidFill>
                 <a:latin typeface="Calibri"/>
               </a:rPr>
-              <a:t>Лазарев Егор Дмитриевич · группа МММ-401-О-03</a:t>
+              <a:t>Ощепков Егор Сергеевич · группа МММ-401-О-03</a:t>
             </a:r>
           </a:p>
         </p:txBody>
@@ -5249,7 +5250,7 @@
                 </a:solidFill>
                 <a:latin typeface="Calibri"/>
               </a:rPr>
-              <a:t>Лазарев Е. Д.  ·  ВКР 2026  ·  Fitness Tracker</a:t>
+              <a:t>Ощепков Е. С.  ·  ВКР 2026  ·  Fitness Tracker</a:t>
             </a:r>
           </a:p>
         </p:txBody>
@@ -5639,7 +5640,7 @@
                 </a:solidFill>
                 <a:latin typeface="Calibri"/>
               </a:rPr>
-              <a:t>Лазарев Е. Д.  ·  ВКР 2026  ·  Fitness Tracker</a:t>
+              <a:t>Ощепков Е. С.  ·  ВКР 2026  ·  Fitness Tracker</a:t>
             </a:r>
           </a:p>
         </p:txBody>
@@ -6097,7 +6098,7 @@
                 </a:solidFill>
                 <a:latin typeface="Calibri"/>
               </a:rPr>
-              <a:t>Лазарев Е. Д.  ·  ВКР 2026  ·  Fitness Tracker</a:t>
+              <a:t>Ощепков Е. С.  ·  ВКР 2026  ·  Fitness Tracker</a:t>
             </a:r>
           </a:p>
         </p:txBody>
@@ -6401,7 +6402,7 @@
                 </a:solidFill>
                 <a:latin typeface="Calibri"/>
               </a:rPr>
-              <a:t>Лазарев Е. Д.  ·  ВКР 2026  ·  Fitness Tracker</a:t>
+              <a:t>Ощепков Е. С.  ·  ВКР 2026  ·  Fitness Tracker</a:t>
             </a:r>
           </a:p>
         </p:txBody>
@@ -6705,7 +6706,7 @@
                 </a:solidFill>
                 <a:latin typeface="Calibri"/>
               </a:rPr>
-              <a:t>Лазарев Е. Д.  ·  ВКР 2026  ·  Fitness Tracker</a:t>
+              <a:t>Ощепков Е. С.  ·  ВКР 2026  ·  Fitness Tracker</a:t>
             </a:r>
           </a:p>
         </p:txBody>
@@ -6930,7 +6931,7 @@
                 </a:solidFill>
                 <a:latin typeface="Calibri"/>
               </a:rPr>
-              <a:t>Лазарев Е. Д.  ·  ВКР 2026  ·  Fitness Tracker</a:t>
+              <a:t>Ощепков Е. С.  ·  ВКР 2026  ·  Fitness Tracker</a:t>
             </a:r>
           </a:p>
         </p:txBody>
@@ -7685,7 +7686,7 @@
                 </a:solidFill>
                 <a:latin typeface="Calibri"/>
               </a:rPr>
-              <a:t>Лазарев Е. Д.  ·  ВКР 2026  ·  Fitness Tracker</a:t>
+              <a:t>Ощепков Е. С.  ·  ВКР 2026  ·  Fitness Tracker</a:t>
             </a:r>
           </a:p>
         </p:txBody>
@@ -7910,7 +7911,7 @@
                 </a:solidFill>
                 <a:latin typeface="Calibri"/>
               </a:rPr>
-              <a:t>Лазарев Е. Д.  ·  ВКР 2026  ·  Fitness Tracker</a:t>
+              <a:t>Ощепков Е. С.  ·  ВКР 2026  ·  Fitness Tracker</a:t>
             </a:r>
           </a:p>
         </p:txBody>

--- a/docs/thesis/presentation-egor.pptx
+++ b/docs/thesis/presentation-egor.pptx
@@ -3103,100 +3103,14 @@
       <p:grpSpPr/>
       <p:sp>
         <p:nvSpPr>
-          <p:cNvPr id="2" name="Rectangle 1"/>
-          <p:cNvSpPr/>
-          <p:nvPr/>
-        </p:nvSpPr>
-        <p:spPr>
-          <a:xfrm>
-            <a:off x="0" y="0"/>
-            <a:ext cx="12191695" cy="6858000"/>
-          </a:xfrm>
-          <a:prstGeom prst="rect">
-            <a:avLst/>
-          </a:prstGeom>
-          <a:solidFill>
-            <a:srgbClr val="141B2D"/>
-          </a:solidFill>
-          <a:ln>
-            <a:noFill/>
-          </a:ln>
-        </p:spPr>
-        <p:style>
-          <a:lnRef idx="1">
-            <a:schemeClr val="accent1"/>
-          </a:lnRef>
-          <a:fillRef idx="3">
-            <a:schemeClr val="accent1"/>
-          </a:fillRef>
-          <a:effectRef idx="2">
-            <a:schemeClr val="accent1"/>
-          </a:effectRef>
-          <a:fontRef idx="minor">
-            <a:schemeClr val="lt1"/>
-          </a:fontRef>
-        </p:style>
-        <p:txBody>
-          <a:bodyPr rtlCol="0" anchor="ctr"/>
-          <a:lstStyle/>
-          <a:p>
-            <a:pPr algn="ctr"/>
-          </a:p>
-        </p:txBody>
-      </p:sp>
-      <p:sp>
-        <p:nvSpPr>
-          <p:cNvPr id="3" name="Rectangle 2"/>
-          <p:cNvSpPr/>
-          <p:nvPr/>
-        </p:nvSpPr>
-        <p:spPr>
-          <a:xfrm>
-            <a:off x="548640" y="3017520"/>
-            <a:ext cx="1371600" cy="73152"/>
-          </a:xfrm>
-          <a:prstGeom prst="rect">
-            <a:avLst/>
-          </a:prstGeom>
-          <a:solidFill>
-            <a:srgbClr val="7F0DF2"/>
-          </a:solidFill>
-          <a:ln>
-            <a:noFill/>
-          </a:ln>
-        </p:spPr>
-        <p:style>
-          <a:lnRef idx="1">
-            <a:schemeClr val="accent1"/>
-          </a:lnRef>
-          <a:fillRef idx="3">
-            <a:schemeClr val="accent1"/>
-          </a:fillRef>
-          <a:effectRef idx="2">
-            <a:schemeClr val="accent1"/>
-          </a:effectRef>
-          <a:fontRef idx="minor">
-            <a:schemeClr val="lt1"/>
-          </a:fontRef>
-        </p:style>
-        <p:txBody>
-          <a:bodyPr rtlCol="0" anchor="ctr"/>
-          <a:lstStyle/>
-          <a:p>
-            <a:pPr algn="ctr"/>
-          </a:p>
-        </p:txBody>
-      </p:sp>
-      <p:sp>
-        <p:nvSpPr>
-          <p:cNvPr id="4" name="TextBox 3"/>
+          <p:cNvPr id="2" name="TextBox 1"/>
           <p:cNvSpPr txBox="1"/>
           <p:nvPr/>
         </p:nvSpPr>
         <p:spPr>
           <a:xfrm>
-            <a:off x="548640" y="640080"/>
-            <a:ext cx="10972800" cy="457200"/>
+            <a:off x="548640" y="320040"/>
+            <a:ext cx="11091672" cy="320040"/>
           </a:xfrm>
           <a:prstGeom prst="rect">
             <a:avLst/>
@@ -3209,29 +3123,29 @@
           </a:bodyPr>
           <a:lstStyle/>
           <a:p>
-            <a:pPr algn="l"/>
-            <a:r>
-              <a:rPr sz="1400" b="0">
-                <a:solidFill>
-                  <a:srgbClr val="FFFFFF"/>
-                </a:solidFill>
-                <a:latin typeface="Calibri"/>
-              </a:rPr>
-              <a:t>Омский государственный университет им. Ф. М. Достоевского</a:t>
-            </a:r>
-          </a:p>
-        </p:txBody>
-      </p:sp>
-      <p:sp>
-        <p:nvSpPr>
-          <p:cNvPr id="5" name="TextBox 4"/>
+            <a:pPr algn="ctr"/>
+            <a:r>
+              <a:rPr sz="1400" b="1">
+                <a:solidFill>
+                  <a:srgbClr val="1F1F1F"/>
+                </a:solidFill>
+                <a:latin typeface="Times New Roman"/>
+              </a:rPr>
+              <a:t>МИНОБРНАУКИ РОССИИ</a:t>
+            </a:r>
+          </a:p>
+        </p:txBody>
+      </p:sp>
+      <p:sp>
+        <p:nvSpPr>
+          <p:cNvPr id="3" name="TextBox 2"/>
           <p:cNvSpPr txBox="1"/>
           <p:nvPr/>
         </p:nvSpPr>
         <p:spPr>
           <a:xfrm>
-            <a:off x="548640" y="960120"/>
-            <a:ext cx="10972800" cy="457200"/>
+            <a:off x="822960" y="640080"/>
+            <a:ext cx="10543032" cy="777240"/>
           </a:xfrm>
           <a:prstGeom prst="rect">
             <a:avLst/>
@@ -3244,29 +3158,29 @@
           </a:bodyPr>
           <a:lstStyle/>
           <a:p>
-            <a:pPr algn="l"/>
+            <a:pPr algn="ctr"/>
             <a:r>
               <a:rPr sz="1200" b="0">
                 <a:solidFill>
-                  <a:srgbClr val="BBBBBB"/>
-                </a:solidFill>
-                <a:latin typeface="Calibri"/>
-              </a:rPr>
-              <a:t>Факультет цифровых технологий, кибербезопасности, математики и технологий</a:t>
-            </a:r>
-          </a:p>
-        </p:txBody>
-      </p:sp>
-      <p:sp>
-        <p:nvSpPr>
-          <p:cNvPr id="6" name="TextBox 5"/>
+                  <a:srgbClr val="1F1F1F"/>
+                </a:solidFill>
+                <a:latin typeface="Times New Roman"/>
+              </a:rPr>
+              <a:t>федеральное государственное автономное образовательное учреждение высшего образования «Омский государственный университет им. Ф.М. Достоевского»</a:t>
+            </a:r>
+          </a:p>
+        </p:txBody>
+      </p:sp>
+      <p:sp>
+        <p:nvSpPr>
+          <p:cNvPr id="4" name="TextBox 3"/>
           <p:cNvSpPr txBox="1"/>
           <p:nvPr/>
         </p:nvSpPr>
         <p:spPr>
           <a:xfrm>
-            <a:off x="548640" y="1737360"/>
-            <a:ext cx="10972800" cy="365760"/>
+            <a:off x="548640" y="1371600"/>
+            <a:ext cx="11091672" cy="320040"/>
           </a:xfrm>
           <a:prstGeom prst="rect">
             <a:avLst/>
@@ -3279,29 +3193,29 @@
           </a:bodyPr>
           <a:lstStyle/>
           <a:p>
-            <a:pPr algn="l"/>
-            <a:r>
-              <a:rPr sz="1400" b="1">
-                <a:solidFill>
-                  <a:srgbClr val="7F0DF2"/>
-                </a:solidFill>
-                <a:latin typeface="Calibri"/>
-              </a:rPr>
-              <a:t>ВЫПУСКНАЯ КВАЛИФИКАЦИОННАЯ РАБОТА</a:t>
-            </a:r>
-          </a:p>
-        </p:txBody>
-      </p:sp>
-      <p:sp>
-        <p:nvSpPr>
-          <p:cNvPr id="7" name="TextBox 6"/>
+            <a:pPr algn="ctr"/>
+            <a:r>
+              <a:rPr sz="1200" b="0">
+                <a:solidFill>
+                  <a:srgbClr val="555555"/>
+                </a:solidFill>
+                <a:latin typeface="Times New Roman"/>
+              </a:rPr>
+              <a:t>Кафедра компьютерной математики и программного обеспечения</a:t>
+            </a:r>
+          </a:p>
+        </p:txBody>
+      </p:sp>
+      <p:sp>
+        <p:nvSpPr>
+          <p:cNvPr id="5" name="TextBox 4"/>
           <p:cNvSpPr txBox="1"/>
           <p:nvPr/>
         </p:nvSpPr>
         <p:spPr>
           <a:xfrm>
-            <a:off x="548640" y="2103120"/>
-            <a:ext cx="10972800" cy="457200"/>
+            <a:off x="731520" y="2377440"/>
+            <a:ext cx="10725912" cy="1371600"/>
           </a:xfrm>
           <a:prstGeom prst="rect">
             <a:avLst/>
@@ -3314,29 +3228,29 @@
           </a:bodyPr>
           <a:lstStyle/>
           <a:p>
-            <a:pPr algn="l"/>
-            <a:r>
-              <a:rPr sz="1200" b="0">
-                <a:solidFill>
-                  <a:srgbClr val="BBBBBB"/>
-                </a:solidFill>
-                <a:latin typeface="Calibri"/>
-              </a:rPr>
-              <a:t>«Прикладная математика и информатика» · магистратура</a:t>
-            </a:r>
-          </a:p>
-        </p:txBody>
-      </p:sp>
-      <p:sp>
-        <p:nvSpPr>
-          <p:cNvPr id="8" name="TextBox 7"/>
+            <a:pPr algn="ctr"/>
+            <a:r>
+              <a:rPr sz="2600" b="1">
+                <a:solidFill>
+                  <a:srgbClr val="1F1F1F"/>
+                </a:solidFill>
+                <a:latin typeface="Times New Roman"/>
+              </a:rPr>
+              <a:t>Разработка кроссплатформенного приложения для автоматической генерации планов тренировок с использованием машинного обучения</a:t>
+            </a:r>
+          </a:p>
+        </p:txBody>
+      </p:sp>
+      <p:sp>
+        <p:nvSpPr>
+          <p:cNvPr id="6" name="TextBox 5"/>
           <p:cNvSpPr txBox="1"/>
           <p:nvPr/>
         </p:nvSpPr>
         <p:spPr>
           <a:xfrm>
-            <a:off x="548640" y="3200400"/>
-            <a:ext cx="10972800" cy="1828800"/>
+            <a:off x="548640" y="3840480"/>
+            <a:ext cx="11091672" cy="320040"/>
           </a:xfrm>
           <a:prstGeom prst="rect">
             <a:avLst/>
@@ -3349,29 +3263,29 @@
           </a:bodyPr>
           <a:lstStyle/>
           <a:p>
-            <a:pPr algn="l"/>
-            <a:r>
-              <a:rPr sz="2600" b="1">
-                <a:solidFill>
-                  <a:srgbClr val="FFFFFF"/>
-                </a:solidFill>
-                <a:latin typeface="Calibri"/>
-              </a:rPr>
-              <a:t>Разработка кроссплатформенного приложения для автоматической генерации планов тренировок с использованием машинного обучения</a:t>
-            </a:r>
-          </a:p>
-        </p:txBody>
-      </p:sp>
-      <p:sp>
-        <p:nvSpPr>
-          <p:cNvPr id="9" name="TextBox 8"/>
+            <a:pPr algn="ctr"/>
+            <a:r>
+              <a:rPr sz="1400" b="1">
+                <a:solidFill>
+                  <a:srgbClr val="1F1F1F"/>
+                </a:solidFill>
+                <a:latin typeface="Times New Roman"/>
+              </a:rPr>
+              <a:t>Выпускная квалификационная работа</a:t>
+            </a:r>
+          </a:p>
+        </p:txBody>
+      </p:sp>
+      <p:sp>
+        <p:nvSpPr>
+          <p:cNvPr id="7" name="TextBox 6"/>
           <p:cNvSpPr txBox="1"/>
           <p:nvPr/>
         </p:nvSpPr>
         <p:spPr>
           <a:xfrm>
-            <a:off x="548640" y="5212080"/>
-            <a:ext cx="5486400" cy="365760"/>
+            <a:off x="548640" y="4160520"/>
+            <a:ext cx="11091672" cy="320040"/>
           </a:xfrm>
           <a:prstGeom prst="rect">
             <a:avLst/>
@@ -3384,29 +3298,29 @@
           </a:bodyPr>
           <a:lstStyle/>
           <a:p>
-            <a:pPr algn="l"/>
+            <a:pPr algn="ctr"/>
             <a:r>
               <a:rPr sz="1200" b="0">
                 <a:solidFill>
-                  <a:srgbClr val="BBBBBB"/>
-                </a:solidFill>
-                <a:latin typeface="Calibri"/>
-              </a:rPr>
-              <a:t>Автор:</a:t>
-            </a:r>
-          </a:p>
-        </p:txBody>
-      </p:sp>
-      <p:sp>
-        <p:nvSpPr>
-          <p:cNvPr id="10" name="TextBox 9"/>
+                  <a:srgbClr val="555555"/>
+                </a:solidFill>
+                <a:latin typeface="Times New Roman"/>
+              </a:rPr>
+              <a:t>по направлению 01.04.02 — «Прикладная математика и информатика»</a:t>
+            </a:r>
+          </a:p>
+        </p:txBody>
+      </p:sp>
+      <p:sp>
+        <p:nvSpPr>
+          <p:cNvPr id="8" name="TextBox 7"/>
           <p:cNvSpPr txBox="1"/>
           <p:nvPr/>
         </p:nvSpPr>
         <p:spPr>
           <a:xfrm>
-            <a:off x="548640" y="5486400"/>
-            <a:ext cx="5486400" cy="365760"/>
+            <a:off x="5486400" y="5120640"/>
+            <a:ext cx="6126480" cy="292608"/>
           </a:xfrm>
           <a:prstGeom prst="rect">
             <a:avLst/>
@@ -3419,29 +3333,29 @@
           </a:bodyPr>
           <a:lstStyle/>
           <a:p>
-            <a:pPr algn="l"/>
-            <a:r>
-              <a:rPr sz="1600" b="1">
-                <a:solidFill>
-                  <a:srgbClr val="FFFFFF"/>
-                </a:solidFill>
-                <a:latin typeface="Calibri"/>
-              </a:rPr>
-              <a:t>Ощепков Егор Сергеевич, гр. МММ-401-О-03</a:t>
-            </a:r>
-          </a:p>
-        </p:txBody>
-      </p:sp>
-      <p:sp>
-        <p:nvSpPr>
-          <p:cNvPr id="11" name="TextBox 10"/>
+            <a:pPr algn="r"/>
+            <a:r>
+              <a:rPr sz="1200" b="0">
+                <a:solidFill>
+                  <a:srgbClr val="555555"/>
+                </a:solidFill>
+                <a:latin typeface="Times New Roman"/>
+              </a:rPr>
+              <a:t>Научный руководитель:</a:t>
+            </a:r>
+          </a:p>
+        </p:txBody>
+      </p:sp>
+      <p:sp>
+        <p:nvSpPr>
+          <p:cNvPr id="9" name="TextBox 8"/>
           <p:cNvSpPr txBox="1"/>
           <p:nvPr/>
         </p:nvSpPr>
         <p:spPr>
           <a:xfrm>
-            <a:off x="6400800" y="5212080"/>
-            <a:ext cx="5486400" cy="365760"/>
+            <a:off x="5029200" y="5394960"/>
+            <a:ext cx="6583680" cy="502920"/>
           </a:xfrm>
           <a:prstGeom prst="rect">
             <a:avLst/>
@@ -3454,29 +3368,29 @@
           </a:bodyPr>
           <a:lstStyle/>
           <a:p>
-            <a:pPr algn="l"/>
-            <a:r>
-              <a:rPr sz="1200" b="0">
-                <a:solidFill>
-                  <a:srgbClr val="BBBBBB"/>
-                </a:solidFill>
-                <a:latin typeface="Calibri"/>
-              </a:rPr>
-              <a:t>Научный руководитель:</a:t>
-            </a:r>
-          </a:p>
-        </p:txBody>
-      </p:sp>
-      <p:sp>
-        <p:nvSpPr>
-          <p:cNvPr id="12" name="TextBox 11"/>
+            <a:pPr algn="r"/>
+            <a:r>
+              <a:rPr sz="1300" b="0">
+                <a:solidFill>
+                  <a:srgbClr val="1F1F1F"/>
+                </a:solidFill>
+                <a:latin typeface="Times New Roman"/>
+              </a:rPr>
+              <a:t>Агафонов А. Л., доцент, каф. компьютерной математики и программного обеспечения</a:t>
+            </a:r>
+          </a:p>
+        </p:txBody>
+      </p:sp>
+      <p:sp>
+        <p:nvSpPr>
+          <p:cNvPr id="10" name="TextBox 9"/>
           <p:cNvSpPr txBox="1"/>
           <p:nvPr/>
         </p:nvSpPr>
         <p:spPr>
           <a:xfrm>
-            <a:off x="6400800" y="5486400"/>
-            <a:ext cx="5486400" cy="548640"/>
+            <a:off x="5486400" y="5897880"/>
+            <a:ext cx="6126480" cy="292608"/>
           </a:xfrm>
           <a:prstGeom prst="rect">
             <a:avLst/>
@@ -3489,30 +3403,29 @@
           </a:bodyPr>
           <a:lstStyle/>
           <a:p>
-            <a:pPr algn="l"/>
-            <a:r>
-              <a:rPr sz="1400" b="0">
-                <a:solidFill>
-                  <a:srgbClr val="FFFFFF"/>
-                </a:solidFill>
-                <a:latin typeface="Calibri"/>
-              </a:rPr>
-              <a:t>Агафонов А. Л.,
-доцент, каф. компьютерной математики и программного обеспечения</a:t>
-            </a:r>
-          </a:p>
-        </p:txBody>
-      </p:sp>
-      <p:sp>
-        <p:nvSpPr>
-          <p:cNvPr id="13" name="TextBox 12"/>
+            <a:pPr algn="r"/>
+            <a:r>
+              <a:rPr sz="1200" b="0">
+                <a:solidFill>
+                  <a:srgbClr val="555555"/>
+                </a:solidFill>
+                <a:latin typeface="Times New Roman"/>
+              </a:rPr>
+              <a:t>Студент гр. МММ-401-О-03:</a:t>
+            </a:r>
+          </a:p>
+        </p:txBody>
+      </p:sp>
+      <p:sp>
+        <p:nvSpPr>
+          <p:cNvPr id="11" name="TextBox 10"/>
           <p:cNvSpPr txBox="1"/>
           <p:nvPr/>
         </p:nvSpPr>
         <p:spPr>
           <a:xfrm>
-            <a:off x="548640" y="6309360"/>
-            <a:ext cx="10972800" cy="365760"/>
+            <a:off x="5486400" y="6153912"/>
+            <a:ext cx="6126480" cy="292608"/>
           </a:xfrm>
           <a:prstGeom prst="rect">
             <a:avLst/>
@@ -3525,15 +3438,50 @@
           </a:bodyPr>
           <a:lstStyle/>
           <a:p>
-            <a:pPr algn="l"/>
+            <a:pPr algn="r"/>
+            <a:r>
+              <a:rPr sz="1300" b="1">
+                <a:solidFill>
+                  <a:srgbClr val="1F1F1F"/>
+                </a:solidFill>
+                <a:latin typeface="Times New Roman"/>
+              </a:rPr>
+              <a:t>Ощепков Егор Сергеевич</a:t>
+            </a:r>
+          </a:p>
+        </p:txBody>
+      </p:sp>
+      <p:sp>
+        <p:nvSpPr>
+          <p:cNvPr id="12" name="TextBox 11"/>
+          <p:cNvSpPr txBox="1"/>
+          <p:nvPr/>
+        </p:nvSpPr>
+        <p:spPr>
+          <a:xfrm>
+            <a:off x="548640" y="6446520"/>
+            <a:ext cx="11091672" cy="320040"/>
+          </a:xfrm>
+          <a:prstGeom prst="rect">
+            <a:avLst/>
+          </a:prstGeom>
+          <a:noFill/>
+        </p:spPr>
+        <p:txBody>
+          <a:bodyPr wrap="square">
+            <a:spAutoFit/>
+          </a:bodyPr>
+          <a:lstStyle/>
+          <a:p>
+            <a:pPr algn="ctr"/>
             <a:r>
               <a:rPr sz="1200" b="0">
                 <a:solidFill>
-                  <a:srgbClr val="BBBBBB"/>
-                </a:solidFill>
-                <a:latin typeface="Calibri"/>
-              </a:rPr>
-              <a:t>Омск · 2026</a:t>
+                  <a:srgbClr val="555555"/>
+                </a:solidFill>
+                <a:latin typeface="Times New Roman"/>
+              </a:rPr>
+              <a:t>Омск, 2026</a:t>
             </a:r>
           </a:p>
         </p:txBody>
@@ -3584,7 +3532,7 @@
                 <a:solidFill>
                   <a:srgbClr val="1F1F1F"/>
                 </a:solidFill>
-                <a:latin typeface="Calibri"/>
+                <a:latin typeface="Times New Roman"/>
               </a:rPr>
               <a:t>Composer: детерминированная сборка плана</a:t>
             </a:r>
@@ -3593,50 +3541,7 @@
       </p:sp>
       <p:sp>
         <p:nvSpPr>
-          <p:cNvPr id="3" name="Rectangle 2"/>
-          <p:cNvSpPr/>
-          <p:nvPr/>
-        </p:nvSpPr>
-        <p:spPr>
-          <a:xfrm>
-            <a:off x="548640" y="594360"/>
-            <a:ext cx="1097280" cy="54864"/>
-          </a:xfrm>
-          <a:prstGeom prst="rect">
-            <a:avLst/>
-          </a:prstGeom>
-          <a:solidFill>
-            <a:srgbClr val="7F0DF2"/>
-          </a:solidFill>
-          <a:ln>
-            <a:noFill/>
-          </a:ln>
-        </p:spPr>
-        <p:style>
-          <a:lnRef idx="1">
-            <a:schemeClr val="accent1"/>
-          </a:lnRef>
-          <a:fillRef idx="3">
-            <a:schemeClr val="accent1"/>
-          </a:fillRef>
-          <a:effectRef idx="2">
-            <a:schemeClr val="accent1"/>
-          </a:effectRef>
-          <a:fontRef idx="minor">
-            <a:schemeClr val="lt1"/>
-          </a:fontRef>
-        </p:style>
-        <p:txBody>
-          <a:bodyPr rtlCol="0" anchor="ctr"/>
-          <a:lstStyle/>
-          <a:p>
-            <a:pPr algn="ctr"/>
-          </a:p>
-        </p:txBody>
-      </p:sp>
-      <p:sp>
-        <p:nvSpPr>
-          <p:cNvPr id="4" name="TextBox 3"/>
+          <p:cNvPr id="3" name="TextBox 2"/>
           <p:cNvSpPr txBox="1"/>
           <p:nvPr/>
         </p:nvSpPr>
@@ -3658,11 +3563,11 @@
           <a:p>
             <a:pPr algn="l"/>
             <a:r>
-              <a:rPr sz="1800" b="0">
-                <a:solidFill>
-                  <a:srgbClr val="1F1F1F"/>
-                </a:solidFill>
-                <a:latin typeface="Calibri"/>
+              <a:rPr sz="2400" b="0">
+                <a:solidFill>
+                  <a:srgbClr val="1F1F1F"/>
+                </a:solidFill>
+                <a:latin typeface="Times New Roman"/>
               </a:rPr>
               <a:t>Чистая функция в domain/-слое: принимает ExercisePool + ML-scores, возвращает PlannedPlan без обращений к БД.</a:t>
             </a:r>
@@ -3671,7 +3576,7 @@
       </p:sp>
       <p:sp>
         <p:nvSpPr>
-          <p:cNvPr id="5" name="TextBox 4"/>
+          <p:cNvPr id="4" name="TextBox 3"/>
           <p:cNvSpPr txBox="1"/>
           <p:nvPr/>
         </p:nvSpPr>
@@ -3686,86 +3591,101 @@
           <a:noFill/>
         </p:spPr>
         <p:txBody>
-          <a:bodyPr wrap="square">
+          <a:bodyPr wrap="square" anchor="ctr">
             <a:spAutoFit/>
           </a:bodyPr>
           <a:lstStyle/>
           <a:p>
             <a:pPr algn="l">
+              <a:lnSpc>
+                <a:spcPct val="115000"/>
+              </a:lnSpc>
               <a:spcAft>
-                <a:spcPts val="800"/>
+                <a:spcPts val="1800"/>
               </a:spcAft>
             </a:pPr>
             <a:r>
-              <a:rPr sz="1700">
-                <a:solidFill>
-                  <a:srgbClr val="1F1F1F"/>
-                </a:solidFill>
-                <a:latin typeface="Calibri"/>
+              <a:rPr sz="2600">
+                <a:solidFill>
+                  <a:srgbClr val="1F1F1F"/>
+                </a:solidFill>
+                <a:latin typeface="Times New Roman"/>
               </a:rPr>
               <a:t>•  Вход: каталог упражнений с rule-based score и опционально ML-scores; профиль пользователя; параметры цикла (4 недели по умолчанию)</a:t>
             </a:r>
           </a:p>
           <a:p>
             <a:pPr algn="l">
+              <a:lnSpc>
+                <a:spcPct val="115000"/>
+              </a:lnSpc>
               <a:spcAft>
-                <a:spcPts val="800"/>
+                <a:spcPts val="1800"/>
               </a:spcAft>
             </a:pPr>
             <a:r>
-              <a:rPr sz="1700">
-                <a:solidFill>
-                  <a:srgbClr val="1F1F1F"/>
-                </a:solidFill>
-                <a:latin typeface="Calibri"/>
+              <a:rPr sz="2600">
+                <a:solidFill>
+                  <a:srgbClr val="1F1F1F"/>
+                </a:solidFill>
+                <a:latin typeface="Times New Roman"/>
               </a:rPr>
               <a:t>•  Шаг 1: сплит на дни недели по принципу push/pull/legs (или fullbody при частоте &lt; 4 в неделю)</a:t>
             </a:r>
           </a:p>
           <a:p>
             <a:pPr algn="l">
+              <a:lnSpc>
+                <a:spcPct val="115000"/>
+              </a:lnSpc>
               <a:spcAft>
-                <a:spcPts val="800"/>
+                <a:spcPts val="1800"/>
               </a:spcAft>
             </a:pPr>
             <a:r>
-              <a:rPr sz="1700">
-                <a:solidFill>
-                  <a:srgbClr val="1F1F1F"/>
-                </a:solidFill>
-                <a:latin typeface="Calibri"/>
+              <a:rPr sz="2600">
+                <a:solidFill>
+                  <a:srgbClr val="1F1F1F"/>
+                </a:solidFill>
+                <a:latin typeface="Times New Roman"/>
               </a:rPr>
               <a:t>•  Шаг 2: обход ранжированного каталога с гарантиями — баланс compound/isolation, разнообразие групп мышц, соответствие оборудованию</a:t>
             </a:r>
           </a:p>
           <a:p>
             <a:pPr algn="l">
+              <a:lnSpc>
+                <a:spcPct val="115000"/>
+              </a:lnSpc>
               <a:spcAft>
-                <a:spcPts val="800"/>
+                <a:spcPts val="1800"/>
               </a:spcAft>
             </a:pPr>
             <a:r>
-              <a:rPr sz="1700">
-                <a:solidFill>
-                  <a:srgbClr val="1F1F1F"/>
-                </a:solidFill>
-                <a:latin typeface="Calibri"/>
+              <a:rPr sz="2600">
+                <a:solidFill>
+                  <a:srgbClr val="1F1F1F"/>
+                </a:solidFill>
+                <a:latin typeface="Times New Roman"/>
               </a:rPr>
               <a:t>•  Шаг 3: прогрессия — линейная по неделям цикла с deload-неделей при необходимости (REQ-08 spec 006)</a:t>
             </a:r>
           </a:p>
           <a:p>
             <a:pPr algn="l">
+              <a:lnSpc>
+                <a:spcPct val="115000"/>
+              </a:lnSpc>
               <a:spcAft>
-                <a:spcPts val="800"/>
+                <a:spcPts val="1800"/>
               </a:spcAft>
             </a:pPr>
             <a:r>
-              <a:rPr sz="1700">
-                <a:solidFill>
-                  <a:srgbClr val="1F1F1F"/>
-                </a:solidFill>
-                <a:latin typeface="Calibri"/>
+              <a:rPr sz="2600">
+                <a:solidFill>
+                  <a:srgbClr val="1F1F1F"/>
+                </a:solidFill>
+                <a:latin typeface="Times New Roman"/>
               </a:rPr>
               <a:t>•  Изоляция от БД: composer тестируется чистыми unit-тестами без PostgreSQL, что даёт быстрый CI и простоту дебага</a:t>
             </a:r>
@@ -3774,14 +3694,14 @@
       </p:sp>
       <p:sp>
         <p:nvSpPr>
-          <p:cNvPr id="6" name="TextBox 5"/>
+          <p:cNvPr id="5" name="TextBox 4"/>
           <p:cNvSpPr txBox="1"/>
           <p:nvPr/>
         </p:nvSpPr>
         <p:spPr>
           <a:xfrm>
-            <a:off x="548640" y="6446520"/>
-            <a:ext cx="5486400" cy="274320"/>
+            <a:off x="10332720" y="6263640"/>
+            <a:ext cx="1371600" cy="457200"/>
           </a:xfrm>
           <a:prstGeom prst="rect">
             <a:avLst/>
@@ -3794,50 +3714,15 @@
           </a:bodyPr>
           <a:lstStyle/>
           <a:p>
-            <a:pPr algn="l"/>
-            <a:r>
-              <a:rPr sz="1000" b="0">
+            <a:pPr algn="r"/>
+            <a:r>
+              <a:rPr sz="2000" b="0">
                 <a:solidFill>
                   <a:srgbClr val="555555"/>
                 </a:solidFill>
-                <a:latin typeface="Calibri"/>
-              </a:rPr>
-              <a:t>Ощепков Е. С.  ·  ВКР 2026  ·  Fitness Tracker</a:t>
-            </a:r>
-          </a:p>
-        </p:txBody>
-      </p:sp>
-      <p:sp>
-        <p:nvSpPr>
-          <p:cNvPr id="7" name="TextBox 6"/>
-          <p:cNvSpPr txBox="1"/>
-          <p:nvPr/>
-        </p:nvSpPr>
-        <p:spPr>
-          <a:xfrm>
-            <a:off x="10515600" y="6446520"/>
-            <a:ext cx="1188720" cy="274320"/>
-          </a:xfrm>
-          <a:prstGeom prst="rect">
-            <a:avLst/>
-          </a:prstGeom>
-          <a:noFill/>
-        </p:spPr>
-        <p:txBody>
-          <a:bodyPr wrap="square">
-            <a:spAutoFit/>
-          </a:bodyPr>
-          <a:lstStyle/>
-          <a:p>
-            <a:pPr algn="r"/>
-            <a:r>
-              <a:rPr sz="1000" b="0">
-                <a:solidFill>
-                  <a:srgbClr val="555555"/>
-                </a:solidFill>
-                <a:latin typeface="Calibri"/>
-              </a:rPr>
-              <a:t>10 / 14</a:t>
+                <a:latin typeface="Times New Roman"/>
+              </a:rPr>
+              <a:t>10</a:t>
             </a:r>
           </a:p>
         </p:txBody>
@@ -3888,7 +3773,7 @@
                 <a:solidFill>
                   <a:srgbClr val="1F1F1F"/>
                 </a:solidFill>
-                <a:latin typeface="Calibri"/>
+                <a:latin typeface="Times New Roman"/>
               </a:rPr>
               <a:t>Тестирование</a:t>
             </a:r>
@@ -3897,50 +3782,7 @@
       </p:sp>
       <p:sp>
         <p:nvSpPr>
-          <p:cNvPr id="3" name="Rectangle 2"/>
-          <p:cNvSpPr/>
-          <p:nvPr/>
-        </p:nvSpPr>
-        <p:spPr>
-          <a:xfrm>
-            <a:off x="548640" y="594360"/>
-            <a:ext cx="1097280" cy="54864"/>
-          </a:xfrm>
-          <a:prstGeom prst="rect">
-            <a:avLst/>
-          </a:prstGeom>
-          <a:solidFill>
-            <a:srgbClr val="7F0DF2"/>
-          </a:solidFill>
-          <a:ln>
-            <a:noFill/>
-          </a:ln>
-        </p:spPr>
-        <p:style>
-          <a:lnRef idx="1">
-            <a:schemeClr val="accent1"/>
-          </a:lnRef>
-          <a:fillRef idx="3">
-            <a:schemeClr val="accent1"/>
-          </a:fillRef>
-          <a:effectRef idx="2">
-            <a:schemeClr val="accent1"/>
-          </a:effectRef>
-          <a:fontRef idx="minor">
-            <a:schemeClr val="lt1"/>
-          </a:fontRef>
-        </p:style>
-        <p:txBody>
-          <a:bodyPr rtlCol="0" anchor="ctr"/>
-          <a:lstStyle/>
-          <a:p>
-            <a:pPr algn="ctr"/>
-          </a:p>
-        </p:txBody>
-      </p:sp>
-      <p:sp>
-        <p:nvSpPr>
-          <p:cNvPr id="4" name="TextBox 3"/>
+          <p:cNvPr id="3" name="TextBox 2"/>
           <p:cNvSpPr txBox="1"/>
           <p:nvPr/>
         </p:nvSpPr>
@@ -3962,11 +3804,11 @@
           <a:p>
             <a:pPr algn="l"/>
             <a:r>
-              <a:rPr sz="1800" b="0">
-                <a:solidFill>
-                  <a:srgbClr val="1F1F1F"/>
-                </a:solidFill>
-                <a:latin typeface="Calibri"/>
+              <a:rPr sz="2400" b="0">
+                <a:solidFill>
+                  <a:srgbClr val="1F1F1F"/>
+                </a:solidFill>
+                <a:latin typeface="Times New Roman"/>
               </a:rPr>
               <a:t>Двухуровневая стратегия: domain/-юниты + интеграционные тесты плюс smoke-тест ML-пайплайна.</a:t>
             </a:r>
@@ -3975,7 +3817,7 @@
       </p:sp>
       <p:sp>
         <p:nvSpPr>
-          <p:cNvPr id="5" name="TextBox 4"/>
+          <p:cNvPr id="4" name="TextBox 3"/>
           <p:cNvSpPr txBox="1"/>
           <p:nvPr/>
         </p:nvSpPr>
@@ -3990,86 +3832,101 @@
           <a:noFill/>
         </p:spPr>
         <p:txBody>
-          <a:bodyPr wrap="square">
+          <a:bodyPr wrap="square" anchor="ctr">
             <a:spAutoFit/>
           </a:bodyPr>
           <a:lstStyle/>
           <a:p>
             <a:pPr algn="l">
+              <a:lnSpc>
+                <a:spcPct val="115000"/>
+              </a:lnSpc>
               <a:spcAft>
-                <a:spcPts val="800"/>
+                <a:spcPts val="1800"/>
               </a:spcAft>
             </a:pPr>
             <a:r>
-              <a:rPr sz="1700">
-                <a:solidFill>
-                  <a:srgbClr val="1F1F1F"/>
-                </a:solidFill>
-                <a:latin typeface="Calibri"/>
+              <a:rPr sz="2600">
+                <a:solidFill>
+                  <a:srgbClr val="1F1F1F"/>
+                </a:solidFill>
+                <a:latin typeface="Times New Roman"/>
               </a:rPr>
               <a:t>•  Composer: чистые unit-тесты без БД — проверки сплита, разнообразия, прогрессии, fallback'а</a:t>
             </a:r>
           </a:p>
           <a:p>
             <a:pPr algn="l">
+              <a:lnSpc>
+                <a:spcPct val="115000"/>
+              </a:lnSpc>
               <a:spcAft>
-                <a:spcPts val="800"/>
+                <a:spcPts val="1800"/>
               </a:spcAft>
             </a:pPr>
             <a:r>
-              <a:rPr sz="1700">
-                <a:solidFill>
-                  <a:srgbClr val="1F1F1F"/>
-                </a:solidFill>
-                <a:latin typeface="Calibri"/>
+              <a:rPr sz="2600">
+                <a:solidFill>
+                  <a:srgbClr val="1F1F1F"/>
+                </a:solidFill>
+                <a:latin typeface="Times New Roman"/>
               </a:rPr>
               <a:t>•  Интеграционные тесты: testcontainers Postgres + savepoint per test, проверка end-to-end POST /api/v1/plans/generate</a:t>
             </a:r>
           </a:p>
           <a:p>
             <a:pPr algn="l">
+              <a:lnSpc>
+                <a:spcPct val="115000"/>
+              </a:lnSpc>
               <a:spcAft>
-                <a:spcPts val="800"/>
+                <a:spcPts val="1800"/>
               </a:spcAft>
             </a:pPr>
             <a:r>
-              <a:rPr sz="1700">
-                <a:solidFill>
-                  <a:srgbClr val="1F1F1F"/>
-                </a:solidFill>
-                <a:latin typeface="Calibri"/>
+              <a:rPr sz="2600">
+                <a:solidFill>
+                  <a:srgbClr val="1F1F1F"/>
+                </a:solidFill>
+                <a:latin typeface="Times New Roman"/>
               </a:rPr>
               <a:t>•  ML-pipeline: smoke-тесты обучения popularity / LR / LightGBM на mini-датасете; проверка артефактов и manifest.json</a:t>
             </a:r>
           </a:p>
           <a:p>
             <a:pPr algn="l">
+              <a:lnSpc>
+                <a:spcPct val="115000"/>
+              </a:lnSpc>
               <a:spcAft>
-                <a:spcPts val="800"/>
+                <a:spcPts val="1800"/>
               </a:spcAft>
             </a:pPr>
             <a:r>
-              <a:rPr sz="1700">
-                <a:solidFill>
-                  <a:srgbClr val="1F1F1F"/>
-                </a:solidFill>
-                <a:latin typeface="Calibri"/>
+              <a:rPr sz="2600">
+                <a:solidFill>
+                  <a:srgbClr val="1F1F1F"/>
+                </a:solidFill>
+                <a:latin typeface="Times New Roman"/>
               </a:rPr>
               <a:t>•  Тесты обработки граничных случаев: профиль не заполнен, оборудование не выбрано, ML-артефакт недоступен (fallback path)</a:t>
             </a:r>
           </a:p>
           <a:p>
             <a:pPr algn="l">
+              <a:lnSpc>
+                <a:spcPct val="115000"/>
+              </a:lnSpc>
               <a:spcAft>
-                <a:spcPts val="800"/>
+                <a:spcPts val="1800"/>
               </a:spcAft>
             </a:pPr>
             <a:r>
-              <a:rPr sz="1700">
-                <a:solidFill>
-                  <a:srgbClr val="1F1F1F"/>
-                </a:solidFill>
-                <a:latin typeface="Calibri"/>
+              <a:rPr sz="2600">
+                <a:solidFill>
+                  <a:srgbClr val="1F1F1F"/>
+                </a:solidFill>
+                <a:latin typeface="Times New Roman"/>
               </a:rPr>
               <a:t>•  make check = lint (ruff) + typecheck (strict mypy на src/) + test; CI-проверка через GitHub Actions на каждый push</a:t>
             </a:r>
@@ -4078,14 +3935,14 @@
       </p:sp>
       <p:sp>
         <p:nvSpPr>
-          <p:cNvPr id="6" name="TextBox 5"/>
+          <p:cNvPr id="5" name="TextBox 4"/>
           <p:cNvSpPr txBox="1"/>
           <p:nvPr/>
         </p:nvSpPr>
         <p:spPr>
           <a:xfrm>
-            <a:off x="548640" y="6446520"/>
-            <a:ext cx="5486400" cy="274320"/>
+            <a:off x="10332720" y="6263640"/>
+            <a:ext cx="1371600" cy="457200"/>
           </a:xfrm>
           <a:prstGeom prst="rect">
             <a:avLst/>
@@ -4098,50 +3955,15 @@
           </a:bodyPr>
           <a:lstStyle/>
           <a:p>
-            <a:pPr algn="l"/>
-            <a:r>
-              <a:rPr sz="1000" b="0">
+            <a:pPr algn="r"/>
+            <a:r>
+              <a:rPr sz="2000" b="0">
                 <a:solidFill>
                   <a:srgbClr val="555555"/>
                 </a:solidFill>
-                <a:latin typeface="Calibri"/>
-              </a:rPr>
-              <a:t>Ощепков Е. С.  ·  ВКР 2026  ·  Fitness Tracker</a:t>
-            </a:r>
-          </a:p>
-        </p:txBody>
-      </p:sp>
-      <p:sp>
-        <p:nvSpPr>
-          <p:cNvPr id="7" name="TextBox 6"/>
-          <p:cNvSpPr txBox="1"/>
-          <p:nvPr/>
-        </p:nvSpPr>
-        <p:spPr>
-          <a:xfrm>
-            <a:off x="10515600" y="6446520"/>
-            <a:ext cx="1188720" cy="274320"/>
-          </a:xfrm>
-          <a:prstGeom prst="rect">
-            <a:avLst/>
-          </a:prstGeom>
-          <a:noFill/>
-        </p:spPr>
-        <p:txBody>
-          <a:bodyPr wrap="square">
-            <a:spAutoFit/>
-          </a:bodyPr>
-          <a:lstStyle/>
-          <a:p>
-            <a:pPr algn="r"/>
-            <a:r>
-              <a:rPr sz="1000" b="0">
-                <a:solidFill>
-                  <a:srgbClr val="555555"/>
-                </a:solidFill>
-                <a:latin typeface="Calibri"/>
-              </a:rPr>
-              <a:t>11 / 14</a:t>
+                <a:latin typeface="Times New Roman"/>
+              </a:rPr>
+              <a:t>11</a:t>
             </a:r>
           </a:p>
         </p:txBody>
@@ -4192,59 +4014,16 @@
                 <a:solidFill>
                   <a:srgbClr val="1F1F1F"/>
                 </a:solidFill>
-                <a:latin typeface="Calibri"/>
+                <a:latin typeface="Times New Roman"/>
               </a:rPr>
               <a:t>Интерфейс приложения</a:t>
             </a:r>
-          </a:p>
-        </p:txBody>
-      </p:sp>
-      <p:sp>
-        <p:nvSpPr>
-          <p:cNvPr id="3" name="Rectangle 2"/>
-          <p:cNvSpPr/>
-          <p:nvPr/>
-        </p:nvSpPr>
-        <p:spPr>
-          <a:xfrm>
-            <a:off x="548640" y="594360"/>
-            <a:ext cx="1097280" cy="54864"/>
-          </a:xfrm>
-          <a:prstGeom prst="rect">
-            <a:avLst/>
-          </a:prstGeom>
-          <a:solidFill>
-            <a:srgbClr val="7F0DF2"/>
-          </a:solidFill>
-          <a:ln>
-            <a:noFill/>
-          </a:ln>
-        </p:spPr>
-        <p:style>
-          <a:lnRef idx="1">
-            <a:schemeClr val="accent1"/>
-          </a:lnRef>
-          <a:fillRef idx="3">
-            <a:schemeClr val="accent1"/>
-          </a:fillRef>
-          <a:effectRef idx="2">
-            <a:schemeClr val="accent1"/>
-          </a:effectRef>
-          <a:fontRef idx="minor">
-            <a:schemeClr val="lt1"/>
-          </a:fontRef>
-        </p:style>
-        <p:txBody>
-          <a:bodyPr rtlCol="0" anchor="ctr"/>
-          <a:lstStyle/>
-          <a:p>
-            <a:pPr algn="ctr"/>
           </a:p>
         </p:txBody>
       </p:sp>
       <p:pic>
         <p:nvPicPr>
-          <p:cNvPr id="4" name="Picture 3" descr="screen-07.png"/>
+          <p:cNvPr id="3" name="Picture 2" descr="screen-07.png"/>
           <p:cNvPicPr>
             <a:picLocks noChangeAspect="1"/>
           </p:cNvPicPr>
@@ -4268,7 +4047,7 @@
       </p:pic>
       <p:sp>
         <p:nvSpPr>
-          <p:cNvPr id="5" name="TextBox 4"/>
+          <p:cNvPr id="4" name="TextBox 3"/>
           <p:cNvSpPr txBox="1"/>
           <p:nvPr/>
         </p:nvSpPr>
@@ -4294,7 +4073,7 @@
                 <a:solidFill>
                   <a:srgbClr val="555555"/>
                 </a:solidFill>
-                <a:latin typeface="Calibri"/>
+                <a:latin typeface="Times New Roman"/>
               </a:rPr>
               <a:t>Каталог упражнений с рекомендациями</a:t>
             </a:r>
@@ -4303,7 +4082,7 @@
       </p:sp>
       <p:pic>
         <p:nvPicPr>
-          <p:cNvPr id="6" name="Picture 5" descr="screen-08.png"/>
+          <p:cNvPr id="5" name="Picture 4" descr="screen-08.png"/>
           <p:cNvPicPr>
             <a:picLocks noChangeAspect="1"/>
           </p:cNvPicPr>
@@ -4327,7 +4106,7 @@
       </p:pic>
       <p:sp>
         <p:nvSpPr>
-          <p:cNvPr id="7" name="TextBox 6"/>
+          <p:cNvPr id="6" name="TextBox 5"/>
           <p:cNvSpPr txBox="1"/>
           <p:nvPr/>
         </p:nvSpPr>
@@ -4353,7 +4132,7 @@
                 <a:solidFill>
                   <a:srgbClr val="555555"/>
                 </a:solidFill>
-                <a:latin typeface="Calibri"/>
+                <a:latin typeface="Times New Roman"/>
               </a:rPr>
               <a:t>Активная тренировка по сгенерированному плану</a:t>
             </a:r>
@@ -4362,7 +4141,7 @@
       </p:sp>
       <p:pic>
         <p:nvPicPr>
-          <p:cNvPr id="8" name="Picture 7" descr="screen-04.png"/>
+          <p:cNvPr id="7" name="Picture 6" descr="screen-04.png"/>
           <p:cNvPicPr>
             <a:picLocks noChangeAspect="1"/>
           </p:cNvPicPr>
@@ -4386,7 +4165,7 @@
       </p:pic>
       <p:sp>
         <p:nvSpPr>
-          <p:cNvPr id="9" name="TextBox 8"/>
+          <p:cNvPr id="8" name="TextBox 7"/>
           <p:cNvSpPr txBox="1"/>
           <p:nvPr/>
         </p:nvSpPr>
@@ -4412,7 +4191,7 @@
                 <a:solidFill>
                   <a:srgbClr val="555555"/>
                 </a:solidFill>
-                <a:latin typeface="Calibri"/>
+                <a:latin typeface="Times New Roman"/>
               </a:rPr>
               <a:t>Обзор: статистика и история тренировок</a:t>
             </a:r>
@@ -4421,14 +4200,14 @@
       </p:sp>
       <p:sp>
         <p:nvSpPr>
-          <p:cNvPr id="10" name="TextBox 9"/>
+          <p:cNvPr id="9" name="TextBox 8"/>
           <p:cNvSpPr txBox="1"/>
           <p:nvPr/>
         </p:nvSpPr>
         <p:spPr>
           <a:xfrm>
-            <a:off x="548640" y="6446520"/>
-            <a:ext cx="5486400" cy="274320"/>
+            <a:off x="10332720" y="6263640"/>
+            <a:ext cx="1371600" cy="457200"/>
           </a:xfrm>
           <a:prstGeom prst="rect">
             <a:avLst/>
@@ -4441,50 +4220,15 @@
           </a:bodyPr>
           <a:lstStyle/>
           <a:p>
-            <a:pPr algn="l"/>
-            <a:r>
-              <a:rPr sz="1000" b="0">
+            <a:pPr algn="r"/>
+            <a:r>
+              <a:rPr sz="2000" b="0">
                 <a:solidFill>
                   <a:srgbClr val="555555"/>
                 </a:solidFill>
-                <a:latin typeface="Calibri"/>
-              </a:rPr>
-              <a:t>Ощепков Е. С.  ·  ВКР 2026  ·  Fitness Tracker</a:t>
-            </a:r>
-          </a:p>
-        </p:txBody>
-      </p:sp>
-      <p:sp>
-        <p:nvSpPr>
-          <p:cNvPr id="11" name="TextBox 10"/>
-          <p:cNvSpPr txBox="1"/>
-          <p:nvPr/>
-        </p:nvSpPr>
-        <p:spPr>
-          <a:xfrm>
-            <a:off x="10515600" y="6446520"/>
-            <a:ext cx="1188720" cy="274320"/>
-          </a:xfrm>
-          <a:prstGeom prst="rect">
-            <a:avLst/>
-          </a:prstGeom>
-          <a:noFill/>
-        </p:spPr>
-        <p:txBody>
-          <a:bodyPr wrap="square">
-            <a:spAutoFit/>
-          </a:bodyPr>
-          <a:lstStyle/>
-          <a:p>
-            <a:pPr algn="r"/>
-            <a:r>
-              <a:rPr sz="1000" b="0">
-                <a:solidFill>
-                  <a:srgbClr val="555555"/>
-                </a:solidFill>
-                <a:latin typeface="Calibri"/>
-              </a:rPr>
-              <a:t>12 / 14</a:t>
+                <a:latin typeface="Times New Roman"/>
+              </a:rPr>
+              <a:t>12</a:t>
             </a:r>
           </a:p>
         </p:txBody>
@@ -4535,7 +4279,7 @@
                 <a:solidFill>
                   <a:srgbClr val="1F1F1F"/>
                 </a:solidFill>
-                <a:latin typeface="Calibri"/>
+                <a:latin typeface="Times New Roman"/>
               </a:rPr>
               <a:t>Выводы</a:t>
             </a:r>
@@ -4544,57 +4288,14 @@
       </p:sp>
       <p:sp>
         <p:nvSpPr>
-          <p:cNvPr id="3" name="Rectangle 2"/>
-          <p:cNvSpPr/>
-          <p:nvPr/>
-        </p:nvSpPr>
-        <p:spPr>
-          <a:xfrm>
-            <a:off x="548640" y="594360"/>
-            <a:ext cx="1097280" cy="54864"/>
-          </a:xfrm>
-          <a:prstGeom prst="rect">
-            <a:avLst/>
-          </a:prstGeom>
-          <a:solidFill>
-            <a:srgbClr val="7F0DF2"/>
-          </a:solidFill>
-          <a:ln>
-            <a:noFill/>
-          </a:ln>
-        </p:spPr>
-        <p:style>
-          <a:lnRef idx="1">
-            <a:schemeClr val="accent1"/>
-          </a:lnRef>
-          <a:fillRef idx="3">
-            <a:schemeClr val="accent1"/>
-          </a:fillRef>
-          <a:effectRef idx="2">
-            <a:schemeClr val="accent1"/>
-          </a:effectRef>
-          <a:fontRef idx="minor">
-            <a:schemeClr val="lt1"/>
-          </a:fontRef>
-        </p:style>
-        <p:txBody>
-          <a:bodyPr rtlCol="0" anchor="ctr"/>
-          <a:lstStyle/>
-          <a:p>
-            <a:pPr algn="ctr"/>
-          </a:p>
-        </p:txBody>
-      </p:sp>
-      <p:sp>
-        <p:nvSpPr>
-          <p:cNvPr id="4" name="TextBox 3"/>
+          <p:cNvPr id="3" name="TextBox 2"/>
           <p:cNvSpPr txBox="1"/>
           <p:nvPr/>
         </p:nvSpPr>
         <p:spPr>
           <a:xfrm>
             <a:off x="548640" y="1097280"/>
-            <a:ext cx="10972800" cy="5029200"/>
+            <a:ext cx="10972800" cy="5120640"/>
           </a:xfrm>
           <a:prstGeom prst="rect">
             <a:avLst/>
@@ -4602,86 +4303,101 @@
           <a:noFill/>
         </p:spPr>
         <p:txBody>
-          <a:bodyPr wrap="square">
+          <a:bodyPr wrap="square" anchor="ctr">
             <a:spAutoFit/>
           </a:bodyPr>
           <a:lstStyle/>
           <a:p>
             <a:pPr algn="l">
+              <a:lnSpc>
+                <a:spcPct val="115000"/>
+              </a:lnSpc>
               <a:spcAft>
-                <a:spcPts val="800"/>
+                <a:spcPts val="1800"/>
               </a:spcAft>
             </a:pPr>
             <a:r>
-              <a:rPr sz="1800">
-                <a:solidFill>
-                  <a:srgbClr val="1F1F1F"/>
-                </a:solidFill>
-                <a:latin typeface="Calibri"/>
-              </a:rPr>
-              <a:t>•  Реализовано кроссплатформенное PWA-приложение с end-to-end интеграцией ML-генератора планов в продакшен</a:t>
+              <a:rPr sz="2800">
+                <a:solidFill>
+                  <a:srgbClr val="1F1F1F"/>
+                </a:solidFill>
+                <a:latin typeface="Times New Roman"/>
+              </a:rPr>
+              <a:t>•  Реализовано кроссплатформенное PWA-приложение с end-to-end интеграцией ML-генератора планов в промышленную эксплуатацию</a:t>
             </a:r>
           </a:p>
           <a:p>
             <a:pPr algn="l">
+              <a:lnSpc>
+                <a:spcPct val="115000"/>
+              </a:lnSpc>
               <a:spcAft>
-                <a:spcPts val="800"/>
+                <a:spcPts val="1800"/>
               </a:spcAft>
             </a:pPr>
             <a:r>
-              <a:rPr sz="1800">
-                <a:solidFill>
-                  <a:srgbClr val="1F1F1F"/>
-                </a:solidFill>
-                <a:latin typeface="Calibri"/>
+              <a:rPr sz="2800">
+                <a:solidFill>
+                  <a:srgbClr val="1F1F1F"/>
+                </a:solidFill>
+                <a:latin typeface="Times New Roman"/>
               </a:rPr>
               <a:t>•  Сформирован датасет 97 760 пар user × exercise с rule-based разметкой; обучены и сравнены 3 модели ранжирования</a:t>
             </a:r>
           </a:p>
           <a:p>
             <a:pPr algn="l">
+              <a:lnSpc>
+                <a:spcPct val="115000"/>
+              </a:lnSpc>
               <a:spcAft>
-                <a:spcPts val="800"/>
+                <a:spcPts val="1800"/>
               </a:spcAft>
             </a:pPr>
             <a:r>
-              <a:rPr sz="1800">
-                <a:solidFill>
-                  <a:srgbClr val="1F1F1F"/>
-                </a:solidFill>
-                <a:latin typeface="Calibri"/>
+              <a:rPr sz="2800">
+                <a:solidFill>
+                  <a:srgbClr val="1F1F1F"/>
+                </a:solidFill>
+                <a:latin typeface="Times New Roman"/>
               </a:rPr>
               <a:t>•  LightGBM Classifier обеспечивает ROC-AUC=0.985, PR-AUC=0.993 — превосходит LR (0.939) и popularity-baseline (0.500)</a:t>
             </a:r>
           </a:p>
           <a:p>
             <a:pPr algn="l">
+              <a:lnSpc>
+                <a:spcPct val="115000"/>
+              </a:lnSpc>
               <a:spcAft>
-                <a:spcPts val="800"/>
+                <a:spcPts val="1800"/>
               </a:spcAft>
             </a:pPr>
             <a:r>
-              <a:rPr sz="1800">
-                <a:solidFill>
-                  <a:srgbClr val="1F1F1F"/>
-                </a:solidFill>
-                <a:latin typeface="Calibri"/>
+              <a:rPr sz="2800">
+                <a:solidFill>
+                  <a:srgbClr val="1F1F1F"/>
+                </a:solidFill>
+                <a:latin typeface="Times New Roman"/>
               </a:rPr>
               <a:t>•  Реализован composer — детерминированный сборщик плана, гарантирующий корректность независимо от ML-скоров</a:t>
             </a:r>
           </a:p>
           <a:p>
             <a:pPr algn="l">
+              <a:lnSpc>
+                <a:spcPct val="115000"/>
+              </a:lnSpc>
               <a:spcAft>
-                <a:spcPts val="800"/>
+                <a:spcPts val="1800"/>
               </a:spcAft>
             </a:pPr>
             <a:r>
-              <a:rPr sz="1800">
-                <a:solidFill>
-                  <a:srgbClr val="1F1F1F"/>
-                </a:solidFill>
-                <a:latin typeface="Calibri"/>
+              <a:rPr sz="2800">
+                <a:solidFill>
+                  <a:srgbClr val="1F1F1F"/>
+                </a:solidFill>
+                <a:latin typeface="Times New Roman"/>
               </a:rPr>
               <a:t>•  Архитектура спроектирована с расчётом на отказоустойчивость: rule-based fallback при отсутствии ML-артефакта</a:t>
             </a:r>
@@ -4690,14 +4406,14 @@
       </p:sp>
       <p:sp>
         <p:nvSpPr>
-          <p:cNvPr id="5" name="TextBox 4"/>
+          <p:cNvPr id="4" name="TextBox 3"/>
           <p:cNvSpPr txBox="1"/>
           <p:nvPr/>
         </p:nvSpPr>
         <p:spPr>
           <a:xfrm>
-            <a:off x="548640" y="6446520"/>
-            <a:ext cx="5486400" cy="274320"/>
+            <a:off x="10332720" y="6263640"/>
+            <a:ext cx="1371600" cy="457200"/>
           </a:xfrm>
           <a:prstGeom prst="rect">
             <a:avLst/>
@@ -4710,50 +4426,15 @@
           </a:bodyPr>
           <a:lstStyle/>
           <a:p>
-            <a:pPr algn="l"/>
-            <a:r>
-              <a:rPr sz="1000" b="0">
+            <a:pPr algn="r"/>
+            <a:r>
+              <a:rPr sz="2000" b="0">
                 <a:solidFill>
                   <a:srgbClr val="555555"/>
                 </a:solidFill>
-                <a:latin typeface="Calibri"/>
-              </a:rPr>
-              <a:t>Ощепков Е. С.  ·  ВКР 2026  ·  Fitness Tracker</a:t>
-            </a:r>
-          </a:p>
-        </p:txBody>
-      </p:sp>
-      <p:sp>
-        <p:nvSpPr>
-          <p:cNvPr id="6" name="TextBox 5"/>
-          <p:cNvSpPr txBox="1"/>
-          <p:nvPr/>
-        </p:nvSpPr>
-        <p:spPr>
-          <a:xfrm>
-            <a:off x="10515600" y="6446520"/>
-            <a:ext cx="1188720" cy="274320"/>
-          </a:xfrm>
-          <a:prstGeom prst="rect">
-            <a:avLst/>
-          </a:prstGeom>
-          <a:noFill/>
-        </p:spPr>
-        <p:txBody>
-          <a:bodyPr wrap="square">
-            <a:spAutoFit/>
-          </a:bodyPr>
-          <a:lstStyle/>
-          <a:p>
-            <a:pPr algn="r"/>
-            <a:r>
-              <a:rPr sz="1000" b="0">
-                <a:solidFill>
-                  <a:srgbClr val="555555"/>
-                </a:solidFill>
-                <a:latin typeface="Calibri"/>
-              </a:rPr>
-              <a:t>13 / 14</a:t>
+                <a:latin typeface="Times New Roman"/>
+              </a:rPr>
+              <a:t>13</a:t>
             </a:r>
           </a:p>
         </p:txBody>
@@ -4778,50 +4459,7 @@
       <p:grpSpPr/>
       <p:sp>
         <p:nvSpPr>
-          <p:cNvPr id="2" name="Rectangle 1"/>
-          <p:cNvSpPr/>
-          <p:nvPr/>
-        </p:nvSpPr>
-        <p:spPr>
-          <a:xfrm>
-            <a:off x="0" y="0"/>
-            <a:ext cx="12191695" cy="6858000"/>
-          </a:xfrm>
-          <a:prstGeom prst="rect">
-            <a:avLst/>
-          </a:prstGeom>
-          <a:solidFill>
-            <a:srgbClr val="141B2D"/>
-          </a:solidFill>
-          <a:ln>
-            <a:noFill/>
-          </a:ln>
-        </p:spPr>
-        <p:style>
-          <a:lnRef idx="1">
-            <a:schemeClr val="accent1"/>
-          </a:lnRef>
-          <a:fillRef idx="3">
-            <a:schemeClr val="accent1"/>
-          </a:fillRef>
-          <a:effectRef idx="2">
-            <a:schemeClr val="accent1"/>
-          </a:effectRef>
-          <a:fontRef idx="minor">
-            <a:schemeClr val="lt1"/>
-          </a:fontRef>
-        </p:style>
-        <p:txBody>
-          <a:bodyPr rtlCol="0" anchor="ctr"/>
-          <a:lstStyle/>
-          <a:p>
-            <a:pPr algn="ctr"/>
-          </a:p>
-        </p:txBody>
-      </p:sp>
-      <p:sp>
-        <p:nvSpPr>
-          <p:cNvPr id="3" name="TextBox 2"/>
+          <p:cNvPr id="2" name="TextBox 1"/>
           <p:cNvSpPr txBox="1"/>
           <p:nvPr/>
         </p:nvSpPr>
@@ -4845,9 +4483,9 @@
             <a:r>
               <a:rPr sz="5400" b="1">
                 <a:solidFill>
-                  <a:srgbClr val="FFFFFF"/>
-                </a:solidFill>
-                <a:latin typeface="Calibri"/>
+                  <a:srgbClr val="1F1F1F"/>
+                </a:solidFill>
+                <a:latin typeface="Times New Roman"/>
               </a:rPr>
               <a:t>Спасибо за внимание</a:t>
             </a:r>
@@ -4856,50 +4494,7 @@
       </p:sp>
       <p:sp>
         <p:nvSpPr>
-          <p:cNvPr id="4" name="Rectangle 3"/>
-          <p:cNvSpPr/>
-          <p:nvPr/>
-        </p:nvSpPr>
-        <p:spPr>
-          <a:xfrm>
-            <a:off x="5486400" y="3657600"/>
-            <a:ext cx="1188720" cy="73152"/>
-          </a:xfrm>
-          <a:prstGeom prst="rect">
-            <a:avLst/>
-          </a:prstGeom>
-          <a:solidFill>
-            <a:srgbClr val="7F0DF2"/>
-          </a:solidFill>
-          <a:ln>
-            <a:noFill/>
-          </a:ln>
-        </p:spPr>
-        <p:style>
-          <a:lnRef idx="1">
-            <a:schemeClr val="accent1"/>
-          </a:lnRef>
-          <a:fillRef idx="3">
-            <a:schemeClr val="accent1"/>
-          </a:fillRef>
-          <a:effectRef idx="2">
-            <a:schemeClr val="accent1"/>
-          </a:effectRef>
-          <a:fontRef idx="minor">
-            <a:schemeClr val="lt1"/>
-          </a:fontRef>
-        </p:style>
-        <p:txBody>
-          <a:bodyPr rtlCol="0" anchor="ctr"/>
-          <a:lstStyle/>
-          <a:p>
-            <a:pPr algn="ctr"/>
-          </a:p>
-        </p:txBody>
-      </p:sp>
-      <p:sp>
-        <p:nvSpPr>
-          <p:cNvPr id="5" name="TextBox 4"/>
+          <p:cNvPr id="3" name="TextBox 2"/>
           <p:cNvSpPr txBox="1"/>
           <p:nvPr/>
         </p:nvSpPr>
@@ -4921,11 +4516,11 @@
           <a:p>
             <a:pPr algn="ctr"/>
             <a:r>
-              <a:rPr sz="2000" b="0">
-                <a:solidFill>
-                  <a:srgbClr val="BBBBBB"/>
-                </a:solidFill>
-                <a:latin typeface="Calibri"/>
+              <a:rPr sz="2400" b="0">
+                <a:solidFill>
+                  <a:srgbClr val="555555"/>
+                </a:solidFill>
+                <a:latin typeface="Times New Roman"/>
               </a:rPr>
               <a:t>Готова ответить на вопросы</a:t>
             </a:r>
@@ -4934,7 +4529,7 @@
       </p:sp>
       <p:sp>
         <p:nvSpPr>
-          <p:cNvPr id="6" name="TextBox 5"/>
+          <p:cNvPr id="4" name="TextBox 3"/>
           <p:cNvSpPr txBox="1"/>
           <p:nvPr/>
         </p:nvSpPr>
@@ -4958,9 +4553,9 @@
             <a:r>
               <a:rPr sz="1600" b="0">
                 <a:solidFill>
-                  <a:srgbClr val="FFFFFF"/>
-                </a:solidFill>
-                <a:latin typeface="Calibri"/>
+                  <a:srgbClr val="1F1F1F"/>
+                </a:solidFill>
+                <a:latin typeface="Times New Roman"/>
               </a:rPr>
               <a:t>Ощепков Егор Сергеевич · группа МММ-401-О-03</a:t>
             </a:r>
@@ -4969,7 +4564,7 @@
       </p:sp>
       <p:sp>
         <p:nvSpPr>
-          <p:cNvPr id="7" name="TextBox 6"/>
+          <p:cNvPr id="5" name="TextBox 4"/>
           <p:cNvSpPr txBox="1"/>
           <p:nvPr/>
         </p:nvSpPr>
@@ -4993,9 +4588,9 @@
             <a:r>
               <a:rPr sz="1200" b="0">
                 <a:solidFill>
-                  <a:srgbClr val="BBBBBB"/>
-                </a:solidFill>
-                <a:latin typeface="Calibri"/>
+                  <a:srgbClr val="555555"/>
+                </a:solidFill>
+                <a:latin typeface="Times New Roman"/>
               </a:rPr>
               <a:t>Омск · 2026</a:t>
             </a:r>
@@ -5048,7 +4643,7 @@
                 <a:solidFill>
                   <a:srgbClr val="1F1F1F"/>
                 </a:solidFill>
-                <a:latin typeface="Calibri"/>
+                <a:latin typeface="Times New Roman"/>
               </a:rPr>
               <a:t>Актуальность</a:t>
             </a:r>
@@ -5057,50 +4652,7 @@
       </p:sp>
       <p:sp>
         <p:nvSpPr>
-          <p:cNvPr id="3" name="Rectangle 2"/>
-          <p:cNvSpPr/>
-          <p:nvPr/>
-        </p:nvSpPr>
-        <p:spPr>
-          <a:xfrm>
-            <a:off x="548640" y="594360"/>
-            <a:ext cx="1097280" cy="54864"/>
-          </a:xfrm>
-          <a:prstGeom prst="rect">
-            <a:avLst/>
-          </a:prstGeom>
-          <a:solidFill>
-            <a:srgbClr val="7F0DF2"/>
-          </a:solidFill>
-          <a:ln>
-            <a:noFill/>
-          </a:ln>
-        </p:spPr>
-        <p:style>
-          <a:lnRef idx="1">
-            <a:schemeClr val="accent1"/>
-          </a:lnRef>
-          <a:fillRef idx="3">
-            <a:schemeClr val="accent1"/>
-          </a:fillRef>
-          <a:effectRef idx="2">
-            <a:schemeClr val="accent1"/>
-          </a:effectRef>
-          <a:fontRef idx="minor">
-            <a:schemeClr val="lt1"/>
-          </a:fontRef>
-        </p:style>
-        <p:txBody>
-          <a:bodyPr rtlCol="0" anchor="ctr"/>
-          <a:lstStyle/>
-          <a:p>
-            <a:pPr algn="ctr"/>
-          </a:p>
-        </p:txBody>
-      </p:sp>
-      <p:sp>
-        <p:nvSpPr>
-          <p:cNvPr id="4" name="TextBox 3"/>
+          <p:cNvPr id="3" name="TextBox 2"/>
           <p:cNvSpPr txBox="1"/>
           <p:nvPr/>
         </p:nvSpPr>
@@ -5122,11 +4674,11 @@
           <a:p>
             <a:pPr algn="l"/>
             <a:r>
-              <a:rPr sz="1800" b="0">
-                <a:solidFill>
-                  <a:srgbClr val="1F1F1F"/>
-                </a:solidFill>
-                <a:latin typeface="Calibri"/>
+              <a:rPr sz="2400" b="0">
+                <a:solidFill>
+                  <a:srgbClr val="1F1F1F"/>
+                </a:solidFill>
+                <a:latin typeface="Times New Roman"/>
               </a:rPr>
               <a:t>Самостоятельные тренировки без программы — основная причина плато и отсутствия прогресса у новичков и любителей.</a:t>
             </a:r>
@@ -5135,14 +4687,14 @@
       </p:sp>
       <p:sp>
         <p:nvSpPr>
-          <p:cNvPr id="5" name="TextBox 4"/>
+          <p:cNvPr id="4" name="TextBox 3"/>
           <p:cNvSpPr txBox="1"/>
           <p:nvPr/>
         </p:nvSpPr>
         <p:spPr>
           <a:xfrm>
             <a:off x="548640" y="2103120"/>
-            <a:ext cx="10972800" cy="4114800"/>
+            <a:ext cx="10972800" cy="4297680"/>
           </a:xfrm>
           <a:prstGeom prst="rect">
             <a:avLst/>
@@ -5150,70 +4702,82 @@
           <a:noFill/>
         </p:spPr>
         <p:txBody>
-          <a:bodyPr wrap="square">
+          <a:bodyPr wrap="square" anchor="ctr">
             <a:spAutoFit/>
           </a:bodyPr>
           <a:lstStyle/>
           <a:p>
             <a:pPr algn="l">
+              <a:lnSpc>
+                <a:spcPct val="115000"/>
+              </a:lnSpc>
               <a:spcAft>
-                <a:spcPts val="800"/>
+                <a:spcPts val="1800"/>
               </a:spcAft>
             </a:pPr>
             <a:r>
-              <a:rPr sz="1800">
-                <a:solidFill>
-                  <a:srgbClr val="1F1F1F"/>
-                </a:solidFill>
-                <a:latin typeface="Calibri"/>
+              <a:rPr sz="2600">
+                <a:solidFill>
+                  <a:srgbClr val="1F1F1F"/>
+                </a:solidFill>
+                <a:latin typeface="Times New Roman"/>
               </a:rPr>
               <a:t>•  Существующие фитнес-приложения либо ведут дневник без генерации программ (Hevy, Strong), либо предлагают шаблонные планы (Fitbod, Caliber)</a:t>
             </a:r>
           </a:p>
           <a:p>
             <a:pPr algn="l">
+              <a:lnSpc>
+                <a:spcPct val="115000"/>
+              </a:lnSpc>
               <a:spcAft>
-                <a:spcPts val="800"/>
+                <a:spcPts val="1800"/>
               </a:spcAft>
             </a:pPr>
             <a:r>
-              <a:rPr sz="1800">
-                <a:solidFill>
-                  <a:srgbClr val="1F1F1F"/>
-                </a:solidFill>
-                <a:latin typeface="Calibri"/>
+              <a:rPr sz="2600">
+                <a:solidFill>
+                  <a:srgbClr val="1F1F1F"/>
+                </a:solidFill>
+                <a:latin typeface="Times New Roman"/>
               </a:rPr>
               <a:t>•  Универсальные программы не учитывают цель, уровень, частоту, доступное оборудование и динамику пользователя</a:t>
             </a:r>
           </a:p>
           <a:p>
             <a:pPr algn="l">
+              <a:lnSpc>
+                <a:spcPct val="115000"/>
+              </a:lnSpc>
               <a:spcAft>
-                <a:spcPts val="800"/>
+                <a:spcPts val="1800"/>
               </a:spcAft>
             </a:pPr>
             <a:r>
-              <a:rPr sz="1800">
-                <a:solidFill>
-                  <a:srgbClr val="1F1F1F"/>
-                </a:solidFill>
-                <a:latin typeface="Calibri"/>
+              <a:rPr sz="2600">
+                <a:solidFill>
+                  <a:srgbClr val="1F1F1F"/>
+                </a:solidFill>
+                <a:latin typeface="Times New Roman"/>
               </a:rPr>
               <a:t>•  Чистый rule-based — однообразен; чистое ML — требует десятков тысяч пар (профиль, программа), которых нет в открытом доступе</a:t>
             </a:r>
           </a:p>
           <a:p>
             <a:pPr algn="l">
+              <a:lnSpc>
+                <a:spcPct val="115000"/>
+              </a:lnSpc>
               <a:spcAft>
-                <a:spcPts val="800"/>
+                <a:spcPts val="1800"/>
               </a:spcAft>
             </a:pPr>
             <a:r>
-              <a:rPr sz="1800">
-                <a:solidFill>
-                  <a:srgbClr val="1F1F1F"/>
-                </a:solidFill>
-                <a:latin typeface="Calibri"/>
+              <a:rPr sz="2600">
+                <a:solidFill>
+                  <a:srgbClr val="1F1F1F"/>
+                </a:solidFill>
+                <a:latin typeface="Times New Roman"/>
               </a:rPr>
               <a:t>•  Решение: гибридный алгоритм — ML-ранкер упражнений + детерминированный composer, гарантирующий корректность сборки плана</a:t>
             </a:r>
@@ -5222,14 +4786,14 @@
       </p:sp>
       <p:sp>
         <p:nvSpPr>
-          <p:cNvPr id="6" name="TextBox 5"/>
+          <p:cNvPr id="5" name="TextBox 4"/>
           <p:cNvSpPr txBox="1"/>
           <p:nvPr/>
         </p:nvSpPr>
         <p:spPr>
           <a:xfrm>
-            <a:off x="548640" y="6446520"/>
-            <a:ext cx="5486400" cy="274320"/>
+            <a:off x="10332720" y="6263640"/>
+            <a:ext cx="1371600" cy="457200"/>
           </a:xfrm>
           <a:prstGeom prst="rect">
             <a:avLst/>
@@ -5242,50 +4806,15 @@
           </a:bodyPr>
           <a:lstStyle/>
           <a:p>
-            <a:pPr algn="l"/>
-            <a:r>
-              <a:rPr sz="1000" b="0">
+            <a:pPr algn="r"/>
+            <a:r>
+              <a:rPr sz="2000" b="0">
                 <a:solidFill>
                   <a:srgbClr val="555555"/>
                 </a:solidFill>
-                <a:latin typeface="Calibri"/>
-              </a:rPr>
-              <a:t>Ощепков Е. С.  ·  ВКР 2026  ·  Fitness Tracker</a:t>
-            </a:r>
-          </a:p>
-        </p:txBody>
-      </p:sp>
-      <p:sp>
-        <p:nvSpPr>
-          <p:cNvPr id="7" name="TextBox 6"/>
-          <p:cNvSpPr txBox="1"/>
-          <p:nvPr/>
-        </p:nvSpPr>
-        <p:spPr>
-          <a:xfrm>
-            <a:off x="10515600" y="6446520"/>
-            <a:ext cx="1188720" cy="274320"/>
-          </a:xfrm>
-          <a:prstGeom prst="rect">
-            <a:avLst/>
-          </a:prstGeom>
-          <a:noFill/>
-        </p:spPr>
-        <p:txBody>
-          <a:bodyPr wrap="square">
-            <a:spAutoFit/>
-          </a:bodyPr>
-          <a:lstStyle/>
-          <a:p>
-            <a:pPr algn="r"/>
-            <a:r>
-              <a:rPr sz="1000" b="0">
-                <a:solidFill>
-                  <a:srgbClr val="555555"/>
-                </a:solidFill>
-                <a:latin typeface="Calibri"/>
-              </a:rPr>
-              <a:t>2 / 14</a:t>
+                <a:latin typeface="Times New Roman"/>
+              </a:rPr>
+              <a:t>2</a:t>
             </a:r>
           </a:p>
         </p:txBody>
@@ -5336,7 +4865,7 @@
                 <a:solidFill>
                   <a:srgbClr val="1F1F1F"/>
                 </a:solidFill>
-                <a:latin typeface="Calibri"/>
+                <a:latin typeface="Times New Roman"/>
               </a:rPr>
               <a:t>Цель и задачи</a:t>
             </a:r>
@@ -5345,50 +4874,7 @@
       </p:sp>
       <p:sp>
         <p:nvSpPr>
-          <p:cNvPr id="3" name="Rectangle 2"/>
-          <p:cNvSpPr/>
-          <p:nvPr/>
-        </p:nvSpPr>
-        <p:spPr>
-          <a:xfrm>
-            <a:off x="548640" y="594360"/>
-            <a:ext cx="1097280" cy="54864"/>
-          </a:xfrm>
-          <a:prstGeom prst="rect">
-            <a:avLst/>
-          </a:prstGeom>
-          <a:solidFill>
-            <a:srgbClr val="7F0DF2"/>
-          </a:solidFill>
-          <a:ln>
-            <a:noFill/>
-          </a:ln>
-        </p:spPr>
-        <p:style>
-          <a:lnRef idx="1">
-            <a:schemeClr val="accent1"/>
-          </a:lnRef>
-          <a:fillRef idx="3">
-            <a:schemeClr val="accent1"/>
-          </a:fillRef>
-          <a:effectRef idx="2">
-            <a:schemeClr val="accent1"/>
-          </a:effectRef>
-          <a:fontRef idx="minor">
-            <a:schemeClr val="lt1"/>
-          </a:fontRef>
-        </p:style>
-        <p:txBody>
-          <a:bodyPr rtlCol="0" anchor="ctr"/>
-          <a:lstStyle/>
-          <a:p>
-            <a:pPr algn="ctr"/>
-          </a:p>
-        </p:txBody>
-      </p:sp>
-      <p:sp>
-        <p:nvSpPr>
-          <p:cNvPr id="4" name="TextBox 3"/>
+          <p:cNvPr id="3" name="TextBox 2"/>
           <p:cNvSpPr txBox="1"/>
           <p:nvPr/>
         </p:nvSpPr>
@@ -5410,11 +4896,11 @@
           <a:p>
             <a:pPr algn="l"/>
             <a:r>
-              <a:rPr sz="1600" b="1">
-                <a:solidFill>
-                  <a:srgbClr val="7F0DF2"/>
-                </a:solidFill>
-                <a:latin typeface="Calibri"/>
+              <a:rPr sz="2200" b="1">
+                <a:solidFill>
+                  <a:srgbClr val="1F1F1F"/>
+                </a:solidFill>
+                <a:latin typeface="Times New Roman"/>
               </a:rPr>
               <a:t>Цель</a:t>
             </a:r>
@@ -5423,7 +4909,7 @@
       </p:sp>
       <p:sp>
         <p:nvSpPr>
-          <p:cNvPr id="5" name="TextBox 4"/>
+          <p:cNvPr id="4" name="TextBox 3"/>
           <p:cNvSpPr txBox="1"/>
           <p:nvPr/>
         </p:nvSpPr>
@@ -5445,11 +4931,11 @@
           <a:p>
             <a:pPr algn="l"/>
             <a:r>
-              <a:rPr sz="1800" b="0">
-                <a:solidFill>
-                  <a:srgbClr val="1F1F1F"/>
-                </a:solidFill>
-                <a:latin typeface="Calibri"/>
+              <a:rPr sz="2400" b="0">
+                <a:solidFill>
+                  <a:srgbClr val="1F1F1F"/>
+                </a:solidFill>
+                <a:latin typeface="Times New Roman"/>
               </a:rPr>
               <a:t>Разработать кроссплатформенное приложение для автоматической генерации индивидуальных тренировочных программ на основе ML.</a:t>
             </a:r>
@@ -5458,7 +4944,7 @@
       </p:sp>
       <p:sp>
         <p:nvSpPr>
-          <p:cNvPr id="6" name="TextBox 5"/>
+          <p:cNvPr id="5" name="TextBox 4"/>
           <p:cNvSpPr txBox="1"/>
           <p:nvPr/>
         </p:nvSpPr>
@@ -5480,11 +4966,11 @@
           <a:p>
             <a:pPr algn="l"/>
             <a:r>
-              <a:rPr sz="1600" b="1">
-                <a:solidFill>
-                  <a:srgbClr val="7F0DF2"/>
-                </a:solidFill>
-                <a:latin typeface="Calibri"/>
+              <a:rPr sz="2200" b="1">
+                <a:solidFill>
+                  <a:srgbClr val="1F1F1F"/>
+                </a:solidFill>
+                <a:latin typeface="Times New Roman"/>
               </a:rPr>
               <a:t>Задачи</a:t>
             </a:r>
@@ -5493,14 +4979,14 @@
       </p:sp>
       <p:sp>
         <p:nvSpPr>
-          <p:cNvPr id="7" name="TextBox 6"/>
+          <p:cNvPr id="6" name="TextBox 5"/>
           <p:cNvSpPr txBox="1"/>
           <p:nvPr/>
         </p:nvSpPr>
         <p:spPr>
           <a:xfrm>
             <a:off x="548640" y="3017520"/>
-            <a:ext cx="10972800" cy="3200400"/>
+            <a:ext cx="10972800" cy="3383280"/>
           </a:xfrm>
           <a:prstGeom prst="rect">
             <a:avLst/>
@@ -5508,102 +4994,120 @@
           <a:noFill/>
         </p:spPr>
         <p:txBody>
-          <a:bodyPr wrap="square">
+          <a:bodyPr wrap="square" anchor="ctr">
             <a:spAutoFit/>
           </a:bodyPr>
           <a:lstStyle/>
           <a:p>
             <a:pPr algn="l">
+              <a:lnSpc>
+                <a:spcPct val="115000"/>
+              </a:lnSpc>
               <a:spcAft>
-                <a:spcPts val="800"/>
+                <a:spcPts val="1800"/>
               </a:spcAft>
             </a:pPr>
             <a:r>
-              <a:rPr sz="1600">
-                <a:solidFill>
-                  <a:srgbClr val="1F1F1F"/>
-                </a:solidFill>
-                <a:latin typeface="Calibri"/>
+              <a:rPr sz="2400">
+                <a:solidFill>
+                  <a:srgbClr val="1F1F1F"/>
+                </a:solidFill>
+                <a:latin typeface="Times New Roman"/>
               </a:rPr>
               <a:t>•  Проанализировать существующие подходы к генерации тренировочных программ (rule-based, end-to-end ML, рекомендательные системы)</a:t>
             </a:r>
           </a:p>
           <a:p>
             <a:pPr algn="l">
+              <a:lnSpc>
+                <a:spcPct val="115000"/>
+              </a:lnSpc>
               <a:spcAft>
-                <a:spcPts val="800"/>
+                <a:spcPts val="1800"/>
               </a:spcAft>
             </a:pPr>
             <a:r>
-              <a:rPr sz="1600">
-                <a:solidFill>
-                  <a:srgbClr val="1F1F1F"/>
-                </a:solidFill>
-                <a:latin typeface="Calibri"/>
+              <a:rPr sz="2400">
+                <a:solidFill>
+                  <a:srgbClr val="1F1F1F"/>
+                </a:solidFill>
+                <a:latin typeface="Times New Roman"/>
               </a:rPr>
               <a:t>•  Сформировать обучающий датасет из 97 760 пар (профиль, упражнение, метка) на основе Kaggle-источника и rule-based разметки</a:t>
             </a:r>
           </a:p>
           <a:p>
             <a:pPr algn="l">
+              <a:lnSpc>
+                <a:spcPct val="115000"/>
+              </a:lnSpc>
               <a:spcAft>
-                <a:spcPts val="800"/>
+                <a:spcPts val="1800"/>
               </a:spcAft>
             </a:pPr>
             <a:r>
-              <a:rPr sz="1600">
-                <a:solidFill>
-                  <a:srgbClr val="1F1F1F"/>
-                </a:solidFill>
-                <a:latin typeface="Calibri"/>
+              <a:rPr sz="2400">
+                <a:solidFill>
+                  <a:srgbClr val="1F1F1F"/>
+                </a:solidFill>
+                <a:latin typeface="Times New Roman"/>
               </a:rPr>
               <a:t>•  Обучить и сравнить три модели ранжирования: popularity-baseline, Logistic Regression, LightGBM Classifier</a:t>
             </a:r>
           </a:p>
           <a:p>
             <a:pPr algn="l">
+              <a:lnSpc>
+                <a:spcPct val="115000"/>
+              </a:lnSpc>
               <a:spcAft>
-                <a:spcPts val="800"/>
+                <a:spcPts val="1800"/>
               </a:spcAft>
             </a:pPr>
             <a:r>
-              <a:rPr sz="1600">
-                <a:solidFill>
-                  <a:srgbClr val="1F1F1F"/>
-                </a:solidFill>
-                <a:latin typeface="Calibri"/>
+              <a:rPr sz="2400">
+                <a:solidFill>
+                  <a:srgbClr val="1F1F1F"/>
+                </a:solidFill>
+                <a:latin typeface="Times New Roman"/>
               </a:rPr>
               <a:t>•  Реализовать composer — детерминированный сборщик программы из ранжированного каталога с проверкой тренировочных принципов</a:t>
             </a:r>
           </a:p>
           <a:p>
             <a:pPr algn="l">
+              <a:lnSpc>
+                <a:spcPct val="115000"/>
+              </a:lnSpc>
               <a:spcAft>
-                <a:spcPts val="800"/>
+                <a:spcPts val="1800"/>
               </a:spcAft>
             </a:pPr>
             <a:r>
-              <a:rPr sz="1600">
-                <a:solidFill>
-                  <a:srgbClr val="1F1F1F"/>
-                </a:solidFill>
-                <a:latin typeface="Calibri"/>
+              <a:rPr sz="2400">
+                <a:solidFill>
+                  <a:srgbClr val="1F1F1F"/>
+                </a:solidFill>
+                <a:latin typeface="Times New Roman"/>
               </a:rPr>
               <a:t>•  Спроектировать REST-сервис генерации с lazy-load ML-артефакта и rule-based fallback при отсутствии модели</a:t>
             </a:r>
           </a:p>
           <a:p>
             <a:pPr algn="l">
+              <a:lnSpc>
+                <a:spcPct val="115000"/>
+              </a:lnSpc>
               <a:spcAft>
-                <a:spcPts val="800"/>
+                <a:spcPts val="1800"/>
               </a:spcAft>
             </a:pPr>
             <a:r>
-              <a:rPr sz="1600">
-                <a:solidFill>
-                  <a:srgbClr val="1F1F1F"/>
-                </a:solidFill>
-                <a:latin typeface="Calibri"/>
+              <a:rPr sz="2400">
+                <a:solidFill>
+                  <a:srgbClr val="1F1F1F"/>
+                </a:solidFill>
+                <a:latin typeface="Times New Roman"/>
               </a:rPr>
               <a:t>•  Покрыть критические компоненты автотестами; обеспечить версионирование моделей и воспроизводимость пайплайна</a:t>
             </a:r>
@@ -5612,14 +5116,14 @@
       </p:sp>
       <p:sp>
         <p:nvSpPr>
-          <p:cNvPr id="8" name="TextBox 7"/>
+          <p:cNvPr id="7" name="TextBox 6"/>
           <p:cNvSpPr txBox="1"/>
           <p:nvPr/>
         </p:nvSpPr>
         <p:spPr>
           <a:xfrm>
-            <a:off x="548640" y="6446520"/>
-            <a:ext cx="5486400" cy="274320"/>
+            <a:off x="10332720" y="6263640"/>
+            <a:ext cx="1371600" cy="457200"/>
           </a:xfrm>
           <a:prstGeom prst="rect">
             <a:avLst/>
@@ -5632,50 +5136,15 @@
           </a:bodyPr>
           <a:lstStyle/>
           <a:p>
-            <a:pPr algn="l"/>
-            <a:r>
-              <a:rPr sz="1000" b="0">
+            <a:pPr algn="r"/>
+            <a:r>
+              <a:rPr sz="2000" b="0">
                 <a:solidFill>
                   <a:srgbClr val="555555"/>
                 </a:solidFill>
-                <a:latin typeface="Calibri"/>
-              </a:rPr>
-              <a:t>Ощепков Е. С.  ·  ВКР 2026  ·  Fitness Tracker</a:t>
-            </a:r>
-          </a:p>
-        </p:txBody>
-      </p:sp>
-      <p:sp>
-        <p:nvSpPr>
-          <p:cNvPr id="9" name="TextBox 8"/>
-          <p:cNvSpPr txBox="1"/>
-          <p:nvPr/>
-        </p:nvSpPr>
-        <p:spPr>
-          <a:xfrm>
-            <a:off x="10515600" y="6446520"/>
-            <a:ext cx="1188720" cy="274320"/>
-          </a:xfrm>
-          <a:prstGeom prst="rect">
-            <a:avLst/>
-          </a:prstGeom>
-          <a:noFill/>
-        </p:spPr>
-        <p:txBody>
-          <a:bodyPr wrap="square">
-            <a:spAutoFit/>
-          </a:bodyPr>
-          <a:lstStyle/>
-          <a:p>
-            <a:pPr algn="r"/>
-            <a:r>
-              <a:rPr sz="1000" b="0">
-                <a:solidFill>
-                  <a:srgbClr val="555555"/>
-                </a:solidFill>
-                <a:latin typeface="Calibri"/>
-              </a:rPr>
-              <a:t>3 / 14</a:t>
+                <a:latin typeface="Times New Roman"/>
+              </a:rPr>
+              <a:t>3</a:t>
             </a:r>
           </a:p>
         </p:txBody>
@@ -5726,7 +5195,7 @@
                 <a:solidFill>
                   <a:srgbClr val="1F1F1F"/>
                 </a:solidFill>
-                <a:latin typeface="Calibri"/>
+                <a:latin typeface="Times New Roman"/>
               </a:rPr>
               <a:t>Архитектура приложения</a:t>
             </a:r>
@@ -5735,50 +5204,7 @@
       </p:sp>
       <p:sp>
         <p:nvSpPr>
-          <p:cNvPr id="3" name="Rectangle 2"/>
-          <p:cNvSpPr/>
-          <p:nvPr/>
-        </p:nvSpPr>
-        <p:spPr>
-          <a:xfrm>
-            <a:off x="548640" y="594360"/>
-            <a:ext cx="1097280" cy="54864"/>
-          </a:xfrm>
-          <a:prstGeom prst="rect">
-            <a:avLst/>
-          </a:prstGeom>
-          <a:solidFill>
-            <a:srgbClr val="7F0DF2"/>
-          </a:solidFill>
-          <a:ln>
-            <a:noFill/>
-          </a:ln>
-        </p:spPr>
-        <p:style>
-          <a:lnRef idx="1">
-            <a:schemeClr val="accent1"/>
-          </a:lnRef>
-          <a:fillRef idx="3">
-            <a:schemeClr val="accent1"/>
-          </a:fillRef>
-          <a:effectRef idx="2">
-            <a:schemeClr val="accent1"/>
-          </a:effectRef>
-          <a:fontRef idx="minor">
-            <a:schemeClr val="lt1"/>
-          </a:fontRef>
-        </p:style>
-        <p:txBody>
-          <a:bodyPr rtlCol="0" anchor="ctr"/>
-          <a:lstStyle/>
-          <a:p>
-            <a:pPr algn="ctr"/>
-          </a:p>
-        </p:txBody>
-      </p:sp>
-      <p:sp>
-        <p:nvSpPr>
-          <p:cNvPr id="4" name="TextBox 3"/>
+          <p:cNvPr id="3" name="TextBox 2"/>
           <p:cNvSpPr txBox="1"/>
           <p:nvPr/>
         </p:nvSpPr>
@@ -5800,11 +5226,11 @@
           <a:p>
             <a:pPr algn="l"/>
             <a:r>
-              <a:rPr sz="1400" b="1">
-                <a:solidFill>
-                  <a:srgbClr val="7F0DF2"/>
-                </a:solidFill>
-                <a:latin typeface="Calibri"/>
+              <a:rPr sz="2200" b="1">
+                <a:solidFill>
+                  <a:srgbClr val="1F1F1F"/>
+                </a:solidFill>
+                <a:latin typeface="Times New Roman"/>
               </a:rPr>
               <a:t>Принципы</a:t>
             </a:r>
@@ -5813,14 +5239,14 @@
       </p:sp>
       <p:sp>
         <p:nvSpPr>
-          <p:cNvPr id="5" name="TextBox 4"/>
+          <p:cNvPr id="4" name="TextBox 3"/>
           <p:cNvSpPr txBox="1"/>
           <p:nvPr/>
         </p:nvSpPr>
         <p:spPr>
           <a:xfrm>
             <a:off x="548640" y="1371600"/>
-            <a:ext cx="5486400" cy="4114800"/>
+            <a:ext cx="5486400" cy="4572000"/>
           </a:xfrm>
           <a:prstGeom prst="rect">
             <a:avLst/>
@@ -5828,86 +5254,101 @@
           <a:noFill/>
         </p:spPr>
         <p:txBody>
-          <a:bodyPr wrap="square">
+          <a:bodyPr wrap="square" anchor="ctr">
             <a:spAutoFit/>
           </a:bodyPr>
           <a:lstStyle/>
           <a:p>
             <a:pPr algn="l">
+              <a:lnSpc>
+                <a:spcPct val="115000"/>
+              </a:lnSpc>
               <a:spcAft>
-                <a:spcPts val="800"/>
+                <a:spcPts val="1800"/>
               </a:spcAft>
             </a:pPr>
             <a:r>
-              <a:rPr sz="1400">
-                <a:solidFill>
-                  <a:srgbClr val="1F1F1F"/>
-                </a:solidFill>
-                <a:latin typeface="Calibri"/>
+              <a:rPr sz="2400">
+                <a:solidFill>
+                  <a:srgbClr val="1F1F1F"/>
+                </a:solidFill>
+                <a:latin typeface="Times New Roman"/>
               </a:rPr>
               <a:t>•  Гибридная схема ML + rules: ранкер ранжирует, composer гарантирует корректность (сплит на день/неделю, разнообразие, объём)</a:t>
             </a:r>
           </a:p>
           <a:p>
             <a:pPr algn="l">
+              <a:lnSpc>
+                <a:spcPct val="115000"/>
+              </a:lnSpc>
               <a:spcAft>
-                <a:spcPts val="800"/>
+                <a:spcPts val="1800"/>
               </a:spcAft>
             </a:pPr>
             <a:r>
-              <a:rPr sz="1400">
-                <a:solidFill>
-                  <a:srgbClr val="1F1F1F"/>
-                </a:solidFill>
-                <a:latin typeface="Calibri"/>
+              <a:rPr sz="2400">
+                <a:solidFill>
+                  <a:srgbClr val="1F1F1F"/>
+                </a:solidFill>
+                <a:latin typeface="Times New Roman"/>
               </a:rPr>
               <a:t>•  Spec-driven разработка: spec 006 фиксирует требования к генератору, spec 012 — к ML-пайплайну</a:t>
             </a:r>
           </a:p>
           <a:p>
             <a:pPr algn="l">
+              <a:lnSpc>
+                <a:spcPct val="115000"/>
+              </a:lnSpc>
               <a:spcAft>
-                <a:spcPts val="800"/>
+                <a:spcPts val="1800"/>
               </a:spcAft>
             </a:pPr>
             <a:r>
-              <a:rPr sz="1400">
-                <a:solidFill>
-                  <a:srgbClr val="1F1F1F"/>
-                </a:solidFill>
-                <a:latin typeface="Calibri"/>
+              <a:rPr sz="2400">
+                <a:solidFill>
+                  <a:srgbClr val="1F1F1F"/>
+                </a:solidFill>
+                <a:latin typeface="Times New Roman"/>
               </a:rPr>
               <a:t>•  Lazy-load ранкера с lru_cache; rule-based fallback при отсутствии или ошибке инференса — без видимого сбоя для пользователя</a:t>
             </a:r>
           </a:p>
           <a:p>
             <a:pPr algn="l">
+              <a:lnSpc>
+                <a:spcPct val="115000"/>
+              </a:lnSpc>
               <a:spcAft>
-                <a:spcPts val="800"/>
+                <a:spcPts val="1800"/>
               </a:spcAft>
             </a:pPr>
             <a:r>
-              <a:rPr sz="1400">
-                <a:solidFill>
-                  <a:srgbClr val="1F1F1F"/>
-                </a:solidFill>
-                <a:latin typeface="Calibri"/>
+              <a:rPr sz="2400">
+                <a:solidFill>
+                  <a:srgbClr val="1F1F1F"/>
+                </a:solidFill>
+                <a:latin typeface="Times New Roman"/>
               </a:rPr>
               <a:t>•  Domain/-слой принимает ExercisePool dataclass'ы, возвращает PlannedPlan без I/O — изолированные unit-тесты на сложной логике composer'а</a:t>
             </a:r>
           </a:p>
           <a:p>
             <a:pPr algn="l">
+              <a:lnSpc>
+                <a:spcPct val="115000"/>
+              </a:lnSpc>
               <a:spcAft>
-                <a:spcPts val="800"/>
+                <a:spcPts val="1800"/>
               </a:spcAft>
             </a:pPr>
             <a:r>
-              <a:rPr sz="1400">
-                <a:solidFill>
-                  <a:srgbClr val="1F1F1F"/>
-                </a:solidFill>
-                <a:latin typeface="Calibri"/>
+              <a:rPr sz="2400">
+                <a:solidFill>
+                  <a:srgbClr val="1F1F1F"/>
+                </a:solidFill>
+                <a:latin typeface="Times New Roman"/>
               </a:rPr>
               <a:t>•  Версионирование артефактов: ml/models/workout_rec/&lt;algo&gt;/v&lt;semver&gt;/</a:t>
             </a:r>
@@ -5916,7 +5357,7 @@
       </p:sp>
       <p:sp>
         <p:nvSpPr>
-          <p:cNvPr id="6" name="TextBox 5"/>
+          <p:cNvPr id="5" name="TextBox 4"/>
           <p:cNvSpPr txBox="1"/>
           <p:nvPr/>
         </p:nvSpPr>
@@ -5938,11 +5379,11 @@
           <a:p>
             <a:pPr algn="l"/>
             <a:r>
-              <a:rPr sz="1400" b="1">
-                <a:solidFill>
-                  <a:srgbClr val="7F0DF2"/>
-                </a:solidFill>
-                <a:latin typeface="Calibri"/>
+              <a:rPr sz="2200" b="1">
+                <a:solidFill>
+                  <a:srgbClr val="1F1F1F"/>
+                </a:solidFill>
+                <a:latin typeface="Times New Roman"/>
               </a:rPr>
               <a:t>Стек</a:t>
             </a:r>
@@ -5951,14 +5392,14 @@
       </p:sp>
       <p:sp>
         <p:nvSpPr>
-          <p:cNvPr id="7" name="TextBox 6"/>
+          <p:cNvPr id="6" name="TextBox 5"/>
           <p:cNvSpPr txBox="1"/>
           <p:nvPr/>
         </p:nvSpPr>
         <p:spPr>
           <a:xfrm>
             <a:off x="6400800" y="1371600"/>
-            <a:ext cx="5486400" cy="4114800"/>
+            <a:ext cx="5486400" cy="4572000"/>
           </a:xfrm>
           <a:prstGeom prst="rect">
             <a:avLst/>
@@ -5966,102 +5407,120 @@
           <a:noFill/>
         </p:spPr>
         <p:txBody>
-          <a:bodyPr wrap="square">
+          <a:bodyPr wrap="square" anchor="ctr">
             <a:spAutoFit/>
           </a:bodyPr>
           <a:lstStyle/>
           <a:p>
             <a:pPr algn="l">
+              <a:lnSpc>
+                <a:spcPct val="115000"/>
+              </a:lnSpc>
               <a:spcAft>
-                <a:spcPts val="800"/>
+                <a:spcPts val="1800"/>
               </a:spcAft>
             </a:pPr>
             <a:r>
-              <a:rPr sz="1400">
-                <a:solidFill>
-                  <a:srgbClr val="1F1F1F"/>
-                </a:solidFill>
-                <a:latin typeface="Calibri"/>
+              <a:rPr sz="2400">
+                <a:solidFill>
+                  <a:srgbClr val="1F1F1F"/>
+                </a:solidFill>
+                <a:latin typeface="Times New Roman"/>
               </a:rPr>
               <a:t>•  Backend: FastAPI + SQLAlchemy 2 (async) + PostgreSQL 16</a:t>
             </a:r>
           </a:p>
           <a:p>
             <a:pPr algn="l">
+              <a:lnSpc>
+                <a:spcPct val="115000"/>
+              </a:lnSpc>
               <a:spcAft>
-                <a:spcPts val="800"/>
+                <a:spcPts val="1800"/>
               </a:spcAft>
             </a:pPr>
             <a:r>
-              <a:rPr sz="1400">
-                <a:solidFill>
-                  <a:srgbClr val="1F1F1F"/>
-                </a:solidFill>
-                <a:latin typeface="Calibri"/>
+              <a:rPr sz="2400">
+                <a:solidFill>
+                  <a:srgbClr val="1F1F1F"/>
+                </a:solidFill>
+                <a:latin typeface="Times New Roman"/>
               </a:rPr>
               <a:t>•  ML: LightGBM, scikit-learn, pandas, joblib</a:t>
             </a:r>
           </a:p>
           <a:p>
             <a:pPr algn="l">
+              <a:lnSpc>
+                <a:spcPct val="115000"/>
+              </a:lnSpc>
               <a:spcAft>
-                <a:spcPts val="800"/>
+                <a:spcPts val="1800"/>
               </a:spcAft>
             </a:pPr>
             <a:r>
-              <a:rPr sz="1400">
-                <a:solidFill>
-                  <a:srgbClr val="1F1F1F"/>
-                </a:solidFill>
-                <a:latin typeface="Calibri"/>
+              <a:rPr sz="2400">
+                <a:solidFill>
+                  <a:srgbClr val="1F1F1F"/>
+                </a:solidFill>
+                <a:latin typeface="Times New Roman"/>
               </a:rPr>
               <a:t>•  Frontend: Flutter (Web/PWA) + Riverpod + go_router + Dio</a:t>
             </a:r>
           </a:p>
           <a:p>
             <a:pPr algn="l">
+              <a:lnSpc>
+                <a:spcPct val="115000"/>
+              </a:lnSpc>
               <a:spcAft>
-                <a:spcPts val="800"/>
+                <a:spcPts val="1800"/>
               </a:spcAft>
             </a:pPr>
             <a:r>
-              <a:rPr sz="1400">
-                <a:solidFill>
-                  <a:srgbClr val="1F1F1F"/>
-                </a:solidFill>
-                <a:latin typeface="Calibri"/>
+              <a:rPr sz="2400">
+                <a:solidFill>
+                  <a:srgbClr val="1F1F1F"/>
+                </a:solidFill>
+                <a:latin typeface="Times New Roman"/>
               </a:rPr>
               <a:t>•  Pipeline: ml/etl/workout_recommender/ + ml/training/workout_recommender/</a:t>
             </a:r>
           </a:p>
           <a:p>
             <a:pPr algn="l">
+              <a:lnSpc>
+                <a:spcPct val="115000"/>
+              </a:lnSpc>
               <a:spcAft>
-                <a:spcPts val="800"/>
+                <a:spcPts val="1800"/>
               </a:spcAft>
             </a:pPr>
             <a:r>
-              <a:rPr sz="1400">
-                <a:solidFill>
-                  <a:srgbClr val="1F1F1F"/>
-                </a:solidFill>
-                <a:latin typeface="Calibri"/>
+              <a:rPr sz="2400">
+                <a:solidFill>
+                  <a:srgbClr val="1F1F1F"/>
+                </a:solidFill>
+                <a:latin typeface="Times New Roman"/>
               </a:rPr>
               <a:t>•  Инфраструктура: Docker Compose, Alembic-миграции, GitHub Actions</a:t>
             </a:r>
           </a:p>
           <a:p>
             <a:pPr algn="l">
+              <a:lnSpc>
+                <a:spcPct val="115000"/>
+              </a:lnSpc>
               <a:spcAft>
-                <a:spcPts val="800"/>
+                <a:spcPts val="1800"/>
               </a:spcAft>
             </a:pPr>
             <a:r>
-              <a:rPr sz="1400">
-                <a:solidFill>
-                  <a:srgbClr val="1F1F1F"/>
-                </a:solidFill>
-                <a:latin typeface="Calibri"/>
+              <a:rPr sz="2400">
+                <a:solidFill>
+                  <a:srgbClr val="1F1F1F"/>
+                </a:solidFill>
+                <a:latin typeface="Times New Roman"/>
               </a:rPr>
               <a:t>•  Тесты: pytest + testcontainers PostgreSQL</a:t>
             </a:r>
@@ -6070,14 +5529,14 @@
       </p:sp>
       <p:sp>
         <p:nvSpPr>
-          <p:cNvPr id="8" name="TextBox 7"/>
+          <p:cNvPr id="7" name="TextBox 6"/>
           <p:cNvSpPr txBox="1"/>
           <p:nvPr/>
         </p:nvSpPr>
         <p:spPr>
           <a:xfrm>
-            <a:off x="548640" y="6446520"/>
-            <a:ext cx="5486400" cy="274320"/>
+            <a:off x="10332720" y="6263640"/>
+            <a:ext cx="1371600" cy="457200"/>
           </a:xfrm>
           <a:prstGeom prst="rect">
             <a:avLst/>
@@ -6090,50 +5549,15 @@
           </a:bodyPr>
           <a:lstStyle/>
           <a:p>
-            <a:pPr algn="l"/>
-            <a:r>
-              <a:rPr sz="1000" b="0">
+            <a:pPr algn="r"/>
+            <a:r>
+              <a:rPr sz="2000" b="0">
                 <a:solidFill>
                   <a:srgbClr val="555555"/>
                 </a:solidFill>
-                <a:latin typeface="Calibri"/>
-              </a:rPr>
-              <a:t>Ощепков Е. С.  ·  ВКР 2026  ·  Fitness Tracker</a:t>
-            </a:r>
-          </a:p>
-        </p:txBody>
-      </p:sp>
-      <p:sp>
-        <p:nvSpPr>
-          <p:cNvPr id="9" name="TextBox 8"/>
-          <p:cNvSpPr txBox="1"/>
-          <p:nvPr/>
-        </p:nvSpPr>
-        <p:spPr>
-          <a:xfrm>
-            <a:off x="10515600" y="6446520"/>
-            <a:ext cx="1188720" cy="274320"/>
-          </a:xfrm>
-          <a:prstGeom prst="rect">
-            <a:avLst/>
-          </a:prstGeom>
-          <a:noFill/>
-        </p:spPr>
-        <p:txBody>
-          <a:bodyPr wrap="square">
-            <a:spAutoFit/>
-          </a:bodyPr>
-          <a:lstStyle/>
-          <a:p>
-            <a:pPr algn="r"/>
-            <a:r>
-              <a:rPr sz="1000" b="0">
-                <a:solidFill>
-                  <a:srgbClr val="555555"/>
-                </a:solidFill>
-                <a:latin typeface="Calibri"/>
-              </a:rPr>
-              <a:t>4 / 14</a:t>
+                <a:latin typeface="Times New Roman"/>
+              </a:rPr>
+              <a:t>4</a:t>
             </a:r>
           </a:p>
         </p:txBody>
@@ -6184,7 +5608,7 @@
                 <a:solidFill>
                   <a:srgbClr val="1F1F1F"/>
                 </a:solidFill>
-                <a:latin typeface="Calibri"/>
+                <a:latin typeface="Times New Roman"/>
               </a:rPr>
               <a:t>Гибридный алгоритм: ML-ранкер + composer</a:t>
             </a:r>
@@ -6193,50 +5617,7 @@
       </p:sp>
       <p:sp>
         <p:nvSpPr>
-          <p:cNvPr id="3" name="Rectangle 2"/>
-          <p:cNvSpPr/>
-          <p:nvPr/>
-        </p:nvSpPr>
-        <p:spPr>
-          <a:xfrm>
-            <a:off x="548640" y="594360"/>
-            <a:ext cx="1097280" cy="54864"/>
-          </a:xfrm>
-          <a:prstGeom prst="rect">
-            <a:avLst/>
-          </a:prstGeom>
-          <a:solidFill>
-            <a:srgbClr val="7F0DF2"/>
-          </a:solidFill>
-          <a:ln>
-            <a:noFill/>
-          </a:ln>
-        </p:spPr>
-        <p:style>
-          <a:lnRef idx="1">
-            <a:schemeClr val="accent1"/>
-          </a:lnRef>
-          <a:fillRef idx="3">
-            <a:schemeClr val="accent1"/>
-          </a:fillRef>
-          <a:effectRef idx="2">
-            <a:schemeClr val="accent1"/>
-          </a:effectRef>
-          <a:fontRef idx="minor">
-            <a:schemeClr val="lt1"/>
-          </a:fontRef>
-        </p:style>
-        <p:txBody>
-          <a:bodyPr rtlCol="0" anchor="ctr"/>
-          <a:lstStyle/>
-          <a:p>
-            <a:pPr algn="ctr"/>
-          </a:p>
-        </p:txBody>
-      </p:sp>
-      <p:sp>
-        <p:nvSpPr>
-          <p:cNvPr id="4" name="TextBox 3"/>
+          <p:cNvPr id="3" name="TextBox 2"/>
           <p:cNvSpPr txBox="1"/>
           <p:nvPr/>
         </p:nvSpPr>
@@ -6258,11 +5639,11 @@
           <a:p>
             <a:pPr algn="l"/>
             <a:r>
-              <a:rPr sz="1800" b="0">
-                <a:solidFill>
-                  <a:srgbClr val="1F1F1F"/>
-                </a:solidFill>
-                <a:latin typeface="Calibri"/>
+              <a:rPr sz="2400" b="0">
+                <a:solidFill>
+                  <a:srgbClr val="1F1F1F"/>
+                </a:solidFill>
+                <a:latin typeface="Times New Roman"/>
               </a:rPr>
               <a:t>Двухстадийная схема: ML сначала ранжирует, потом детерминированные правила собирают валидный план.</a:t>
             </a:r>
@@ -6271,7 +5652,7 @@
       </p:sp>
       <p:sp>
         <p:nvSpPr>
-          <p:cNvPr id="5" name="TextBox 4"/>
+          <p:cNvPr id="4" name="TextBox 3"/>
           <p:cNvSpPr txBox="1"/>
           <p:nvPr/>
         </p:nvSpPr>
@@ -6286,86 +5667,101 @@
           <a:noFill/>
         </p:spPr>
         <p:txBody>
-          <a:bodyPr wrap="square">
+          <a:bodyPr wrap="square" anchor="ctr">
             <a:spAutoFit/>
           </a:bodyPr>
           <a:lstStyle/>
           <a:p>
             <a:pPr algn="l">
+              <a:lnSpc>
+                <a:spcPct val="115000"/>
+              </a:lnSpc>
               <a:spcAft>
-                <a:spcPts val="800"/>
+                <a:spcPts val="1800"/>
               </a:spcAft>
             </a:pPr>
             <a:r>
-              <a:rPr sz="1700">
-                <a:solidFill>
-                  <a:srgbClr val="1F1F1F"/>
-                </a:solidFill>
-                <a:latin typeface="Calibri"/>
+              <a:rPr sz="2600">
+                <a:solidFill>
+                  <a:srgbClr val="1F1F1F"/>
+                </a:solidFill>
+                <a:latin typeface="Times New Roman"/>
               </a:rPr>
               <a:t>•  Стадия 1 (ML): LightGBM Classifier выдаёт score = P(упражнение подходит профилю); ранжирование каталога по этим score</a:t>
             </a:r>
           </a:p>
           <a:p>
             <a:pPr algn="l">
+              <a:lnSpc>
+                <a:spcPct val="115000"/>
+              </a:lnSpc>
               <a:spcAft>
-                <a:spcPts val="800"/>
+                <a:spcPts val="1800"/>
               </a:spcAft>
             </a:pPr>
             <a:r>
-              <a:rPr sz="1700">
-                <a:solidFill>
-                  <a:srgbClr val="1F1F1F"/>
-                </a:solidFill>
-                <a:latin typeface="Calibri"/>
+              <a:rPr sz="2600">
+                <a:solidFill>
+                  <a:srgbClr val="1F1F1F"/>
+                </a:solidFill>
+                <a:latin typeface="Times New Roman"/>
               </a:rPr>
               <a:t>•  Прод-артефакт — один LightGBM-бустер на 320 деревьев и 36 признаков профиля + упражнения; бинарная классификация с целевой функцией log-loss и is_unbalance=True для несбалансированных меток</a:t>
             </a:r>
           </a:p>
           <a:p>
             <a:pPr algn="l">
+              <a:lnSpc>
+                <a:spcPct val="115000"/>
+              </a:lnSpc>
               <a:spcAft>
-                <a:spcPts val="800"/>
+                <a:spcPts val="1800"/>
               </a:spcAft>
             </a:pPr>
             <a:r>
-              <a:rPr sz="1700">
-                <a:solidFill>
-                  <a:srgbClr val="1F1F1F"/>
-                </a:solidFill>
-                <a:latin typeface="Calibri"/>
+              <a:rPr sz="2600">
+                <a:solidFill>
+                  <a:srgbClr val="1F1F1F"/>
+                </a:solidFill>
+                <a:latin typeface="Times New Roman"/>
               </a:rPr>
               <a:t>•  Стадия 2 (composer): обход ранжированного каталога с проверкой сплита (push/pull/legs), оборудования, баланса compound/isolation</a:t>
             </a:r>
           </a:p>
           <a:p>
             <a:pPr algn="l">
+              <a:lnSpc>
+                <a:spcPct val="115000"/>
+              </a:lnSpc>
               <a:spcAft>
-                <a:spcPts val="800"/>
+                <a:spcPts val="1800"/>
               </a:spcAft>
             </a:pPr>
             <a:r>
-              <a:rPr sz="1700">
-                <a:solidFill>
-                  <a:srgbClr val="1F1F1F"/>
-                </a:solidFill>
-                <a:latin typeface="Calibri"/>
+              <a:rPr sz="2600">
+                <a:solidFill>
+                  <a:srgbClr val="1F1F1F"/>
+                </a:solidFill>
+                <a:latin typeface="Times New Roman"/>
               </a:rPr>
               <a:t>•  Fallback path: при отсутствии ML-артефакта composer использует rule-based score (тот же интерфейс ExercisePool)</a:t>
             </a:r>
           </a:p>
           <a:p>
             <a:pPr algn="l">
+              <a:lnSpc>
+                <a:spcPct val="115000"/>
+              </a:lnSpc>
               <a:spcAft>
-                <a:spcPts val="800"/>
+                <a:spcPts val="1800"/>
               </a:spcAft>
             </a:pPr>
             <a:r>
-              <a:rPr sz="1700">
-                <a:solidFill>
-                  <a:srgbClr val="1F1F1F"/>
-                </a:solidFill>
-                <a:latin typeface="Calibri"/>
+              <a:rPr sz="2600">
+                <a:solidFill>
+                  <a:srgbClr val="1F1F1F"/>
+                </a:solidFill>
+                <a:latin typeface="Times New Roman"/>
               </a:rPr>
               <a:t>•  Выход — иерархия workout_plan → plan_weeks → plan_days → plan_exercises, сохраняется в БД в одной транзакции</a:t>
             </a:r>
@@ -6374,14 +5770,14 @@
       </p:sp>
       <p:sp>
         <p:nvSpPr>
-          <p:cNvPr id="6" name="TextBox 5"/>
+          <p:cNvPr id="5" name="TextBox 4"/>
           <p:cNvSpPr txBox="1"/>
           <p:nvPr/>
         </p:nvSpPr>
         <p:spPr>
           <a:xfrm>
-            <a:off x="548640" y="6446520"/>
-            <a:ext cx="5486400" cy="274320"/>
+            <a:off x="10332720" y="6263640"/>
+            <a:ext cx="1371600" cy="457200"/>
           </a:xfrm>
           <a:prstGeom prst="rect">
             <a:avLst/>
@@ -6394,50 +5790,15 @@
           </a:bodyPr>
           <a:lstStyle/>
           <a:p>
-            <a:pPr algn="l"/>
-            <a:r>
-              <a:rPr sz="1000" b="0">
+            <a:pPr algn="r"/>
+            <a:r>
+              <a:rPr sz="2000" b="0">
                 <a:solidFill>
                   <a:srgbClr val="555555"/>
                 </a:solidFill>
-                <a:latin typeface="Calibri"/>
-              </a:rPr>
-              <a:t>Ощепков Е. С.  ·  ВКР 2026  ·  Fitness Tracker</a:t>
-            </a:r>
-          </a:p>
-        </p:txBody>
-      </p:sp>
-      <p:sp>
-        <p:nvSpPr>
-          <p:cNvPr id="7" name="TextBox 6"/>
-          <p:cNvSpPr txBox="1"/>
-          <p:nvPr/>
-        </p:nvSpPr>
-        <p:spPr>
-          <a:xfrm>
-            <a:off x="10515600" y="6446520"/>
-            <a:ext cx="1188720" cy="274320"/>
-          </a:xfrm>
-          <a:prstGeom prst="rect">
-            <a:avLst/>
-          </a:prstGeom>
-          <a:noFill/>
-        </p:spPr>
-        <p:txBody>
-          <a:bodyPr wrap="square">
-            <a:spAutoFit/>
-          </a:bodyPr>
-          <a:lstStyle/>
-          <a:p>
-            <a:pPr algn="r"/>
-            <a:r>
-              <a:rPr sz="1000" b="0">
-                <a:solidFill>
-                  <a:srgbClr val="555555"/>
-                </a:solidFill>
-                <a:latin typeface="Calibri"/>
-              </a:rPr>
-              <a:t>5 / 14</a:t>
+                <a:latin typeface="Times New Roman"/>
+              </a:rPr>
+              <a:t>5</a:t>
             </a:r>
           </a:p>
         </p:txBody>
@@ -6488,7 +5849,7 @@
                 <a:solidFill>
                   <a:srgbClr val="1F1F1F"/>
                 </a:solidFill>
-                <a:latin typeface="Calibri"/>
+                <a:latin typeface="Times New Roman"/>
               </a:rPr>
               <a:t>Датасет: 97 760 пар user × exercise</a:t>
             </a:r>
@@ -6497,50 +5858,7 @@
       </p:sp>
       <p:sp>
         <p:nvSpPr>
-          <p:cNvPr id="3" name="Rectangle 2"/>
-          <p:cNvSpPr/>
-          <p:nvPr/>
-        </p:nvSpPr>
-        <p:spPr>
-          <a:xfrm>
-            <a:off x="548640" y="594360"/>
-            <a:ext cx="1097280" cy="54864"/>
-          </a:xfrm>
-          <a:prstGeom prst="rect">
-            <a:avLst/>
-          </a:prstGeom>
-          <a:solidFill>
-            <a:srgbClr val="7F0DF2"/>
-          </a:solidFill>
-          <a:ln>
-            <a:noFill/>
-          </a:ln>
-        </p:spPr>
-        <p:style>
-          <a:lnRef idx="1">
-            <a:schemeClr val="accent1"/>
-          </a:lnRef>
-          <a:fillRef idx="3">
-            <a:schemeClr val="accent1"/>
-          </a:fillRef>
-          <a:effectRef idx="2">
-            <a:schemeClr val="accent1"/>
-          </a:effectRef>
-          <a:fontRef idx="minor">
-            <a:schemeClr val="lt1"/>
-          </a:fontRef>
-        </p:style>
-        <p:txBody>
-          <a:bodyPr rtlCol="0" anchor="ctr"/>
-          <a:lstStyle/>
-          <a:p>
-            <a:pPr algn="ctr"/>
-          </a:p>
-        </p:txBody>
-      </p:sp>
-      <p:sp>
-        <p:nvSpPr>
-          <p:cNvPr id="4" name="TextBox 3"/>
+          <p:cNvPr id="3" name="TextBox 2"/>
           <p:cNvSpPr txBox="1"/>
           <p:nvPr/>
         </p:nvSpPr>
@@ -6562,11 +5880,11 @@
           <a:p>
             <a:pPr algn="l"/>
             <a:r>
-              <a:rPr sz="1800" b="0">
-                <a:solidFill>
-                  <a:srgbClr val="1F1F1F"/>
-                </a:solidFill>
-                <a:latin typeface="Calibri"/>
+              <a:rPr sz="2400" b="0">
+                <a:solidFill>
+                  <a:srgbClr val="1F1F1F"/>
+                </a:solidFill>
+                <a:latin typeface="Times New Roman"/>
               </a:rPr>
               <a:t>Открытых датасетов «профиль пользователя → подходящие упражнения» нет. Решение — программная разметка через rule-based labels.</a:t>
             </a:r>
@@ -6575,7 +5893,7 @@
       </p:sp>
       <p:sp>
         <p:nvSpPr>
-          <p:cNvPr id="5" name="TextBox 4"/>
+          <p:cNvPr id="4" name="TextBox 3"/>
           <p:cNvSpPr txBox="1"/>
           <p:nvPr/>
         </p:nvSpPr>
@@ -6590,86 +5908,101 @@
           <a:noFill/>
         </p:spPr>
         <p:txBody>
-          <a:bodyPr wrap="square">
+          <a:bodyPr wrap="square" anchor="ctr">
             <a:spAutoFit/>
           </a:bodyPr>
           <a:lstStyle/>
           <a:p>
             <a:pPr algn="l">
+              <a:lnSpc>
+                <a:spcPct val="115000"/>
+              </a:lnSpc>
               <a:spcAft>
-                <a:spcPts val="800"/>
+                <a:spcPts val="1800"/>
               </a:spcAft>
             </a:pPr>
             <a:r>
-              <a:rPr sz="1700">
-                <a:solidFill>
-                  <a:srgbClr val="1F1F1F"/>
-                </a:solidFill>
-                <a:latin typeface="Calibri"/>
+              <a:rPr sz="2600">
+                <a:solidFill>
+                  <a:srgbClr val="1F1F1F"/>
+                </a:solidFill>
+                <a:latin typeface="Times New Roman"/>
               </a:rPr>
               <a:t>•  Источник профилей: Kaggle gym-members-exercise-dataset (973 строки после фильтрации)</a:t>
             </a:r>
           </a:p>
           <a:p>
             <a:pPr algn="l">
+              <a:lnSpc>
+                <a:spcPct val="115000"/>
+              </a:lnSpc>
               <a:spcAft>
-                <a:spcPts val="800"/>
+                <a:spcPts val="1800"/>
               </a:spcAft>
             </a:pPr>
             <a:r>
-              <a:rPr sz="1700">
-                <a:solidFill>
-                  <a:srgbClr val="1F1F1F"/>
-                </a:solidFill>
-                <a:latin typeface="Calibri"/>
+              <a:rPr sz="2600">
+                <a:solidFill>
+                  <a:srgbClr val="1F1F1F"/>
+                </a:solidFill>
+                <a:latin typeface="Times New Roman"/>
               </a:rPr>
               <a:t>•  Каталог упражнений: 100+ упражнений из API Ninjas + дополнения, разнесены по группам мышц / типу / оборудованию</a:t>
             </a:r>
           </a:p>
           <a:p>
             <a:pPr algn="l">
+              <a:lnSpc>
+                <a:spcPct val="115000"/>
+              </a:lnSpc>
               <a:spcAft>
-                <a:spcPts val="800"/>
+                <a:spcPts val="1800"/>
               </a:spcAft>
             </a:pPr>
             <a:r>
-              <a:rPr sz="1700">
-                <a:solidFill>
-                  <a:srgbClr val="1F1F1F"/>
-                </a:solidFill>
-                <a:latin typeface="Calibri"/>
+              <a:rPr sz="2600">
+                <a:solidFill>
+                  <a:srgbClr val="1F1F1F"/>
+                </a:solidFill>
+                <a:latin typeface="Times New Roman"/>
               </a:rPr>
               <a:t>•  Разметка: для каждой пары (профиль, упражнение) применяются фиксированные правила → бинарная метка «рекомендуется/нет»</a:t>
             </a:r>
           </a:p>
           <a:p>
             <a:pPr algn="l">
+              <a:lnSpc>
+                <a:spcPct val="115000"/>
+              </a:lnSpc>
               <a:spcAft>
-                <a:spcPts val="800"/>
+                <a:spcPts val="1800"/>
               </a:spcAft>
             </a:pPr>
             <a:r>
-              <a:rPr sz="1700">
-                <a:solidFill>
-                  <a:srgbClr val="1F1F1F"/>
-                </a:solidFill>
-                <a:latin typeface="Calibri"/>
+              <a:rPr sz="2600">
+                <a:solidFill>
+                  <a:srgbClr val="1F1F1F"/>
+                </a:solidFill>
+                <a:latin typeface="Times New Roman"/>
               </a:rPr>
               <a:t>•  Итог: 97 760 пар; сплит 70/15/15 без leakage по anon_user_id — 68 432 train / 14 664 val / 14 664 test</a:t>
             </a:r>
           </a:p>
           <a:p>
             <a:pPr algn="l">
+              <a:lnSpc>
+                <a:spcPct val="115000"/>
+              </a:lnSpc>
               <a:spcAft>
-                <a:spcPts val="800"/>
+                <a:spcPts val="1800"/>
               </a:spcAft>
             </a:pPr>
             <a:r>
-              <a:rPr sz="1700">
-                <a:solidFill>
-                  <a:srgbClr val="1F1F1F"/>
-                </a:solidFill>
-                <a:latin typeface="Calibri"/>
+              <a:rPr sz="2600">
+                <a:solidFill>
+                  <a:srgbClr val="1F1F1F"/>
+                </a:solidFill>
+                <a:latin typeface="Times New Roman"/>
               </a:rPr>
               <a:t>•  Воспроизводимость: SHA-256 датасета фиксируется в manifest.json; правила разметки версионированы вместе со скриптом ETL</a:t>
             </a:r>
@@ -6678,14 +6011,14 @@
       </p:sp>
       <p:sp>
         <p:nvSpPr>
-          <p:cNvPr id="6" name="TextBox 5"/>
+          <p:cNvPr id="5" name="TextBox 4"/>
           <p:cNvSpPr txBox="1"/>
           <p:nvPr/>
         </p:nvSpPr>
         <p:spPr>
           <a:xfrm>
-            <a:off x="548640" y="6446520"/>
-            <a:ext cx="5486400" cy="274320"/>
+            <a:off x="10332720" y="6263640"/>
+            <a:ext cx="1371600" cy="457200"/>
           </a:xfrm>
           <a:prstGeom prst="rect">
             <a:avLst/>
@@ -6698,50 +6031,15 @@
           </a:bodyPr>
           <a:lstStyle/>
           <a:p>
-            <a:pPr algn="l"/>
-            <a:r>
-              <a:rPr sz="1000" b="0">
+            <a:pPr algn="r"/>
+            <a:r>
+              <a:rPr sz="2000" b="0">
                 <a:solidFill>
                   <a:srgbClr val="555555"/>
                 </a:solidFill>
-                <a:latin typeface="Calibri"/>
-              </a:rPr>
-              <a:t>Ощепков Е. С.  ·  ВКР 2026  ·  Fitness Tracker</a:t>
-            </a:r>
-          </a:p>
-        </p:txBody>
-      </p:sp>
-      <p:sp>
-        <p:nvSpPr>
-          <p:cNvPr id="7" name="TextBox 6"/>
-          <p:cNvSpPr txBox="1"/>
-          <p:nvPr/>
-        </p:nvSpPr>
-        <p:spPr>
-          <a:xfrm>
-            <a:off x="10515600" y="6446520"/>
-            <a:ext cx="1188720" cy="274320"/>
-          </a:xfrm>
-          <a:prstGeom prst="rect">
-            <a:avLst/>
-          </a:prstGeom>
-          <a:noFill/>
-        </p:spPr>
-        <p:txBody>
-          <a:bodyPr wrap="square">
-            <a:spAutoFit/>
-          </a:bodyPr>
-          <a:lstStyle/>
-          <a:p>
-            <a:pPr algn="r"/>
-            <a:r>
-              <a:rPr sz="1000" b="0">
-                <a:solidFill>
-                  <a:srgbClr val="555555"/>
-                </a:solidFill>
-                <a:latin typeface="Calibri"/>
-              </a:rPr>
-              <a:t>6 / 14</a:t>
+                <a:latin typeface="Times New Roman"/>
+              </a:rPr>
+              <a:t>6</a:t>
             </a:r>
           </a:p>
         </p:txBody>
@@ -6792,59 +6090,16 @@
                 <a:solidFill>
                   <a:srgbClr val="1F1F1F"/>
                 </a:solidFill>
-                <a:latin typeface="Calibri"/>
+                <a:latin typeface="Times New Roman"/>
               </a:rPr>
               <a:t>Сравнение моделей ранжирования</a:t>
             </a:r>
-          </a:p>
-        </p:txBody>
-      </p:sp>
-      <p:sp>
-        <p:nvSpPr>
-          <p:cNvPr id="3" name="Rectangle 2"/>
-          <p:cNvSpPr/>
-          <p:nvPr/>
-        </p:nvSpPr>
-        <p:spPr>
-          <a:xfrm>
-            <a:off x="548640" y="594360"/>
-            <a:ext cx="1097280" cy="54864"/>
-          </a:xfrm>
-          <a:prstGeom prst="rect">
-            <a:avLst/>
-          </a:prstGeom>
-          <a:solidFill>
-            <a:srgbClr val="7F0DF2"/>
-          </a:solidFill>
-          <a:ln>
-            <a:noFill/>
-          </a:ln>
-        </p:spPr>
-        <p:style>
-          <a:lnRef idx="1">
-            <a:schemeClr val="accent1"/>
-          </a:lnRef>
-          <a:fillRef idx="3">
-            <a:schemeClr val="accent1"/>
-          </a:fillRef>
-          <a:effectRef idx="2">
-            <a:schemeClr val="accent1"/>
-          </a:effectRef>
-          <a:fontRef idx="minor">
-            <a:schemeClr val="lt1"/>
-          </a:fontRef>
-        </p:style>
-        <p:txBody>
-          <a:bodyPr rtlCol="0" anchor="ctr"/>
-          <a:lstStyle/>
-          <a:p>
-            <a:pPr algn="ctr"/>
           </a:p>
         </p:txBody>
       </p:sp>
       <p:pic>
         <p:nvPicPr>
-          <p:cNvPr id="4" name="Picture 3" descr="image.png"/>
+          <p:cNvPr id="3" name="Picture 2" descr="image.png"/>
           <p:cNvPicPr>
             <a:picLocks noChangeAspect="1"/>
           </p:cNvPicPr>
@@ -6858,8 +6113,8 @@
         </p:blipFill>
         <p:spPr>
           <a:xfrm>
-            <a:off x="1097280" y="1005840"/>
-            <a:ext cx="10058400" cy="4978400"/>
+            <a:off x="1292448" y="960120"/>
+            <a:ext cx="9606798" cy="4754880"/>
           </a:xfrm>
           <a:prstGeom prst="rect">
             <a:avLst/>
@@ -6868,7 +6123,7 @@
       </p:pic>
       <p:sp>
         <p:nvSpPr>
-          <p:cNvPr id="5" name="TextBox 4"/>
+          <p:cNvPr id="4" name="TextBox 3"/>
           <p:cNvSpPr txBox="1"/>
           <p:nvPr/>
         </p:nvSpPr>
@@ -6894,23 +6149,23 @@
                 <a:solidFill>
                   <a:srgbClr val="555555"/>
                 </a:solidFill>
-                <a:latin typeface="Calibri"/>
-              </a:rPr>
-              <a:t>LightGBM выбран в качестве прод-модели: ROC-AUC=0.985, PR-AUC=0.993, P@8=0.99 на тестовом сплите 14 664 пар.</a:t>
-            </a:r>
-          </a:p>
-        </p:txBody>
-      </p:sp>
-      <p:sp>
-        <p:nvSpPr>
-          <p:cNvPr id="6" name="TextBox 5"/>
+                <a:latin typeface="Times New Roman"/>
+              </a:rPr>
+              <a:t>LightGBM выбран в качестве основной модели: ROC-AUC=0.985, PR-AUC=0.993, P@8=0.99 на тестовом сплите 14 664 пар.</a:t>
+            </a:r>
+          </a:p>
+        </p:txBody>
+      </p:sp>
+      <p:sp>
+        <p:nvSpPr>
+          <p:cNvPr id="5" name="TextBox 4"/>
           <p:cNvSpPr txBox="1"/>
           <p:nvPr/>
         </p:nvSpPr>
         <p:spPr>
           <a:xfrm>
-            <a:off x="548640" y="6446520"/>
-            <a:ext cx="5486400" cy="274320"/>
+            <a:off x="10332720" y="6263640"/>
+            <a:ext cx="1371600" cy="457200"/>
           </a:xfrm>
           <a:prstGeom prst="rect">
             <a:avLst/>
@@ -6923,50 +6178,15 @@
           </a:bodyPr>
           <a:lstStyle/>
           <a:p>
-            <a:pPr algn="l"/>
-            <a:r>
-              <a:rPr sz="1000" b="0">
+            <a:pPr algn="r"/>
+            <a:r>
+              <a:rPr sz="2000" b="0">
                 <a:solidFill>
                   <a:srgbClr val="555555"/>
                 </a:solidFill>
-                <a:latin typeface="Calibri"/>
-              </a:rPr>
-              <a:t>Ощепков Е. С.  ·  ВКР 2026  ·  Fitness Tracker</a:t>
-            </a:r>
-          </a:p>
-        </p:txBody>
-      </p:sp>
-      <p:sp>
-        <p:nvSpPr>
-          <p:cNvPr id="7" name="TextBox 6"/>
-          <p:cNvSpPr txBox="1"/>
-          <p:nvPr/>
-        </p:nvSpPr>
-        <p:spPr>
-          <a:xfrm>
-            <a:off x="10515600" y="6446520"/>
-            <a:ext cx="1188720" cy="274320"/>
-          </a:xfrm>
-          <a:prstGeom prst="rect">
-            <a:avLst/>
-          </a:prstGeom>
-          <a:noFill/>
-        </p:spPr>
-        <p:txBody>
-          <a:bodyPr wrap="square">
-            <a:spAutoFit/>
-          </a:bodyPr>
-          <a:lstStyle/>
-          <a:p>
-            <a:pPr algn="r"/>
-            <a:r>
-              <a:rPr sz="1000" b="0">
-                <a:solidFill>
-                  <a:srgbClr val="555555"/>
-                </a:solidFill>
-                <a:latin typeface="Calibri"/>
-              </a:rPr>
-              <a:t>7 / 14</a:t>
+                <a:latin typeface="Times New Roman"/>
+              </a:rPr>
+              <a:t>7</a:t>
             </a:r>
           </a:p>
         </p:txBody>
@@ -7017,7 +6237,7 @@
                 <a:solidFill>
                   <a:srgbClr val="1F1F1F"/>
                 </a:solidFill>
-                <a:latin typeface="Calibri"/>
+                <a:latin typeface="Times New Roman"/>
               </a:rPr>
               <a:t>Метрики моделей: ранжирование упражнений</a:t>
             </a:r>
@@ -7026,44 +6246,36 @@
       </p:sp>
       <p:sp>
         <p:nvSpPr>
-          <p:cNvPr id="3" name="Rectangle 2"/>
-          <p:cNvSpPr/>
+          <p:cNvPr id="3" name="TextBox 2"/>
+          <p:cNvSpPr txBox="1"/>
           <p:nvPr/>
         </p:nvSpPr>
         <p:spPr>
           <a:xfrm>
-            <a:off x="548640" y="594360"/>
-            <a:ext cx="1097280" cy="54864"/>
+            <a:off x="838047" y="1668780"/>
+            <a:ext cx="10515600" cy="365760"/>
           </a:xfrm>
           <a:prstGeom prst="rect">
             <a:avLst/>
           </a:prstGeom>
-          <a:solidFill>
-            <a:srgbClr val="7F0DF2"/>
-          </a:solidFill>
-          <a:ln>
-            <a:noFill/>
-          </a:ln>
-        </p:spPr>
-        <p:style>
-          <a:lnRef idx="1">
-            <a:schemeClr val="accent1"/>
-          </a:lnRef>
-          <a:fillRef idx="3">
-            <a:schemeClr val="accent1"/>
-          </a:fillRef>
-          <a:effectRef idx="2">
-            <a:schemeClr val="accent1"/>
-          </a:effectRef>
-          <a:fontRef idx="minor">
-            <a:schemeClr val="lt1"/>
-          </a:fontRef>
-        </p:style>
-        <p:txBody>
-          <a:bodyPr rtlCol="0" anchor="ctr"/>
-          <a:lstStyle/>
-          <a:p>
-            <a:pPr algn="ctr"/>
+          <a:noFill/>
+        </p:spPr>
+        <p:txBody>
+          <a:bodyPr wrap="square">
+            <a:spAutoFit/>
+          </a:bodyPr>
+          <a:lstStyle/>
+          <a:p>
+            <a:pPr algn="r"/>
+            <a:r>
+              <a:rPr sz="1400" b="0">
+                <a:solidFill>
+                  <a:srgbClr val="1F1F1F"/>
+                </a:solidFill>
+                <a:latin typeface="Times New Roman"/>
+              </a:rPr>
+              <a:t>Таблица 1. Метрики моделей: ранжирование упражнений</a:t>
+            </a:r>
           </a:p>
         </p:txBody>
       </p:sp>
@@ -7076,14 +6288,14 @@
           <p:nvPr/>
         </p:nvGraphicFramePr>
         <p:xfrm>
-          <a:off x="838047" y="1280160"/>
-          <a:ext cx="10515600" cy="2468880"/>
+          <a:off x="838047" y="2125980"/>
+          <a:ext cx="10515600" cy="3703320"/>
         </p:xfrm>
         <a:graphic>
           <a:graphicData uri="http://schemas.openxmlformats.org/drawingml/2006/table">
             <a:tbl>
-              <a:tblPr firstRow="1" bandRow="1">
-                <a:tableStyleId>{5C22544A-7EE6-4342-B048-85BDC9FD1C3A}</a:tableStyleId>
+              <a:tblPr firstRow="0" bandRow="0">
+                <a:tableStyleId>{5940675A-B579-460E-94D1-54222C63F5DA}</a:tableStyleId>
               </a:tblPr>
               <a:tblGrid>
                 <a:gridCol w="2103120"/>
@@ -7092,7 +6304,7 @@
                 <a:gridCol w="2103120"/>
                 <a:gridCol w="2103120"/>
               </a:tblGrid>
-              <a:tr h="493776">
+              <a:tr h="594360">
                 <a:tc>
                   <a:txBody>
                     <a:bodyPr/>
@@ -7100,19 +6312,19 @@
                     <a:p>
                       <a:pPr algn="ctr"/>
                       <a:r>
-                        <a:rPr sz="1400" b="1">
+                        <a:rPr sz="1800" b="1">
                           <a:solidFill>
                             <a:srgbClr val="FFFFFF"/>
                           </a:solidFill>
-                          <a:latin typeface="Calibri"/>
+                          <a:latin typeface="Times New Roman"/>
                         </a:rPr>
                         <a:t>Модель</a:t>
                       </a:r>
                     </a:p>
                   </a:txBody>
-                  <a:tcPr>
+                  <a:tcPr anchor="ctr">
                     <a:solidFill>
-                      <a:srgbClr val="7F0DF2"/>
+                      <a:srgbClr val="000000"/>
                     </a:solidFill>
                   </a:tcPr>
                 </a:tc>
@@ -7123,19 +6335,19 @@
                     <a:p>
                       <a:pPr algn="ctr"/>
                       <a:r>
-                        <a:rPr sz="1400" b="1">
+                        <a:rPr sz="1800" b="1">
                           <a:solidFill>
                             <a:srgbClr val="FFFFFF"/>
                           </a:solidFill>
-                          <a:latin typeface="Calibri"/>
+                          <a:latin typeface="Times New Roman"/>
                         </a:rPr>
                         <a:t>ROC-AUC</a:t>
                       </a:r>
                     </a:p>
                   </a:txBody>
-                  <a:tcPr>
+                  <a:tcPr anchor="ctr">
                     <a:solidFill>
-                      <a:srgbClr val="7F0DF2"/>
+                      <a:srgbClr val="000000"/>
                     </a:solidFill>
                   </a:tcPr>
                 </a:tc>
@@ -7146,19 +6358,19 @@
                     <a:p>
                       <a:pPr algn="ctr"/>
                       <a:r>
-                        <a:rPr sz="1400" b="1">
+                        <a:rPr sz="1800" b="1">
                           <a:solidFill>
                             <a:srgbClr val="FFFFFF"/>
                           </a:solidFill>
-                          <a:latin typeface="Calibri"/>
+                          <a:latin typeface="Times New Roman"/>
                         </a:rPr>
                         <a:t>PR-AUC</a:t>
                       </a:r>
                     </a:p>
                   </a:txBody>
-                  <a:tcPr>
+                  <a:tcPr anchor="ctr">
                     <a:solidFill>
-                      <a:srgbClr val="7F0DF2"/>
+                      <a:srgbClr val="000000"/>
                     </a:solidFill>
                   </a:tcPr>
                 </a:tc>
@@ -7169,19 +6381,19 @@
                     <a:p>
                       <a:pPr algn="ctr"/>
                       <a:r>
-                        <a:rPr sz="1400" b="1">
+                        <a:rPr sz="1800" b="1">
                           <a:solidFill>
                             <a:srgbClr val="FFFFFF"/>
                           </a:solidFill>
-                          <a:latin typeface="Calibri"/>
+                          <a:latin typeface="Times New Roman"/>
                         </a:rPr>
                         <a:t>Precision@8</a:t>
                       </a:r>
                     </a:p>
                   </a:txBody>
-                  <a:tcPr>
+                  <a:tcPr anchor="ctr">
                     <a:solidFill>
-                      <a:srgbClr val="7F0DF2"/>
+                      <a:srgbClr val="000000"/>
                     </a:solidFill>
                   </a:tcPr>
                 </a:tc>
@@ -7192,24 +6404,24 @@
                     <a:p>
                       <a:pPr algn="ctr"/>
                       <a:r>
-                        <a:rPr sz="1400" b="1">
+                        <a:rPr sz="1800" b="1">
                           <a:solidFill>
                             <a:srgbClr val="FFFFFF"/>
                           </a:solidFill>
-                          <a:latin typeface="Calibri"/>
+                          <a:latin typeface="Times New Roman"/>
                         </a:rPr>
                         <a:t>Recall@8</a:t>
                       </a:r>
                     </a:p>
                   </a:txBody>
-                  <a:tcPr>
+                  <a:tcPr anchor="ctr">
                     <a:solidFill>
-                      <a:srgbClr val="7F0DF2"/>
+                      <a:srgbClr val="000000"/>
                     </a:solidFill>
                   </a:tcPr>
                 </a:tc>
               </a:tr>
-              <a:tr h="493776">
+              <a:tr h="777240">
                 <a:tc>
                   <a:txBody>
                     <a:bodyPr/>
@@ -7217,213 +6429,19 @@
                     <a:p>
                       <a:pPr algn="l"/>
                       <a:r>
-                        <a:rPr sz="1300" b="0">
+                        <a:rPr sz="1600" b="0">
                           <a:solidFill>
                             <a:srgbClr val="1F1F1F"/>
                           </a:solidFill>
-                          <a:latin typeface="Calibri"/>
+                          <a:latin typeface="Times New Roman"/>
                         </a:rPr>
                         <a:t>Popularity baseline</a:t>
                       </a:r>
                     </a:p>
                   </a:txBody>
-                  <a:tcPr/>
-                </a:tc>
-                <a:tc>
-                  <a:txBody>
-                    <a:bodyPr/>
-                    <a:lstStyle/>
-                    <a:p>
-                      <a:pPr algn="ctr"/>
-                      <a:r>
-                        <a:rPr sz="1300" b="0">
-                          <a:solidFill>
-                            <a:srgbClr val="1F1F1F"/>
-                          </a:solidFill>
-                          <a:latin typeface="Calibri"/>
-                        </a:rPr>
-                        <a:t>0,500</a:t>
-                      </a:r>
-                    </a:p>
-                  </a:txBody>
-                  <a:tcPr/>
-                </a:tc>
-                <a:tc>
-                  <a:txBody>
-                    <a:bodyPr/>
-                    <a:lstStyle/>
-                    <a:p>
-                      <a:pPr algn="ctr"/>
-                      <a:r>
-                        <a:rPr sz="1300" b="0">
-                          <a:solidFill>
-                            <a:srgbClr val="1F1F1F"/>
-                          </a:solidFill>
-                          <a:latin typeface="Calibri"/>
-                        </a:rPr>
-                        <a:t>0,679</a:t>
-                      </a:r>
-                    </a:p>
-                  </a:txBody>
-                  <a:tcPr/>
-                </a:tc>
-                <a:tc>
-                  <a:txBody>
-                    <a:bodyPr/>
-                    <a:lstStyle/>
-                    <a:p>
-                      <a:pPr algn="ctr"/>
-                      <a:r>
-                        <a:rPr sz="1300" b="0">
-                          <a:solidFill>
-                            <a:srgbClr val="1F1F1F"/>
-                          </a:solidFill>
-                          <a:latin typeface="Calibri"/>
-                        </a:rPr>
-                        <a:t>0,689</a:t>
-                      </a:r>
-                    </a:p>
-                  </a:txBody>
-                  <a:tcPr/>
-                </a:tc>
-                <a:tc>
-                  <a:txBody>
-                    <a:bodyPr/>
-                    <a:lstStyle/>
-                    <a:p>
-                      <a:pPr algn="ctr"/>
-                      <a:r>
-                        <a:rPr sz="1300" b="0">
-                          <a:solidFill>
-                            <a:srgbClr val="1F1F1F"/>
-                          </a:solidFill>
-                          <a:latin typeface="Calibri"/>
-                        </a:rPr>
-                        <a:t>0,104</a:t>
-                      </a:r>
-                    </a:p>
-                  </a:txBody>
-                  <a:tcPr/>
-                </a:tc>
-              </a:tr>
-              <a:tr h="493776">
-                <a:tc>
-                  <a:txBody>
-                    <a:bodyPr/>
-                    <a:lstStyle/>
-                    <a:p>
-                      <a:pPr algn="l"/>
-                      <a:r>
-                        <a:rPr sz="1300" b="0">
-                          <a:solidFill>
-                            <a:srgbClr val="1F1F1F"/>
-                          </a:solidFill>
-                          <a:latin typeface="Calibri"/>
-                        </a:rPr>
-                        <a:t>Logistic Regression</a:t>
-                      </a:r>
-                    </a:p>
-                  </a:txBody>
-                  <a:tcPr/>
-                </a:tc>
-                <a:tc>
-                  <a:txBody>
-                    <a:bodyPr/>
-                    <a:lstStyle/>
-                    <a:p>
-                      <a:pPr algn="ctr"/>
-                      <a:r>
-                        <a:rPr sz="1300" b="0">
-                          <a:solidFill>
-                            <a:srgbClr val="1F1F1F"/>
-                          </a:solidFill>
-                          <a:latin typeface="Calibri"/>
-                        </a:rPr>
-                        <a:t>0,939</a:t>
-                      </a:r>
-                    </a:p>
-                  </a:txBody>
-                  <a:tcPr/>
-                </a:tc>
-                <a:tc>
-                  <a:txBody>
-                    <a:bodyPr/>
-                    <a:lstStyle/>
-                    <a:p>
-                      <a:pPr algn="ctr"/>
-                      <a:r>
-                        <a:rPr sz="1300" b="0">
-                          <a:solidFill>
-                            <a:srgbClr val="1F1F1F"/>
-                          </a:solidFill>
-                          <a:latin typeface="Calibri"/>
-                        </a:rPr>
-                        <a:t>0,964</a:t>
-                      </a:r>
-                    </a:p>
-                  </a:txBody>
-                  <a:tcPr/>
-                </a:tc>
-                <a:tc>
-                  <a:txBody>
-                    <a:bodyPr/>
-                    <a:lstStyle/>
-                    <a:p>
-                      <a:pPr algn="ctr"/>
-                      <a:r>
-                        <a:rPr sz="1300" b="0">
-                          <a:solidFill>
-                            <a:srgbClr val="1F1F1F"/>
-                          </a:solidFill>
-                          <a:latin typeface="Calibri"/>
-                        </a:rPr>
-                        <a:t>0,952</a:t>
-                      </a:r>
-                    </a:p>
-                  </a:txBody>
-                  <a:tcPr/>
-                </a:tc>
-                <a:tc>
-                  <a:txBody>
-                    <a:bodyPr/>
-                    <a:lstStyle/>
-                    <a:p>
-                      <a:pPr algn="ctr"/>
-                      <a:r>
-                        <a:rPr sz="1300" b="0">
-                          <a:solidFill>
-                            <a:srgbClr val="1F1F1F"/>
-                          </a:solidFill>
-                          <a:latin typeface="Calibri"/>
-                        </a:rPr>
-                        <a:t>0,232</a:t>
-                      </a:r>
-                    </a:p>
-                  </a:txBody>
-                  <a:tcPr/>
-                </a:tc>
-              </a:tr>
-              <a:tr h="493776">
-                <a:tc>
-                  <a:txBody>
-                    <a:bodyPr/>
-                    <a:lstStyle/>
-                    <a:p>
-                      <a:pPr algn="l"/>
-                      <a:r>
-                        <a:rPr sz="1300" b="1">
-                          <a:solidFill>
-                            <a:srgbClr val="1F1F1F"/>
-                          </a:solidFill>
-                          <a:latin typeface="Calibri"/>
-                        </a:rPr>
-                        <a:t>LightGBM (GBDT)</a:t>
-                      </a:r>
-                    </a:p>
-                  </a:txBody>
-                  <a:tcPr>
+                  <a:tcPr anchor="ctr">
                     <a:solidFill>
-                      <a:srgbClr val="F3E8FF"/>
+                      <a:srgbClr val="FFFFFF"/>
                     </a:solidFill>
                   </a:tcPr>
                 </a:tc>
@@ -7434,19 +6452,19 @@
                     <a:p>
                       <a:pPr algn="ctr"/>
                       <a:r>
-                        <a:rPr sz="1300" b="1">
+                        <a:rPr sz="1600" b="0">
                           <a:solidFill>
                             <a:srgbClr val="1F1F1F"/>
                           </a:solidFill>
-                          <a:latin typeface="Calibri"/>
+                          <a:latin typeface="Times New Roman"/>
                         </a:rPr>
-                        <a:t>0,985</a:t>
+                        <a:t>0,500</a:t>
                       </a:r>
                     </a:p>
                   </a:txBody>
-                  <a:tcPr>
+                  <a:tcPr anchor="ctr">
                     <a:solidFill>
-                      <a:srgbClr val="F3E8FF"/>
+                      <a:srgbClr val="FFFFFF"/>
                     </a:solidFill>
                   </a:tcPr>
                 </a:tc>
@@ -7457,19 +6475,19 @@
                     <a:p>
                       <a:pPr algn="ctr"/>
                       <a:r>
-                        <a:rPr sz="1300" b="1">
+                        <a:rPr sz="1600" b="0">
                           <a:solidFill>
                             <a:srgbClr val="1F1F1F"/>
                           </a:solidFill>
-                          <a:latin typeface="Calibri"/>
+                          <a:latin typeface="Times New Roman"/>
                         </a:rPr>
-                        <a:t>0,993</a:t>
+                        <a:t>0,679</a:t>
                       </a:r>
                     </a:p>
                   </a:txBody>
-                  <a:tcPr>
+                  <a:tcPr anchor="ctr">
                     <a:solidFill>
-                      <a:srgbClr val="F3E8FF"/>
+                      <a:srgbClr val="FFFFFF"/>
                     </a:solidFill>
                   </a:tcPr>
                 </a:tc>
@@ -7480,19 +6498,19 @@
                     <a:p>
                       <a:pPr algn="ctr"/>
                       <a:r>
-                        <a:rPr sz="1300" b="1">
+                        <a:rPr sz="1600" b="0">
                           <a:solidFill>
                             <a:srgbClr val="1F1F1F"/>
                           </a:solidFill>
-                          <a:latin typeface="Calibri"/>
+                          <a:latin typeface="Times New Roman"/>
                         </a:rPr>
-                        <a:t>0,990</a:t>
+                        <a:t>0,689</a:t>
                       </a:r>
                     </a:p>
                   </a:txBody>
-                  <a:tcPr>
+                  <a:tcPr anchor="ctr">
                     <a:solidFill>
-                      <a:srgbClr val="F3E8FF"/>
+                      <a:srgbClr val="FFFFFF"/>
                     </a:solidFill>
                   </a:tcPr>
                 </a:tc>
@@ -7503,24 +6521,24 @@
                     <a:p>
                       <a:pPr algn="ctr"/>
                       <a:r>
-                        <a:rPr sz="1300" b="1">
+                        <a:rPr sz="1600" b="0">
                           <a:solidFill>
                             <a:srgbClr val="1F1F1F"/>
                           </a:solidFill>
-                          <a:latin typeface="Calibri"/>
+                          <a:latin typeface="Times New Roman"/>
                         </a:rPr>
-                        <a:t>0,241</a:t>
+                        <a:t>0,104</a:t>
                       </a:r>
                     </a:p>
                   </a:txBody>
-                  <a:tcPr>
+                  <a:tcPr anchor="ctr">
                     <a:solidFill>
-                      <a:srgbClr val="F3E8FF"/>
+                      <a:srgbClr val="FFFFFF"/>
                     </a:solidFill>
                   </a:tcPr>
                 </a:tc>
               </a:tr>
-              <a:tr h="493776">
+              <a:tr h="777240">
                 <a:tc>
                   <a:txBody>
                     <a:bodyPr/>
@@ -7528,17 +6546,21 @@
                     <a:p>
                       <a:pPr algn="l"/>
                       <a:r>
-                        <a:rPr sz="1300" b="0">
+                        <a:rPr sz="1600" b="0">
                           <a:solidFill>
                             <a:srgbClr val="1F1F1F"/>
                           </a:solidFill>
-                          <a:latin typeface="Calibri"/>
+                          <a:latin typeface="Times New Roman"/>
                         </a:rPr>
-                        <a:t>MLP (нейросеть)</a:t>
+                        <a:t>Logistic Regression</a:t>
                       </a:r>
                     </a:p>
                   </a:txBody>
-                  <a:tcPr/>
+                  <a:tcPr anchor="ctr">
+                    <a:solidFill>
+                      <a:srgbClr val="FFFFFF"/>
+                    </a:solidFill>
+                  </a:tcPr>
                 </a:tc>
                 <a:tc>
                   <a:txBody>
@@ -7547,17 +6569,21 @@
                     <a:p>
                       <a:pPr algn="ctr"/>
                       <a:r>
-                        <a:rPr sz="1300" b="0">
+                        <a:rPr sz="1600" b="0">
                           <a:solidFill>
                             <a:srgbClr val="1F1F1F"/>
                           </a:solidFill>
-                          <a:latin typeface="Calibri"/>
+                          <a:latin typeface="Times New Roman"/>
                         </a:rPr>
-                        <a:t>0,985</a:t>
+                        <a:t>0,939</a:t>
                       </a:r>
                     </a:p>
                   </a:txBody>
-                  <a:tcPr/>
+                  <a:tcPr anchor="ctr">
+                    <a:solidFill>
+                      <a:srgbClr val="FFFFFF"/>
+                    </a:solidFill>
+                  </a:tcPr>
                 </a:tc>
                 <a:tc>
                   <a:txBody>
@@ -7566,17 +6592,21 @@
                     <a:p>
                       <a:pPr algn="ctr"/>
                       <a:r>
-                        <a:rPr sz="1300" b="0">
+                        <a:rPr sz="1600" b="0">
                           <a:solidFill>
                             <a:srgbClr val="1F1F1F"/>
                           </a:solidFill>
-                          <a:latin typeface="Calibri"/>
+                          <a:latin typeface="Times New Roman"/>
                         </a:rPr>
-                        <a:t>0,993</a:t>
+                        <a:t>0,964</a:t>
                       </a:r>
                     </a:p>
                   </a:txBody>
-                  <a:tcPr/>
+                  <a:tcPr anchor="ctr">
+                    <a:solidFill>
+                      <a:srgbClr val="FFFFFF"/>
+                    </a:solidFill>
+                  </a:tcPr>
                 </a:tc>
                 <a:tc>
                   <a:txBody>
@@ -7585,17 +6615,21 @@
                     <a:p>
                       <a:pPr algn="ctr"/>
                       <a:r>
-                        <a:rPr sz="1300" b="0">
+                        <a:rPr sz="1600" b="0">
                           <a:solidFill>
                             <a:srgbClr val="1F1F1F"/>
                           </a:solidFill>
-                          <a:latin typeface="Calibri"/>
+                          <a:latin typeface="Times New Roman"/>
                         </a:rPr>
-                        <a:t>0,990</a:t>
+                        <a:t>0,952</a:t>
                       </a:r>
                     </a:p>
                   </a:txBody>
-                  <a:tcPr/>
+                  <a:tcPr anchor="ctr">
+                    <a:solidFill>
+                      <a:srgbClr val="FFFFFF"/>
+                    </a:solidFill>
+                  </a:tcPr>
                 </a:tc>
                 <a:tc>
                   <a:txBody>
@@ -7604,17 +6638,255 @@
                     <a:p>
                       <a:pPr algn="ctr"/>
                       <a:r>
-                        <a:rPr sz="1300" b="0">
+                        <a:rPr sz="1600" b="0">
                           <a:solidFill>
                             <a:srgbClr val="1F1F1F"/>
                           </a:solidFill>
-                          <a:latin typeface="Calibri"/>
+                          <a:latin typeface="Times New Roman"/>
+                        </a:rPr>
+                        <a:t>0,232</a:t>
+                      </a:r>
+                    </a:p>
+                  </a:txBody>
+                  <a:tcPr anchor="ctr">
+                    <a:solidFill>
+                      <a:srgbClr val="FFFFFF"/>
+                    </a:solidFill>
+                  </a:tcPr>
+                </a:tc>
+              </a:tr>
+              <a:tr h="777240">
+                <a:tc>
+                  <a:txBody>
+                    <a:bodyPr/>
+                    <a:lstStyle/>
+                    <a:p>
+                      <a:pPr algn="l"/>
+                      <a:r>
+                        <a:rPr sz="1600" b="1">
+                          <a:solidFill>
+                            <a:srgbClr val="FFFFFF"/>
+                          </a:solidFill>
+                          <a:latin typeface="Times New Roman"/>
+                        </a:rPr>
+                        <a:t>LightGBM (GBDT)</a:t>
+                      </a:r>
+                    </a:p>
+                  </a:txBody>
+                  <a:tcPr anchor="ctr">
+                    <a:solidFill>
+                      <a:srgbClr val="000000"/>
+                    </a:solidFill>
+                  </a:tcPr>
+                </a:tc>
+                <a:tc>
+                  <a:txBody>
+                    <a:bodyPr/>
+                    <a:lstStyle/>
+                    <a:p>
+                      <a:pPr algn="ctr"/>
+                      <a:r>
+                        <a:rPr sz="1600" b="1">
+                          <a:solidFill>
+                            <a:srgbClr val="FFFFFF"/>
+                          </a:solidFill>
+                          <a:latin typeface="Times New Roman"/>
+                        </a:rPr>
+                        <a:t>0,985</a:t>
+                      </a:r>
+                    </a:p>
+                  </a:txBody>
+                  <a:tcPr anchor="ctr">
+                    <a:solidFill>
+                      <a:srgbClr val="000000"/>
+                    </a:solidFill>
+                  </a:tcPr>
+                </a:tc>
+                <a:tc>
+                  <a:txBody>
+                    <a:bodyPr/>
+                    <a:lstStyle/>
+                    <a:p>
+                      <a:pPr algn="ctr"/>
+                      <a:r>
+                        <a:rPr sz="1600" b="1">
+                          <a:solidFill>
+                            <a:srgbClr val="FFFFFF"/>
+                          </a:solidFill>
+                          <a:latin typeface="Times New Roman"/>
+                        </a:rPr>
+                        <a:t>0,993</a:t>
+                      </a:r>
+                    </a:p>
+                  </a:txBody>
+                  <a:tcPr anchor="ctr">
+                    <a:solidFill>
+                      <a:srgbClr val="000000"/>
+                    </a:solidFill>
+                  </a:tcPr>
+                </a:tc>
+                <a:tc>
+                  <a:txBody>
+                    <a:bodyPr/>
+                    <a:lstStyle/>
+                    <a:p>
+                      <a:pPr algn="ctr"/>
+                      <a:r>
+                        <a:rPr sz="1600" b="1">
+                          <a:solidFill>
+                            <a:srgbClr val="FFFFFF"/>
+                          </a:solidFill>
+                          <a:latin typeface="Times New Roman"/>
+                        </a:rPr>
+                        <a:t>0,990</a:t>
+                      </a:r>
+                    </a:p>
+                  </a:txBody>
+                  <a:tcPr anchor="ctr">
+                    <a:solidFill>
+                      <a:srgbClr val="000000"/>
+                    </a:solidFill>
+                  </a:tcPr>
+                </a:tc>
+                <a:tc>
+                  <a:txBody>
+                    <a:bodyPr/>
+                    <a:lstStyle/>
+                    <a:p>
+                      <a:pPr algn="ctr"/>
+                      <a:r>
+                        <a:rPr sz="1600" b="1">
+                          <a:solidFill>
+                            <a:srgbClr val="FFFFFF"/>
+                          </a:solidFill>
+                          <a:latin typeface="Times New Roman"/>
                         </a:rPr>
                         <a:t>0,241</a:t>
                       </a:r>
                     </a:p>
                   </a:txBody>
-                  <a:tcPr/>
+                  <a:tcPr anchor="ctr">
+                    <a:solidFill>
+                      <a:srgbClr val="000000"/>
+                    </a:solidFill>
+                  </a:tcPr>
+                </a:tc>
+              </a:tr>
+              <a:tr h="777240">
+                <a:tc>
+                  <a:txBody>
+                    <a:bodyPr/>
+                    <a:lstStyle/>
+                    <a:p>
+                      <a:pPr algn="l"/>
+                      <a:r>
+                        <a:rPr sz="1600" b="0">
+                          <a:solidFill>
+                            <a:srgbClr val="1F1F1F"/>
+                          </a:solidFill>
+                          <a:latin typeface="Times New Roman"/>
+                        </a:rPr>
+                        <a:t>MLP (нейросеть)</a:t>
+                      </a:r>
+                    </a:p>
+                  </a:txBody>
+                  <a:tcPr anchor="ctr">
+                    <a:solidFill>
+                      <a:srgbClr val="FFFFFF"/>
+                    </a:solidFill>
+                  </a:tcPr>
+                </a:tc>
+                <a:tc>
+                  <a:txBody>
+                    <a:bodyPr/>
+                    <a:lstStyle/>
+                    <a:p>
+                      <a:pPr algn="ctr"/>
+                      <a:r>
+                        <a:rPr sz="1600" b="0">
+                          <a:solidFill>
+                            <a:srgbClr val="1F1F1F"/>
+                          </a:solidFill>
+                          <a:latin typeface="Times New Roman"/>
+                        </a:rPr>
+                        <a:t>0,985</a:t>
+                      </a:r>
+                    </a:p>
+                  </a:txBody>
+                  <a:tcPr anchor="ctr">
+                    <a:solidFill>
+                      <a:srgbClr val="FFFFFF"/>
+                    </a:solidFill>
+                  </a:tcPr>
+                </a:tc>
+                <a:tc>
+                  <a:txBody>
+                    <a:bodyPr/>
+                    <a:lstStyle/>
+                    <a:p>
+                      <a:pPr algn="ctr"/>
+                      <a:r>
+                        <a:rPr sz="1600" b="0">
+                          <a:solidFill>
+                            <a:srgbClr val="1F1F1F"/>
+                          </a:solidFill>
+                          <a:latin typeface="Times New Roman"/>
+                        </a:rPr>
+                        <a:t>0,993</a:t>
+                      </a:r>
+                    </a:p>
+                  </a:txBody>
+                  <a:tcPr anchor="ctr">
+                    <a:solidFill>
+                      <a:srgbClr val="FFFFFF"/>
+                    </a:solidFill>
+                  </a:tcPr>
+                </a:tc>
+                <a:tc>
+                  <a:txBody>
+                    <a:bodyPr/>
+                    <a:lstStyle/>
+                    <a:p>
+                      <a:pPr algn="ctr"/>
+                      <a:r>
+                        <a:rPr sz="1600" b="0">
+                          <a:solidFill>
+                            <a:srgbClr val="1F1F1F"/>
+                          </a:solidFill>
+                          <a:latin typeface="Times New Roman"/>
+                        </a:rPr>
+                        <a:t>0,990</a:t>
+                      </a:r>
+                    </a:p>
+                  </a:txBody>
+                  <a:tcPr anchor="ctr">
+                    <a:solidFill>
+                      <a:srgbClr val="FFFFFF"/>
+                    </a:solidFill>
+                  </a:tcPr>
+                </a:tc>
+                <a:tc>
+                  <a:txBody>
+                    <a:bodyPr/>
+                    <a:lstStyle/>
+                    <a:p>
+                      <a:pPr algn="ctr"/>
+                      <a:r>
+                        <a:rPr sz="1600" b="0">
+                          <a:solidFill>
+                            <a:srgbClr val="1F1F1F"/>
+                          </a:solidFill>
+                          <a:latin typeface="Times New Roman"/>
+                        </a:rPr>
+                        <a:t>0,241</a:t>
+                      </a:r>
+                    </a:p>
+                  </a:txBody>
+                  <a:tcPr anchor="ctr">
+                    <a:solidFill>
+                      <a:srgbClr val="FFFFFF"/>
+                    </a:solidFill>
+                  </a:tcPr>
                 </a:tc>
               </a:tr>
             </a:tbl>
@@ -7629,7 +6901,7 @@
         </p:nvSpPr>
         <p:spPr>
           <a:xfrm>
-            <a:off x="548640" y="4023359"/>
+            <a:off x="548640" y="6103620"/>
             <a:ext cx="10972800" cy="640080"/>
           </a:xfrm>
           <a:prstGeom prst="rect">
@@ -7649,9 +6921,9 @@
                 <a:solidFill>
                   <a:srgbClr val="555555"/>
                 </a:solidFill>
-                <a:latin typeface="Calibri"/>
-              </a:rPr>
-              <a:t>LightGBM и MLP дают идентичную точность; LightGBM выбран в прод за ×3–5 более быстрый инференс и нативный feature importance.</a:t>
+                <a:latin typeface="Times New Roman"/>
+              </a:rPr>
+              <a:t>LightGBM и MLP дают идентичную точность; LightGBM выбран основной за ×3–5 более быстрый инференс и нативный feature importance.</a:t>
             </a:r>
           </a:p>
         </p:txBody>
@@ -7664,8 +6936,8 @@
         </p:nvSpPr>
         <p:spPr>
           <a:xfrm>
-            <a:off x="548640" y="6446520"/>
-            <a:ext cx="5486400" cy="274320"/>
+            <a:off x="10332720" y="6263640"/>
+            <a:ext cx="1371600" cy="457200"/>
           </a:xfrm>
           <a:prstGeom prst="rect">
             <a:avLst/>
@@ -7678,50 +6950,15 @@
           </a:bodyPr>
           <a:lstStyle/>
           <a:p>
-            <a:pPr algn="l"/>
-            <a:r>
-              <a:rPr sz="1000" b="0">
+            <a:pPr algn="r"/>
+            <a:r>
+              <a:rPr sz="2000" b="0">
                 <a:solidFill>
                   <a:srgbClr val="555555"/>
                 </a:solidFill>
-                <a:latin typeface="Calibri"/>
-              </a:rPr>
-              <a:t>Ощепков Е. С.  ·  ВКР 2026  ·  Fitness Tracker</a:t>
-            </a:r>
-          </a:p>
-        </p:txBody>
-      </p:sp>
-      <p:sp>
-        <p:nvSpPr>
-          <p:cNvPr id="7" name="TextBox 6"/>
-          <p:cNvSpPr txBox="1"/>
-          <p:nvPr/>
-        </p:nvSpPr>
-        <p:spPr>
-          <a:xfrm>
-            <a:off x="10515600" y="6446520"/>
-            <a:ext cx="1188720" cy="274320"/>
-          </a:xfrm>
-          <a:prstGeom prst="rect">
-            <a:avLst/>
-          </a:prstGeom>
-          <a:noFill/>
-        </p:spPr>
-        <p:txBody>
-          <a:bodyPr wrap="square">
-            <a:spAutoFit/>
-          </a:bodyPr>
-          <a:lstStyle/>
-          <a:p>
-            <a:pPr algn="r"/>
-            <a:r>
-              <a:rPr sz="1000" b="0">
-                <a:solidFill>
-                  <a:srgbClr val="555555"/>
-                </a:solidFill>
-                <a:latin typeface="Calibri"/>
-              </a:rPr>
-              <a:t>8 / 14</a:t>
+                <a:latin typeface="Times New Roman"/>
+              </a:rPr>
+              <a:t>8</a:t>
             </a:r>
           </a:p>
         </p:txBody>
@@ -7772,59 +7009,16 @@
                 <a:solidFill>
                   <a:srgbClr val="1F1F1F"/>
                 </a:solidFill>
-                <a:latin typeface="Calibri"/>
+                <a:latin typeface="Times New Roman"/>
               </a:rPr>
               <a:t>Что внутри модели: feature importance</a:t>
             </a:r>
-          </a:p>
-        </p:txBody>
-      </p:sp>
-      <p:sp>
-        <p:nvSpPr>
-          <p:cNvPr id="3" name="Rectangle 2"/>
-          <p:cNvSpPr/>
-          <p:nvPr/>
-        </p:nvSpPr>
-        <p:spPr>
-          <a:xfrm>
-            <a:off x="548640" y="594360"/>
-            <a:ext cx="1097280" cy="54864"/>
-          </a:xfrm>
-          <a:prstGeom prst="rect">
-            <a:avLst/>
-          </a:prstGeom>
-          <a:solidFill>
-            <a:srgbClr val="7F0DF2"/>
-          </a:solidFill>
-          <a:ln>
-            <a:noFill/>
-          </a:ln>
-        </p:spPr>
-        <p:style>
-          <a:lnRef idx="1">
-            <a:schemeClr val="accent1"/>
-          </a:lnRef>
-          <a:fillRef idx="3">
-            <a:schemeClr val="accent1"/>
-          </a:fillRef>
-          <a:effectRef idx="2">
-            <a:schemeClr val="accent1"/>
-          </a:effectRef>
-          <a:fontRef idx="minor">
-            <a:schemeClr val="lt1"/>
-          </a:fontRef>
-        </p:style>
-        <p:txBody>
-          <a:bodyPr rtlCol="0" anchor="ctr"/>
-          <a:lstStyle/>
-          <a:p>
-            <a:pPr algn="ctr"/>
           </a:p>
         </p:txBody>
       </p:sp>
       <p:pic>
         <p:nvPicPr>
-          <p:cNvPr id="4" name="Picture 3" descr="image.png"/>
+          <p:cNvPr id="3" name="Picture 2" descr="image.png"/>
           <p:cNvPicPr>
             <a:picLocks noChangeAspect="1"/>
           </p:cNvPicPr>
@@ -7838,8 +7032,8 @@
         </p:blipFill>
         <p:spPr>
           <a:xfrm>
-            <a:off x="1097280" y="1005840"/>
-            <a:ext cx="10058400" cy="5181600"/>
+            <a:off x="1480817" y="960120"/>
+            <a:ext cx="9230061" cy="4754880"/>
           </a:xfrm>
           <a:prstGeom prst="rect">
             <a:avLst/>
@@ -7848,7 +7042,7 @@
       </p:pic>
       <p:sp>
         <p:nvSpPr>
-          <p:cNvPr id="5" name="TextBox 4"/>
+          <p:cNvPr id="4" name="TextBox 3"/>
           <p:cNvSpPr txBox="1"/>
           <p:nvPr/>
         </p:nvSpPr>
@@ -7874,7 +7068,7 @@
                 <a:solidFill>
                   <a:srgbClr val="555555"/>
                 </a:solidFill>
-                <a:latin typeface="Calibri"/>
+                <a:latin typeface="Times New Roman"/>
               </a:rPr>
               <a:t>Главный сигнал — оборудование (user_equipment_count); это методологически осмысленно: рекомендовать упражнение со штангой пользователю без штанги не имеет смысла. Цель — на третьем месте.</a:t>
             </a:r>
@@ -7883,14 +7077,14 @@
       </p:sp>
       <p:sp>
         <p:nvSpPr>
-          <p:cNvPr id="6" name="TextBox 5"/>
+          <p:cNvPr id="5" name="TextBox 4"/>
           <p:cNvSpPr txBox="1"/>
           <p:nvPr/>
         </p:nvSpPr>
         <p:spPr>
           <a:xfrm>
-            <a:off x="548640" y="6446520"/>
-            <a:ext cx="5486400" cy="274320"/>
+            <a:off x="10332720" y="6263640"/>
+            <a:ext cx="1371600" cy="457200"/>
           </a:xfrm>
           <a:prstGeom prst="rect">
             <a:avLst/>
@@ -7903,50 +7097,15 @@
           </a:bodyPr>
           <a:lstStyle/>
           <a:p>
-            <a:pPr algn="l"/>
-            <a:r>
-              <a:rPr sz="1000" b="0">
+            <a:pPr algn="r"/>
+            <a:r>
+              <a:rPr sz="2000" b="0">
                 <a:solidFill>
                   <a:srgbClr val="555555"/>
                 </a:solidFill>
-                <a:latin typeface="Calibri"/>
-              </a:rPr>
-              <a:t>Ощепков Е. С.  ·  ВКР 2026  ·  Fitness Tracker</a:t>
-            </a:r>
-          </a:p>
-        </p:txBody>
-      </p:sp>
-      <p:sp>
-        <p:nvSpPr>
-          <p:cNvPr id="7" name="TextBox 6"/>
-          <p:cNvSpPr txBox="1"/>
-          <p:nvPr/>
-        </p:nvSpPr>
-        <p:spPr>
-          <a:xfrm>
-            <a:off x="10515600" y="6446520"/>
-            <a:ext cx="1188720" cy="274320"/>
-          </a:xfrm>
-          <a:prstGeom prst="rect">
-            <a:avLst/>
-          </a:prstGeom>
-          <a:noFill/>
-        </p:spPr>
-        <p:txBody>
-          <a:bodyPr wrap="square">
-            <a:spAutoFit/>
-          </a:bodyPr>
-          <a:lstStyle/>
-          <a:p>
-            <a:pPr algn="r"/>
-            <a:r>
-              <a:rPr sz="1000" b="0">
-                <a:solidFill>
-                  <a:srgbClr val="555555"/>
-                </a:solidFill>
-                <a:latin typeface="Calibri"/>
-              </a:rPr>
-              <a:t>9 / 14</a:t>
+                <a:latin typeface="Times New Roman"/>
+              </a:rPr>
+              <a:t>9</a:t>
             </a:r>
           </a:p>
         </p:txBody>
